--- a/docs/assets/Runway-Guard-Pitch.pptx
+++ b/docs/assets/Runway-Guard-Pitch.pptx
@@ -2,19 +2,19 @@
 <file path=ppt/presentation.xml><?xml version="1.0" encoding="utf-8"?>
 <p:presentation xmlns:p="http://schemas.openxmlformats.org/presentationml/2006/main">
   <p:sldMasterIdLst>
-    <p:sldMasterId xmlns:r="http://schemas.openxmlformats.org/officeDocument/2006/relationships" id="2147483648" r:id="Rf93a8c52aabe47ad"/>
+    <p:sldMasterId xmlns:r="http://schemas.openxmlformats.org/officeDocument/2006/relationships" id="2147483648" r:id="R4ff549cdc8044d5f"/>
   </p:sldMasterIdLst>
   <p:notesMasterIdLst>
-    <p:notesMasterId xmlns:r="http://schemas.openxmlformats.org/officeDocument/2006/relationships" r:id="R9e960846d0784570"/>
+    <p:notesMasterId xmlns:r="http://schemas.openxmlformats.org/officeDocument/2006/relationships" r:id="Rb829fb05d5094da5"/>
   </p:notesMasterIdLst>
   <p:sldIdLst>
-    <p:sldId xmlns:r="http://schemas.openxmlformats.org/officeDocument/2006/relationships" id="256" r:id="R6432e6b3d99e47dd"/>
-    <p:sldId xmlns:r="http://schemas.openxmlformats.org/officeDocument/2006/relationships" id="257" r:id="R0944e063420f4e08"/>
-    <p:sldId xmlns:r="http://schemas.openxmlformats.org/officeDocument/2006/relationships" id="258" r:id="Ra25476c0b4ea449c"/>
-    <p:sldId xmlns:r="http://schemas.openxmlformats.org/officeDocument/2006/relationships" id="259" r:id="R77d2cbb1816a42ff"/>
-    <p:sldId xmlns:r="http://schemas.openxmlformats.org/officeDocument/2006/relationships" id="260" r:id="Rf68aa27094ba4653"/>
-    <p:sldId xmlns:r="http://schemas.openxmlformats.org/officeDocument/2006/relationships" id="261" r:id="R0e97f31fb2b44274"/>
-    <p:sldId xmlns:r="http://schemas.openxmlformats.org/officeDocument/2006/relationships" id="262" r:id="R12fcf79d724a4dfb"/>
+    <p:sldId xmlns:r="http://schemas.openxmlformats.org/officeDocument/2006/relationships" id="256" r:id="R4ce590323aff4a89"/>
+    <p:sldId xmlns:r="http://schemas.openxmlformats.org/officeDocument/2006/relationships" id="257" r:id="R504de60679b848b7"/>
+    <p:sldId xmlns:r="http://schemas.openxmlformats.org/officeDocument/2006/relationships" id="258" r:id="Rb139d0d9da224053"/>
+    <p:sldId xmlns:r="http://schemas.openxmlformats.org/officeDocument/2006/relationships" id="259" r:id="Rcf354c3455104a1f"/>
+    <p:sldId xmlns:r="http://schemas.openxmlformats.org/officeDocument/2006/relationships" id="260" r:id="R3bded071ef58488c"/>
+    <p:sldId xmlns:r="http://schemas.openxmlformats.org/officeDocument/2006/relationships" id="261" r:id="R757f8e187b584e5e"/>
+    <p:sldId xmlns:r="http://schemas.openxmlformats.org/officeDocument/2006/relationships" id="262" r:id="R0a331c82f17d4a17"/>
   </p:sldIdLst>
   <p:sldSz cx="12192000" cy="6858000"/>
   <p:notesSz cx="6858000" cy="9144000"/>
@@ -868,7 +868,7 @@
           <a:lstStyle xmlns:a="http://schemas.openxmlformats.org/drawingml/2006/main"/>
           <a:p xmlns:a="http://schemas.openxmlformats.org/drawingml/2006/main">
             <a:r>
-              <a:t>Repository supplied by user: https://github.com/shi1720/coinmarketcap . Deployment URL is an expected target pending owner confirmation, deliberately not labelled live. Campaign-key evidence, registration status, demo video, DoraHacks submission and X post need verification. Hackathon requirements: https://coinmarketcap.com/api/resources/api-hackathon/ . X post must link actual submission and demo video with#BuildwithCMC.</a:t>
+              <a:t>Repository supplied by user: https://github.com/shi1720/coinmarketcap . Public deployment confirmed by product owner: https://runway-guard.sg127977958.chatgpt.site . Campaign-key evidence, registration status, demo video, DoraHacks submission and X post need verification. Hackathon requirements: https://coinmarketcap.com/api/resources/api-hackathon/ . X post must link actual submission and demo video with#BuildwithCMC.</a:t>
             </a:r>
           </a:p>
         </p:txBody>
@@ -936,7 +936,7 @@
   </p:cSld>
   <p:clrMap bg1="lt1" tx1="dk1" bg2="lt2" tx2="dk2" accent1="accent1" accent2="accent2" accent3="accent3" accent4="accent4" accent5="accent5" accent6="accent6" hlink="hlink" folHlink="folHlink"/>
   <p:sldLayoutIdLst>
-    <p:sldLayoutId xmlns:r="http://schemas.openxmlformats.org/officeDocument/2006/relationships" id="2147483649" r:id="R71f49f27b95a4da3"/>
+    <p:sldLayoutId xmlns:r="http://schemas.openxmlformats.org/officeDocument/2006/relationships" id="2147483649" r:id="R72c7fb87ed4a4901"/>
   </p:sldLayoutIdLst>
   <p:txStyles>
     <p:titleStyle>
@@ -1487,7 +1487,7 @@
           <p:cNvPr id="6" name="">
             <a:extLst xmlns:a="http://schemas.openxmlformats.org/drawingml/2006/main">
               <a:ext uri="{FF2B5EF4-FFF2-40B4-BE49-F238E27FC236}">
-                <a16:creationId xmlns:a16="http://schemas.microsoft.com/office/drawing/2014/main" id="{BCD6381B-9215-4DA8-B3DF-A6C82FA16D4E}"/>
+                <a16:creationId xmlns:a16="http://schemas.microsoft.com/office/drawing/2014/main" id="{9A9AAACA-8723-47B3-92CD-7E86677549DF}"/>
               </a:ext>
             </a:extLst>
           </p:cNvPr>
@@ -1544,7 +1544,7 @@
           <p:cNvPr id="2" name="">
             <a:extLst xmlns:a="http://schemas.openxmlformats.org/drawingml/2006/main">
               <a:ext uri="{FF2B5EF4-FFF2-40B4-BE49-F238E27FC236}">
-                <a16:creationId xmlns:a16="http://schemas.microsoft.com/office/drawing/2014/main" id="{3B927515-B0CA-4704-9733-30FB223ED67D}"/>
+                <a16:creationId xmlns:a16="http://schemas.microsoft.com/office/drawing/2014/main" id="{8D04909A-9FD7-4BF0-9D65-D5CAD0BB33F5}"/>
               </a:ext>
             </a:extLst>
           </p:cNvPr>
@@ -1601,7 +1601,7 @@
           <p:cNvPr id="3" name="">
             <a:extLst xmlns:a="http://schemas.openxmlformats.org/drawingml/2006/main">
               <a:ext uri="{FF2B5EF4-FFF2-40B4-BE49-F238E27FC236}">
-                <a16:creationId xmlns:a16="http://schemas.microsoft.com/office/drawing/2014/main" id="{B1F7E649-7F90-4B84-A7E4-00BC02C60A3A}"/>
+                <a16:creationId xmlns:a16="http://schemas.microsoft.com/office/drawing/2014/main" id="{9A98CB03-B376-49EA-98A6-621451C5C827}"/>
               </a:ext>
             </a:extLst>
           </p:cNvPr>
@@ -1681,7 +1681,7 @@
           <p:cNvPr id="4" name="">
             <a:extLst xmlns:a="http://schemas.openxmlformats.org/drawingml/2006/main">
               <a:ext uri="{FF2B5EF4-FFF2-40B4-BE49-F238E27FC236}">
-                <a16:creationId xmlns:a16="http://schemas.microsoft.com/office/drawing/2014/main" id="{AE310426-06D3-4CF8-977A-08B65C833F09}"/>
+                <a16:creationId xmlns:a16="http://schemas.microsoft.com/office/drawing/2014/main" id="{F7DE72A7-F9C4-4682-A307-6A8E03DE8E00}"/>
               </a:ext>
             </a:extLst>
           </p:cNvPr>
@@ -1738,7 +1738,7 @@
           <p:cNvPr id="5" name="">
             <a:extLst xmlns:a="http://schemas.openxmlformats.org/drawingml/2006/main">
               <a:ext uri="{FF2B5EF4-FFF2-40B4-BE49-F238E27FC236}">
-                <a16:creationId xmlns:a16="http://schemas.microsoft.com/office/drawing/2014/main" id="{8D20B10C-2EED-4CDD-AE57-B819C40C8FD8}"/>
+                <a16:creationId xmlns:a16="http://schemas.microsoft.com/office/drawing/2014/main" id="{B4653555-C1A1-45B2-8C69-3F7035592C03}"/>
               </a:ext>
             </a:extLst>
           </p:cNvPr>
@@ -1793,7 +1793,7 @@
     </p:spTree>
     <p:extLst>
       <p:ext uri="{BB962C8B-B14F-4D97-AF65-F5344CB8AC3E}">
-        <p14:creationId xmlns:p14="http://schemas.microsoft.com/office/powerpoint/2010/main" val="1445976530"/>
+        <p14:creationId xmlns:p14="http://schemas.microsoft.com/office/powerpoint/2010/main" val="686296084"/>
       </p:ext>
     </p:extLst>
   </p:cSld>
@@ -1824,7 +1824,7 @@
           <p:cNvPr id="11" name="">
             <a:extLst xmlns:a="http://schemas.openxmlformats.org/drawingml/2006/main">
               <a:ext uri="{FF2B5EF4-FFF2-40B4-BE49-F238E27FC236}">
-                <a16:creationId xmlns:a16="http://schemas.microsoft.com/office/drawing/2014/main" id="{40161DEA-3060-4E4C-92BA-1B0BA634FBBB}"/>
+                <a16:creationId xmlns:a16="http://schemas.microsoft.com/office/drawing/2014/main" id="{539A0B85-CC9E-4F6B-919C-5231AB2ACF46}"/>
               </a:ext>
             </a:extLst>
           </p:cNvPr>
@@ -1881,7 +1881,7 @@
           <p:cNvPr id="2" name="">
             <a:extLst xmlns:a="http://schemas.openxmlformats.org/drawingml/2006/main">
               <a:ext uri="{FF2B5EF4-FFF2-40B4-BE49-F238E27FC236}">
-                <a16:creationId xmlns:a16="http://schemas.microsoft.com/office/drawing/2014/main" id="{85E50D29-924A-4BFB-B003-C595CD48EEE4}"/>
+                <a16:creationId xmlns:a16="http://schemas.microsoft.com/office/drawing/2014/main" id="{9C520211-F696-4F09-9159-25A3F75E70D4}"/>
               </a:ext>
             </a:extLst>
           </p:cNvPr>
@@ -1938,7 +1938,7 @@
           <p:cNvPr id="3" name="">
             <a:extLst xmlns:a="http://schemas.openxmlformats.org/drawingml/2006/main">
               <a:ext uri="{FF2B5EF4-FFF2-40B4-BE49-F238E27FC236}">
-                <a16:creationId xmlns:a16="http://schemas.microsoft.com/office/drawing/2014/main" id="{C1E1B040-F3FD-4000-9C68-BFAA74E53910}"/>
+                <a16:creationId xmlns:a16="http://schemas.microsoft.com/office/drawing/2014/main" id="{59C0E874-4DD7-4224-829B-2AC509DC99A8}"/>
               </a:ext>
             </a:extLst>
           </p:cNvPr>
@@ -1995,7 +1995,7 @@
           <p:cNvPr id="4" name="">
             <a:extLst xmlns:a="http://schemas.openxmlformats.org/drawingml/2006/main">
               <a:ext uri="{FF2B5EF4-FFF2-40B4-BE49-F238E27FC236}">
-                <a16:creationId xmlns:a16="http://schemas.microsoft.com/office/drawing/2014/main" id="{DC383EB7-B05C-4825-8658-62564A857E9F}"/>
+                <a16:creationId xmlns:a16="http://schemas.microsoft.com/office/drawing/2014/main" id="{E7998079-BC23-470D-8FE9-F1F5AE8DA909}"/>
               </a:ext>
             </a:extLst>
           </p:cNvPr>
@@ -2052,7 +2052,7 @@
           <p:cNvPr id="5" name="">
             <a:extLst xmlns:a="http://schemas.openxmlformats.org/drawingml/2006/main">
               <a:ext uri="{FF2B5EF4-FFF2-40B4-BE49-F238E27FC236}">
-                <a16:creationId xmlns:a16="http://schemas.microsoft.com/office/drawing/2014/main" id="{BECA2F2D-7F48-40AE-9D08-CD2CC593294E}"/>
+                <a16:creationId xmlns:a16="http://schemas.microsoft.com/office/drawing/2014/main" id="{1D5B6813-5A79-464A-86D7-80BBEE83FB8F}"/>
               </a:ext>
             </a:extLst>
           </p:cNvPr>
@@ -2109,7 +2109,7 @@
           <p:cNvPr id="6" name="">
             <a:extLst xmlns:a="http://schemas.openxmlformats.org/drawingml/2006/main">
               <a:ext uri="{FF2B5EF4-FFF2-40B4-BE49-F238E27FC236}">
-                <a16:creationId xmlns:a16="http://schemas.microsoft.com/office/drawing/2014/main" id="{296412C3-E06E-4EB1-8E91-EFBC5D331BDB}"/>
+                <a16:creationId xmlns:a16="http://schemas.microsoft.com/office/drawing/2014/main" id="{8ACE70DD-2C74-474C-B6ED-C2981304A9EE}"/>
               </a:ext>
             </a:extLst>
           </p:cNvPr>
@@ -2166,7 +2166,7 @@
           <p:cNvPr id="7" name="">
             <a:extLst xmlns:a="http://schemas.openxmlformats.org/drawingml/2006/main">
               <a:ext uri="{FF2B5EF4-FFF2-40B4-BE49-F238E27FC236}">
-                <a16:creationId xmlns:a16="http://schemas.microsoft.com/office/drawing/2014/main" id="{74D48060-52DB-4116-9498-060362354BB5}"/>
+                <a16:creationId xmlns:a16="http://schemas.microsoft.com/office/drawing/2014/main" id="{95F11A60-8DB1-4F77-8B8E-739E3E52EDF8}"/>
               </a:ext>
             </a:extLst>
           </p:cNvPr>
@@ -2223,7 +2223,7 @@
           <p:cNvPr id="8" name="">
             <a:extLst xmlns:a="http://schemas.openxmlformats.org/drawingml/2006/main">
               <a:ext uri="{FF2B5EF4-FFF2-40B4-BE49-F238E27FC236}">
-                <a16:creationId xmlns:a16="http://schemas.microsoft.com/office/drawing/2014/main" id="{0C95EB6F-A45E-452A-8773-5B36FE9036AD}"/>
+                <a16:creationId xmlns:a16="http://schemas.microsoft.com/office/drawing/2014/main" id="{52329BBF-114B-4F72-AC6C-6EFB9ADC8393}"/>
               </a:ext>
             </a:extLst>
           </p:cNvPr>
@@ -2280,7 +2280,7 @@
           <p:cNvPr id="9" name="">
             <a:extLst xmlns:a="http://schemas.openxmlformats.org/drawingml/2006/main">
               <a:ext uri="{FF2B5EF4-FFF2-40B4-BE49-F238E27FC236}">
-                <a16:creationId xmlns:a16="http://schemas.microsoft.com/office/drawing/2014/main" id="{BC7A768D-C073-4D19-85CA-9496565D764C}"/>
+                <a16:creationId xmlns:a16="http://schemas.microsoft.com/office/drawing/2014/main" id="{486C6144-6693-424D-A2A6-D0D686078277}"/>
               </a:ext>
             </a:extLst>
           </p:cNvPr>
@@ -2337,7 +2337,7 @@
           <p:cNvPr id="10" name="">
             <a:extLst xmlns:a="http://schemas.openxmlformats.org/drawingml/2006/main">
               <a:ext uri="{FF2B5EF4-FFF2-40B4-BE49-F238E27FC236}">
-                <a16:creationId xmlns:a16="http://schemas.microsoft.com/office/drawing/2014/main" id="{D38290DF-7364-486C-9569-C158E1FF5CC4}"/>
+                <a16:creationId xmlns:a16="http://schemas.microsoft.com/office/drawing/2014/main" id="{ED25B7AE-88B6-410C-A2C1-29406F8563E6}"/>
               </a:ext>
             </a:extLst>
           </p:cNvPr>
@@ -2392,7 +2392,7 @@
     </p:spTree>
     <p:extLst>
       <p:ext uri="{BB962C8B-B14F-4D97-AF65-F5344CB8AC3E}">
-        <p14:creationId xmlns:p14="http://schemas.microsoft.com/office/powerpoint/2010/main" val="934406382"/>
+        <p14:creationId xmlns:p14="http://schemas.microsoft.com/office/powerpoint/2010/main" val="1428078564"/>
       </p:ext>
     </p:extLst>
   </p:cSld>
@@ -2423,7 +2423,7 @@
           <p:cNvPr id="15" name="">
             <a:extLst xmlns:a="http://schemas.openxmlformats.org/drawingml/2006/main">
               <a:ext uri="{FF2B5EF4-FFF2-40B4-BE49-F238E27FC236}">
-                <a16:creationId xmlns:a16="http://schemas.microsoft.com/office/drawing/2014/main" id="{C4488F0C-1087-4260-9F6C-22E144A2607E}"/>
+                <a16:creationId xmlns:a16="http://schemas.microsoft.com/office/drawing/2014/main" id="{D85A09E0-19B3-47AD-B28B-2E4F46190C91}"/>
               </a:ext>
             </a:extLst>
           </p:cNvPr>
@@ -2480,7 +2480,7 @@
           <p:cNvPr id="2" name="">
             <a:extLst xmlns:a="http://schemas.openxmlformats.org/drawingml/2006/main">
               <a:ext uri="{FF2B5EF4-FFF2-40B4-BE49-F238E27FC236}">
-                <a16:creationId xmlns:a16="http://schemas.microsoft.com/office/drawing/2014/main" id="{329B188C-7AD0-431E-8252-A18E7499659F}"/>
+                <a16:creationId xmlns:a16="http://schemas.microsoft.com/office/drawing/2014/main" id="{55ACDBEF-AF74-4BAC-B9F3-8326F4CE7E94}"/>
               </a:ext>
             </a:extLst>
           </p:cNvPr>
@@ -2537,7 +2537,7 @@
           <p:cNvPr id="3" name="">
             <a:extLst xmlns:a="http://schemas.openxmlformats.org/drawingml/2006/main">
               <a:ext uri="{FF2B5EF4-FFF2-40B4-BE49-F238E27FC236}">
-                <a16:creationId xmlns:a16="http://schemas.microsoft.com/office/drawing/2014/main" id="{DE20FBB8-C560-412B-BD3E-195D28FBA1D0}"/>
+                <a16:creationId xmlns:a16="http://schemas.microsoft.com/office/drawing/2014/main" id="{AD89E300-9460-47CA-A7D2-870F4EB150E2}"/>
               </a:ext>
             </a:extLst>
           </p:cNvPr>
@@ -2594,7 +2594,7 @@
           <p:cNvPr id="4" name="">
             <a:extLst xmlns:a="http://schemas.openxmlformats.org/drawingml/2006/main">
               <a:ext uri="{FF2B5EF4-FFF2-40B4-BE49-F238E27FC236}">
-                <a16:creationId xmlns:a16="http://schemas.microsoft.com/office/drawing/2014/main" id="{BCA25748-7F0E-49AF-A65F-B1BD1766259A}"/>
+                <a16:creationId xmlns:a16="http://schemas.microsoft.com/office/drawing/2014/main" id="{ABB67D76-0E8D-46F6-BEC7-F0172EC005AC}"/>
               </a:ext>
             </a:extLst>
           </p:cNvPr>
@@ -2651,7 +2651,7 @@
           <p:cNvPr id="5" name="">
             <a:extLst xmlns:a="http://schemas.openxmlformats.org/drawingml/2006/main">
               <a:ext uri="{FF2B5EF4-FFF2-40B4-BE49-F238E27FC236}">
-                <a16:creationId xmlns:a16="http://schemas.microsoft.com/office/drawing/2014/main" id="{B7EE80DE-095C-4AEE-822E-45E736F044BA}"/>
+                <a16:creationId xmlns:a16="http://schemas.microsoft.com/office/drawing/2014/main" id="{270AC2DC-1568-4C0D-9E08-4275FE62A82E}"/>
               </a:ext>
             </a:extLst>
           </p:cNvPr>
@@ -2708,7 +2708,7 @@
           <p:cNvPr id="6" name="">
             <a:extLst xmlns:a="http://schemas.openxmlformats.org/drawingml/2006/main">
               <a:ext uri="{FF2B5EF4-FFF2-40B4-BE49-F238E27FC236}">
-                <a16:creationId xmlns:a16="http://schemas.microsoft.com/office/drawing/2014/main" id="{67A6320E-FFA4-46EF-8FFD-ED0CA1F8BD20}"/>
+                <a16:creationId xmlns:a16="http://schemas.microsoft.com/office/drawing/2014/main" id="{1C25CABA-5F43-4B8B-B231-31CFD55D6153}"/>
               </a:ext>
             </a:extLst>
           </p:cNvPr>
@@ -2765,7 +2765,7 @@
           <p:cNvPr id="7" name="">
             <a:extLst xmlns:a="http://schemas.openxmlformats.org/drawingml/2006/main">
               <a:ext uri="{FF2B5EF4-FFF2-40B4-BE49-F238E27FC236}">
-                <a16:creationId xmlns:a16="http://schemas.microsoft.com/office/drawing/2014/main" id="{1912AEEC-0A05-418B-BB32-6AFF07AB07E6}"/>
+                <a16:creationId xmlns:a16="http://schemas.microsoft.com/office/drawing/2014/main" id="{9281D8D0-5FCA-4718-9B44-8EE7B0374B32}"/>
               </a:ext>
             </a:extLst>
           </p:cNvPr>
@@ -2822,7 +2822,7 @@
           <p:cNvPr id="8" name="">
             <a:extLst xmlns:a="http://schemas.openxmlformats.org/drawingml/2006/main">
               <a:ext uri="{FF2B5EF4-FFF2-40B4-BE49-F238E27FC236}">
-                <a16:creationId xmlns:a16="http://schemas.microsoft.com/office/drawing/2014/main" id="{8C90DD44-C312-421A-8325-C825AF85B046}"/>
+                <a16:creationId xmlns:a16="http://schemas.microsoft.com/office/drawing/2014/main" id="{9DE69E61-F680-4B8A-AFE1-7E4E30FB99EF}"/>
               </a:ext>
             </a:extLst>
           </p:cNvPr>
@@ -2879,7 +2879,7 @@
           <p:cNvPr id="9" name="">
             <a:extLst xmlns:a="http://schemas.openxmlformats.org/drawingml/2006/main">
               <a:ext uri="{FF2B5EF4-FFF2-40B4-BE49-F238E27FC236}">
-                <a16:creationId xmlns:a16="http://schemas.microsoft.com/office/drawing/2014/main" id="{2AAEC71F-3B64-4365-8522-83BCD9A02370}"/>
+                <a16:creationId xmlns:a16="http://schemas.microsoft.com/office/drawing/2014/main" id="{F561378C-DA4E-48AD-BAFF-5EF7CBD0DAF8}"/>
               </a:ext>
             </a:extLst>
           </p:cNvPr>
@@ -2936,7 +2936,7 @@
           <p:cNvPr id="10" name="">
             <a:extLst xmlns:a="http://schemas.openxmlformats.org/drawingml/2006/main">
               <a:ext uri="{FF2B5EF4-FFF2-40B4-BE49-F238E27FC236}">
-                <a16:creationId xmlns:a16="http://schemas.microsoft.com/office/drawing/2014/main" id="{5790641A-6DAF-4145-A477-2875D7175F4E}"/>
+                <a16:creationId xmlns:a16="http://schemas.microsoft.com/office/drawing/2014/main" id="{888F4A94-4BD7-4881-8EB6-9FC73E65D514}"/>
               </a:ext>
             </a:extLst>
           </p:cNvPr>
@@ -2993,7 +2993,7 @@
           <p:cNvPr id="11" name="">
             <a:extLst xmlns:a="http://schemas.openxmlformats.org/drawingml/2006/main">
               <a:ext uri="{FF2B5EF4-FFF2-40B4-BE49-F238E27FC236}">
-                <a16:creationId xmlns:a16="http://schemas.microsoft.com/office/drawing/2014/main" id="{356CFC59-AE2C-401E-9193-A36C45C7E3EF}"/>
+                <a16:creationId xmlns:a16="http://schemas.microsoft.com/office/drawing/2014/main" id="{CE37CDB8-D7EB-4E4C-B6CE-8059D564DDD9}"/>
               </a:ext>
             </a:extLst>
           </p:cNvPr>
@@ -3050,7 +3050,7 @@
           <p:cNvPr id="12" name="">
             <a:extLst xmlns:a="http://schemas.openxmlformats.org/drawingml/2006/main">
               <a:ext uri="{FF2B5EF4-FFF2-40B4-BE49-F238E27FC236}">
-                <a16:creationId xmlns:a16="http://schemas.microsoft.com/office/drawing/2014/main" id="{6E7A5418-39D6-4761-AF60-A7DCC440B33D}"/>
+                <a16:creationId xmlns:a16="http://schemas.microsoft.com/office/drawing/2014/main" id="{408D8343-9F4B-4CFF-B0D8-30321D312525}"/>
               </a:ext>
             </a:extLst>
           </p:cNvPr>
@@ -3107,7 +3107,7 @@
           <p:cNvPr id="13" name="">
             <a:extLst xmlns:a="http://schemas.openxmlformats.org/drawingml/2006/main">
               <a:ext uri="{FF2B5EF4-FFF2-40B4-BE49-F238E27FC236}">
-                <a16:creationId xmlns:a16="http://schemas.microsoft.com/office/drawing/2014/main" id="{6E73537D-90D8-4AF3-B0F3-93D2713FD524}"/>
+                <a16:creationId xmlns:a16="http://schemas.microsoft.com/office/drawing/2014/main" id="{5F790DDB-92EB-4758-8D3F-DB3F99A95FB1}"/>
               </a:ext>
             </a:extLst>
           </p:cNvPr>
@@ -3164,7 +3164,7 @@
           <p:cNvPr id="14" name="">
             <a:extLst xmlns:a="http://schemas.openxmlformats.org/drawingml/2006/main">
               <a:ext uri="{FF2B5EF4-FFF2-40B4-BE49-F238E27FC236}">
-                <a16:creationId xmlns:a16="http://schemas.microsoft.com/office/drawing/2014/main" id="{4FFCF7ED-9F4C-4D74-8754-93B6B16376B1}"/>
+                <a16:creationId xmlns:a16="http://schemas.microsoft.com/office/drawing/2014/main" id="{30D045D3-E205-420B-862C-4A13C2B198F8}"/>
               </a:ext>
             </a:extLst>
           </p:cNvPr>
@@ -3219,7 +3219,7 @@
     </p:spTree>
     <p:extLst>
       <p:ext uri="{BB962C8B-B14F-4D97-AF65-F5344CB8AC3E}">
-        <p14:creationId xmlns:p14="http://schemas.microsoft.com/office/powerpoint/2010/main" val="1199200845"/>
+        <p14:creationId xmlns:p14="http://schemas.microsoft.com/office/powerpoint/2010/main" val="119495925"/>
       </p:ext>
     </p:extLst>
   </p:cSld>
@@ -3250,7 +3250,7 @@
           <p:cNvPr id="10" name="">
             <a:extLst xmlns:a="http://schemas.openxmlformats.org/drawingml/2006/main">
               <a:ext uri="{FF2B5EF4-FFF2-40B4-BE49-F238E27FC236}">
-                <a16:creationId xmlns:a16="http://schemas.microsoft.com/office/drawing/2014/main" id="{97873194-44F4-4A18-A611-D7DD7ABF4FBD}"/>
+                <a16:creationId xmlns:a16="http://schemas.microsoft.com/office/drawing/2014/main" id="{18637726-D3B0-48F2-AB67-908C2F3279B3}"/>
               </a:ext>
             </a:extLst>
           </p:cNvPr>
@@ -3307,7 +3307,7 @@
           <p:cNvPr id="2" name="">
             <a:extLst xmlns:a="http://schemas.openxmlformats.org/drawingml/2006/main">
               <a:ext uri="{FF2B5EF4-FFF2-40B4-BE49-F238E27FC236}">
-                <a16:creationId xmlns:a16="http://schemas.microsoft.com/office/drawing/2014/main" id="{ADE90611-650C-4C9E-BD89-7397F77AB430}"/>
+                <a16:creationId xmlns:a16="http://schemas.microsoft.com/office/drawing/2014/main" id="{24FC3D3E-0FD2-40AC-BB6E-0E99B07DC1AD}"/>
               </a:ext>
             </a:extLst>
           </p:cNvPr>
@@ -3364,7 +3364,7 @@
           <p:cNvPr id="3" name="">
             <a:extLst xmlns:a="http://schemas.openxmlformats.org/drawingml/2006/main">
               <a:ext uri="{FF2B5EF4-FFF2-40B4-BE49-F238E27FC236}">
-                <a16:creationId xmlns:a16="http://schemas.microsoft.com/office/drawing/2014/main" id="{E5DE535E-EFC5-4175-B80B-5A9097AC0341}"/>
+                <a16:creationId xmlns:a16="http://schemas.microsoft.com/office/drawing/2014/main" id="{55D8C3EF-A445-46E0-BD74-EE44AC168AC0}"/>
               </a:ext>
             </a:extLst>
           </p:cNvPr>
@@ -3421,7 +3421,7 @@
           <p:cNvPr id="4" name="">
             <a:extLst xmlns:a="http://schemas.openxmlformats.org/drawingml/2006/main">
               <a:ext uri="{FF2B5EF4-FFF2-40B4-BE49-F238E27FC236}">
-                <a16:creationId xmlns:a16="http://schemas.microsoft.com/office/drawing/2014/main" id="{588DA76C-3B84-471A-91E8-CEF585C9CA9A}"/>
+                <a16:creationId xmlns:a16="http://schemas.microsoft.com/office/drawing/2014/main" id="{9C2AE916-A090-40D5-8626-63DAADD293B0}"/>
               </a:ext>
             </a:extLst>
           </p:cNvPr>
@@ -3478,7 +3478,7 @@
           <p:cNvPr id="5" name="">
             <a:extLst xmlns:a="http://schemas.openxmlformats.org/drawingml/2006/main">
               <a:ext uri="{FF2B5EF4-FFF2-40B4-BE49-F238E27FC236}">
-                <a16:creationId xmlns:a16="http://schemas.microsoft.com/office/drawing/2014/main" id="{87C023AC-D236-4371-8B88-A69CF6A8CC7B}"/>
+                <a16:creationId xmlns:a16="http://schemas.microsoft.com/office/drawing/2014/main" id="{74710058-1FA4-472D-95D8-61A51A6B61C1}"/>
               </a:ext>
             </a:extLst>
           </p:cNvPr>
@@ -3535,7 +3535,7 @@
           <p:cNvPr id="6" name="">
             <a:extLst xmlns:a="http://schemas.openxmlformats.org/drawingml/2006/main">
               <a:ext uri="{FF2B5EF4-FFF2-40B4-BE49-F238E27FC236}">
-                <a16:creationId xmlns:a16="http://schemas.microsoft.com/office/drawing/2014/main" id="{5C52C19D-8216-4EB3-BAB1-81229388CDA4}"/>
+                <a16:creationId xmlns:a16="http://schemas.microsoft.com/office/drawing/2014/main" id="{469A7037-2400-47E7-B0F1-A8B06425B41A}"/>
               </a:ext>
             </a:extLst>
           </p:cNvPr>
@@ -3592,7 +3592,7 @@
           <p:cNvPr id="7" name="">
             <a:extLst xmlns:a="http://schemas.openxmlformats.org/drawingml/2006/main">
               <a:ext uri="{FF2B5EF4-FFF2-40B4-BE49-F238E27FC236}">
-                <a16:creationId xmlns:a16="http://schemas.microsoft.com/office/drawing/2014/main" id="{309A563B-BA9A-4897-8E62-514AE6DAD18B}"/>
+                <a16:creationId xmlns:a16="http://schemas.microsoft.com/office/drawing/2014/main" id="{F601B937-C65B-4972-ADE2-1E01057E193B}"/>
               </a:ext>
             </a:extLst>
           </p:cNvPr>
@@ -3649,7 +3649,7 @@
           <p:cNvPr id="8" name="">
             <a:extLst xmlns:a="http://schemas.openxmlformats.org/drawingml/2006/main">
               <a:ext uri="{FF2B5EF4-FFF2-40B4-BE49-F238E27FC236}">
-                <a16:creationId xmlns:a16="http://schemas.microsoft.com/office/drawing/2014/main" id="{00E377CB-29F6-45C4-8A01-181A50A51360}"/>
+                <a16:creationId xmlns:a16="http://schemas.microsoft.com/office/drawing/2014/main" id="{95CD048F-0378-42BA-896E-194F48CA853F}"/>
               </a:ext>
             </a:extLst>
           </p:cNvPr>
@@ -3706,7 +3706,7 @@
           <p:cNvPr id="9" name="">
             <a:extLst xmlns:a="http://schemas.openxmlformats.org/drawingml/2006/main">
               <a:ext uri="{FF2B5EF4-FFF2-40B4-BE49-F238E27FC236}">
-                <a16:creationId xmlns:a16="http://schemas.microsoft.com/office/drawing/2014/main" id="{E034B366-D27A-4CAD-AA33-62A1DA15AEF5}"/>
+                <a16:creationId xmlns:a16="http://schemas.microsoft.com/office/drawing/2014/main" id="{A409E020-5F61-4196-B58D-2FBCDF3ED161}"/>
               </a:ext>
             </a:extLst>
           </p:cNvPr>
@@ -3784,7 +3784,7 @@
     </p:spTree>
     <p:extLst>
       <p:ext uri="{BB962C8B-B14F-4D97-AF65-F5344CB8AC3E}">
-        <p14:creationId xmlns:p14="http://schemas.microsoft.com/office/powerpoint/2010/main" val="728264118"/>
+        <p14:creationId xmlns:p14="http://schemas.microsoft.com/office/powerpoint/2010/main" val="1066170074"/>
       </p:ext>
     </p:extLst>
   </p:cSld>
@@ -3815,7 +3815,7 @@
           <p:cNvPr id="9" name="">
             <a:extLst xmlns:a="http://schemas.openxmlformats.org/drawingml/2006/main">
               <a:ext uri="{FF2B5EF4-FFF2-40B4-BE49-F238E27FC236}">
-                <a16:creationId xmlns:a16="http://schemas.microsoft.com/office/drawing/2014/main" id="{59B9974E-28FD-42E2-9EFB-262FC1A620B1}"/>
+                <a16:creationId xmlns:a16="http://schemas.microsoft.com/office/drawing/2014/main" id="{DE9C3C0D-782C-4C5D-9579-0B783384FBDF}"/>
               </a:ext>
             </a:extLst>
           </p:cNvPr>
@@ -3872,7 +3872,7 @@
           <p:cNvPr id="2" name="">
             <a:extLst xmlns:a="http://schemas.openxmlformats.org/drawingml/2006/main">
               <a:ext uri="{FF2B5EF4-FFF2-40B4-BE49-F238E27FC236}">
-                <a16:creationId xmlns:a16="http://schemas.microsoft.com/office/drawing/2014/main" id="{A5BB6F43-BA37-483F-A63B-7F929CC10C99}"/>
+                <a16:creationId xmlns:a16="http://schemas.microsoft.com/office/drawing/2014/main" id="{B4B5613B-484A-4BD5-8893-67C12594FD56}"/>
               </a:ext>
             </a:extLst>
           </p:cNvPr>
@@ -3929,7 +3929,7 @@
           <p:cNvPr id="3" name="">
             <a:extLst xmlns:a="http://schemas.openxmlformats.org/drawingml/2006/main">
               <a:ext uri="{FF2B5EF4-FFF2-40B4-BE49-F238E27FC236}">
-                <a16:creationId xmlns:a16="http://schemas.microsoft.com/office/drawing/2014/main" id="{161EDCAB-F8FD-4DB3-9F5C-D7F9731FE785}"/>
+                <a16:creationId xmlns:a16="http://schemas.microsoft.com/office/drawing/2014/main" id="{86815958-5738-4051-ABA0-CF7F42F3DCA3}"/>
               </a:ext>
             </a:extLst>
           </p:cNvPr>
@@ -3986,7 +3986,7 @@
           <p:cNvPr id="4" name="">
             <a:extLst xmlns:a="http://schemas.openxmlformats.org/drawingml/2006/main">
               <a:ext uri="{FF2B5EF4-FFF2-40B4-BE49-F238E27FC236}">
-                <a16:creationId xmlns:a16="http://schemas.microsoft.com/office/drawing/2014/main" id="{F9B4C947-2B61-4EF1-A32B-74EE5712EA4E}"/>
+                <a16:creationId xmlns:a16="http://schemas.microsoft.com/office/drawing/2014/main" id="{4F8D005E-7AA3-4C1A-B67E-B4A018F3E735}"/>
               </a:ext>
             </a:extLst>
           </p:cNvPr>
@@ -4112,7 +4112,7 @@
           <p:cNvPr id="5" name="">
             <a:extLst xmlns:a="http://schemas.openxmlformats.org/drawingml/2006/main">
               <a:ext uri="{FF2B5EF4-FFF2-40B4-BE49-F238E27FC236}">
-                <a16:creationId xmlns:a16="http://schemas.microsoft.com/office/drawing/2014/main" id="{0C90BE36-E149-40D3-BD73-D0DC6BC37613}"/>
+                <a16:creationId xmlns:a16="http://schemas.microsoft.com/office/drawing/2014/main" id="{DFFC6CC6-B18C-460B-BE30-54379069DF5C}"/>
               </a:ext>
             </a:extLst>
           </p:cNvPr>
@@ -4169,7 +4169,7 @@
           <p:cNvPr id="6" name="">
             <a:extLst xmlns:a="http://schemas.openxmlformats.org/drawingml/2006/main">
               <a:ext uri="{FF2B5EF4-FFF2-40B4-BE49-F238E27FC236}">
-                <a16:creationId xmlns:a16="http://schemas.microsoft.com/office/drawing/2014/main" id="{3282B661-DB49-4178-8939-18DFC2FBCF1C}"/>
+                <a16:creationId xmlns:a16="http://schemas.microsoft.com/office/drawing/2014/main" id="{85001C1E-96E2-496E-AA33-589643EBBC98}"/>
               </a:ext>
             </a:extLst>
           </p:cNvPr>
@@ -4295,7 +4295,7 @@
           <p:cNvPr id="7" name="">
             <a:extLst xmlns:a="http://schemas.openxmlformats.org/drawingml/2006/main">
               <a:ext uri="{FF2B5EF4-FFF2-40B4-BE49-F238E27FC236}">
-                <a16:creationId xmlns:a16="http://schemas.microsoft.com/office/drawing/2014/main" id="{22D9DF81-DF4A-4785-A059-19C9C7E84468}"/>
+                <a16:creationId xmlns:a16="http://schemas.microsoft.com/office/drawing/2014/main" id="{19ED2967-222D-48C1-B779-5C7A6B6BEE88}"/>
               </a:ext>
             </a:extLst>
           </p:cNvPr>
@@ -4352,7 +4352,7 @@
           <p:cNvPr id="8" name="">
             <a:extLst xmlns:a="http://schemas.openxmlformats.org/drawingml/2006/main">
               <a:ext uri="{FF2B5EF4-FFF2-40B4-BE49-F238E27FC236}">
-                <a16:creationId xmlns:a16="http://schemas.microsoft.com/office/drawing/2014/main" id="{C4965B58-A828-4FE0-81D7-56D4785B80CE}"/>
+                <a16:creationId xmlns:a16="http://schemas.microsoft.com/office/drawing/2014/main" id="{712F2AAC-6305-498C-BB9B-25DA2B2B5513}"/>
               </a:ext>
             </a:extLst>
           </p:cNvPr>
@@ -4407,7 +4407,7 @@
     </p:spTree>
     <p:extLst>
       <p:ext uri="{BB962C8B-B14F-4D97-AF65-F5344CB8AC3E}">
-        <p14:creationId xmlns:p14="http://schemas.microsoft.com/office/powerpoint/2010/main" val="137244360"/>
+        <p14:creationId xmlns:p14="http://schemas.microsoft.com/office/powerpoint/2010/main" val="1743974333"/>
       </p:ext>
     </p:extLst>
   </p:cSld>
@@ -4438,7 +4438,7 @@
           <p:cNvPr id="13" name="">
             <a:extLst xmlns:a="http://schemas.openxmlformats.org/drawingml/2006/main">
               <a:ext uri="{FF2B5EF4-FFF2-40B4-BE49-F238E27FC236}">
-                <a16:creationId xmlns:a16="http://schemas.microsoft.com/office/drawing/2014/main" id="{4972B5FE-D542-4E65-A67D-D561A59B78A9}"/>
+                <a16:creationId xmlns:a16="http://schemas.microsoft.com/office/drawing/2014/main" id="{5BBC3771-F840-428A-A78B-3D9F13368C3F}"/>
               </a:ext>
             </a:extLst>
           </p:cNvPr>
@@ -4495,7 +4495,7 @@
           <p:cNvPr id="2" name="">
             <a:extLst xmlns:a="http://schemas.openxmlformats.org/drawingml/2006/main">
               <a:ext uri="{FF2B5EF4-FFF2-40B4-BE49-F238E27FC236}">
-                <a16:creationId xmlns:a16="http://schemas.microsoft.com/office/drawing/2014/main" id="{6B967C1F-46BA-46C1-BCEF-618D63987ED8}"/>
+                <a16:creationId xmlns:a16="http://schemas.microsoft.com/office/drawing/2014/main" id="{C5776A34-DCDF-4A81-892F-F1EBEED0DFB8}"/>
               </a:ext>
             </a:extLst>
           </p:cNvPr>
@@ -4552,7 +4552,7 @@
           <p:cNvPr id="3" name="">
             <a:extLst xmlns:a="http://schemas.openxmlformats.org/drawingml/2006/main">
               <a:ext uri="{FF2B5EF4-FFF2-40B4-BE49-F238E27FC236}">
-                <a16:creationId xmlns:a16="http://schemas.microsoft.com/office/drawing/2014/main" id="{BCBD7E0A-05A8-4400-A5DB-934CB9B1DF22}"/>
+                <a16:creationId xmlns:a16="http://schemas.microsoft.com/office/drawing/2014/main" id="{5E76BCCB-43B4-4A4C-A45F-85613D61747A}"/>
               </a:ext>
             </a:extLst>
           </p:cNvPr>
@@ -4609,7 +4609,7 @@
           <p:cNvPr id="4" name="">
             <a:extLst xmlns:a="http://schemas.openxmlformats.org/drawingml/2006/main">
               <a:ext uri="{FF2B5EF4-FFF2-40B4-BE49-F238E27FC236}">
-                <a16:creationId xmlns:a16="http://schemas.microsoft.com/office/drawing/2014/main" id="{E4CC9EC4-FCB4-4E45-90B0-915E4F2BFBCE}"/>
+                <a16:creationId xmlns:a16="http://schemas.microsoft.com/office/drawing/2014/main" id="{F85E2530-6CA4-4C0D-9BEA-4BA0E8165BA5}"/>
               </a:ext>
             </a:extLst>
           </p:cNvPr>
@@ -4666,7 +4666,7 @@
           <p:cNvPr id="5" name="">
             <a:extLst xmlns:a="http://schemas.openxmlformats.org/drawingml/2006/main">
               <a:ext uri="{FF2B5EF4-FFF2-40B4-BE49-F238E27FC236}">
-                <a16:creationId xmlns:a16="http://schemas.microsoft.com/office/drawing/2014/main" id="{54C05F48-D900-43D8-86E9-6974271FD383}"/>
+                <a16:creationId xmlns:a16="http://schemas.microsoft.com/office/drawing/2014/main" id="{A5F57586-A45C-4466-A303-BC1E577B5E81}"/>
               </a:ext>
             </a:extLst>
           </p:cNvPr>
@@ -4723,7 +4723,7 @@
           <p:cNvPr id="6" name="">
             <a:extLst xmlns:a="http://schemas.openxmlformats.org/drawingml/2006/main">
               <a:ext uri="{FF2B5EF4-FFF2-40B4-BE49-F238E27FC236}">
-                <a16:creationId xmlns:a16="http://schemas.microsoft.com/office/drawing/2014/main" id="{FAC2D550-AD4A-4484-B09E-F51C36822003}"/>
+                <a16:creationId xmlns:a16="http://schemas.microsoft.com/office/drawing/2014/main" id="{F7608730-28EB-45C2-B567-B7C4584B907A}"/>
               </a:ext>
             </a:extLst>
           </p:cNvPr>
@@ -4780,7 +4780,7 @@
           <p:cNvPr id="7" name="">
             <a:extLst xmlns:a="http://schemas.openxmlformats.org/drawingml/2006/main">
               <a:ext uri="{FF2B5EF4-FFF2-40B4-BE49-F238E27FC236}">
-                <a16:creationId xmlns:a16="http://schemas.microsoft.com/office/drawing/2014/main" id="{240FBD44-2CD5-43BE-8C71-534D931656F5}"/>
+                <a16:creationId xmlns:a16="http://schemas.microsoft.com/office/drawing/2014/main" id="{95C359AA-C6D7-4C18-923D-43137CC57FB4}"/>
               </a:ext>
             </a:extLst>
           </p:cNvPr>
@@ -4860,7 +4860,7 @@
           <p:cNvPr id="8" name="">
             <a:extLst xmlns:a="http://schemas.openxmlformats.org/drawingml/2006/main">
               <a:ext uri="{FF2B5EF4-FFF2-40B4-BE49-F238E27FC236}">
-                <a16:creationId xmlns:a16="http://schemas.microsoft.com/office/drawing/2014/main" id="{C7BA04B5-24CC-4FF8-972F-193EF6102434}"/>
+                <a16:creationId xmlns:a16="http://schemas.microsoft.com/office/drawing/2014/main" id="{67E997A9-2BF4-4CAA-8E1F-98B845CFA49C}"/>
               </a:ext>
             </a:extLst>
           </p:cNvPr>
@@ -4917,7 +4917,7 @@
           <p:cNvPr id="9" name="">
             <a:extLst xmlns:a="http://schemas.openxmlformats.org/drawingml/2006/main">
               <a:ext uri="{FF2B5EF4-FFF2-40B4-BE49-F238E27FC236}">
-                <a16:creationId xmlns:a16="http://schemas.microsoft.com/office/drawing/2014/main" id="{78DDF5D3-27A3-4F20-9B2C-8E67DD60405A}"/>
+                <a16:creationId xmlns:a16="http://schemas.microsoft.com/office/drawing/2014/main" id="{23C1CDEB-51F0-4470-96C0-0DB939139532}"/>
               </a:ext>
             </a:extLst>
           </p:cNvPr>
@@ -4997,7 +4997,7 @@
           <p:cNvPr id="10" name="">
             <a:extLst xmlns:a="http://schemas.openxmlformats.org/drawingml/2006/main">
               <a:ext uri="{FF2B5EF4-FFF2-40B4-BE49-F238E27FC236}">
-                <a16:creationId xmlns:a16="http://schemas.microsoft.com/office/drawing/2014/main" id="{F28C7A93-64D9-420E-BE19-F8D371B0D485}"/>
+                <a16:creationId xmlns:a16="http://schemas.microsoft.com/office/drawing/2014/main" id="{32DED7FD-1D74-407F-8775-7FA3C056EABD}"/>
               </a:ext>
             </a:extLst>
           </p:cNvPr>
@@ -5054,7 +5054,7 @@
           <p:cNvPr id="11" name="">
             <a:extLst xmlns:a="http://schemas.openxmlformats.org/drawingml/2006/main">
               <a:ext uri="{FF2B5EF4-FFF2-40B4-BE49-F238E27FC236}">
-                <a16:creationId xmlns:a16="http://schemas.microsoft.com/office/drawing/2014/main" id="{28254318-49EE-4C66-8652-76285E1A8651}"/>
+                <a16:creationId xmlns:a16="http://schemas.microsoft.com/office/drawing/2014/main" id="{CAA6607B-DF4E-48CC-BE8E-B3E70E580D43}"/>
               </a:ext>
             </a:extLst>
           </p:cNvPr>
@@ -5111,7 +5111,7 @@
           <p:cNvPr id="12" name="">
             <a:extLst xmlns:a="http://schemas.openxmlformats.org/drawingml/2006/main">
               <a:ext uri="{FF2B5EF4-FFF2-40B4-BE49-F238E27FC236}">
-                <a16:creationId xmlns:a16="http://schemas.microsoft.com/office/drawing/2014/main" id="{4EC90511-BE43-428B-905D-45A0E4F3E6C3}"/>
+                <a16:creationId xmlns:a16="http://schemas.microsoft.com/office/drawing/2014/main" id="{ABCE1593-30F3-4A5D-BA10-D61FB9DF3278}"/>
               </a:ext>
             </a:extLst>
           </p:cNvPr>
@@ -5166,7 +5166,7 @@
     </p:spTree>
     <p:extLst>
       <p:ext uri="{BB962C8B-B14F-4D97-AF65-F5344CB8AC3E}">
-        <p14:creationId xmlns:p14="http://schemas.microsoft.com/office/powerpoint/2010/main" val="1260701904"/>
+        <p14:creationId xmlns:p14="http://schemas.microsoft.com/office/powerpoint/2010/main" val="1667628405"/>
       </p:ext>
     </p:extLst>
   </p:cSld>
@@ -5197,7 +5197,7 @@
           <p:cNvPr id="9" name="">
             <a:extLst xmlns:a="http://schemas.openxmlformats.org/drawingml/2006/main">
               <a:ext uri="{FF2B5EF4-FFF2-40B4-BE49-F238E27FC236}">
-                <a16:creationId xmlns:a16="http://schemas.microsoft.com/office/drawing/2014/main" id="{53F456A1-199F-4FB0-8FD7-8E6AF3EB28DA}"/>
+                <a16:creationId xmlns:a16="http://schemas.microsoft.com/office/drawing/2014/main" id="{B6E0F8CB-FA72-489F-956B-5344DE23F973}"/>
               </a:ext>
             </a:extLst>
           </p:cNvPr>
@@ -5254,7 +5254,7 @@
           <p:cNvPr id="2" name="">
             <a:extLst xmlns:a="http://schemas.openxmlformats.org/drawingml/2006/main">
               <a:ext uri="{FF2B5EF4-FFF2-40B4-BE49-F238E27FC236}">
-                <a16:creationId xmlns:a16="http://schemas.microsoft.com/office/drawing/2014/main" id="{46860861-E45D-419F-A61F-797B32263756}"/>
+                <a16:creationId xmlns:a16="http://schemas.microsoft.com/office/drawing/2014/main" id="{BF973B49-EBB3-4596-BA9B-95B14A39F913}"/>
               </a:ext>
             </a:extLst>
           </p:cNvPr>
@@ -5311,7 +5311,7 @@
           <p:cNvPr id="3" name="">
             <a:extLst xmlns:a="http://schemas.openxmlformats.org/drawingml/2006/main">
               <a:ext uri="{FF2B5EF4-FFF2-40B4-BE49-F238E27FC236}">
-                <a16:creationId xmlns:a16="http://schemas.microsoft.com/office/drawing/2014/main" id="{CBE5A292-019F-48DC-B100-E5C69026065E}"/>
+                <a16:creationId xmlns:a16="http://schemas.microsoft.com/office/drawing/2014/main" id="{FBC6468D-B9CE-4207-B4E8-728110CA3677}"/>
               </a:ext>
             </a:extLst>
           </p:cNvPr>
@@ -5368,7 +5368,7 @@
           <p:cNvPr id="4" name="">
             <a:extLst xmlns:a="http://schemas.openxmlformats.org/drawingml/2006/main">
               <a:ext uri="{FF2B5EF4-FFF2-40B4-BE49-F238E27FC236}">
-                <a16:creationId xmlns:a16="http://schemas.microsoft.com/office/drawing/2014/main" id="{32B3385A-C4D6-4920-A821-05546D98DC8B}"/>
+                <a16:creationId xmlns:a16="http://schemas.microsoft.com/office/drawing/2014/main" id="{2836084E-EB57-4E21-8E4B-055F26FE0C3D}"/>
               </a:ext>
             </a:extLst>
           </p:cNvPr>
@@ -5425,7 +5425,7 @@
           <p:cNvPr id="5" name="">
             <a:extLst xmlns:a="http://schemas.openxmlformats.org/drawingml/2006/main">
               <a:ext uri="{FF2B5EF4-FFF2-40B4-BE49-F238E27FC236}">
-                <a16:creationId xmlns:a16="http://schemas.microsoft.com/office/drawing/2014/main" id="{F995CF18-D39F-4A39-9BA0-C6112F0E8D73}"/>
+                <a16:creationId xmlns:a16="http://schemas.microsoft.com/office/drawing/2014/main" id="{DE4A02FF-FF2E-435A-919F-F431C13934C8}"/>
               </a:ext>
             </a:extLst>
           </p:cNvPr>
@@ -5472,7 +5472,7 @@
                 <a:ea typeface="Helvetica Neue"/>
                 <a:cs typeface="Helvetica Neue"/>
               </a:rPr>
-              <a:t>Deployment target</a:t>
+              <a:t>Live demo</a:t>
             </a:r>
           </a:p>
         </p:txBody>
@@ -5482,7 +5482,7 @@
           <p:cNvPr id="6" name="">
             <a:extLst xmlns:a="http://schemas.openxmlformats.org/drawingml/2006/main">
               <a:ext uri="{FF2B5EF4-FFF2-40B4-BE49-F238E27FC236}">
-                <a16:creationId xmlns:a16="http://schemas.microsoft.com/office/drawing/2014/main" id="{20A3201C-C76E-47F5-BFF7-5D060D44C89E}"/>
+                <a16:creationId xmlns:a16="http://schemas.microsoft.com/office/drawing/2014/main" id="{7CAE97BF-FCE7-40B4-8870-F0E6FA6ADCB7}"/>
               </a:ext>
             </a:extLst>
           </p:cNvPr>
@@ -5539,7 +5539,7 @@
           <p:cNvPr id="7" name="">
             <a:extLst xmlns:a="http://schemas.openxmlformats.org/drawingml/2006/main">
               <a:ext uri="{FF2B5EF4-FFF2-40B4-BE49-F238E27FC236}">
-                <a16:creationId xmlns:a16="http://schemas.microsoft.com/office/drawing/2014/main" id="{F416F883-6AE4-4ED5-BD45-0E5B38851C58}"/>
+                <a16:creationId xmlns:a16="http://schemas.microsoft.com/office/drawing/2014/main" id="{E32D082B-8032-4C5B-BC2A-ABA2D989C930}"/>
               </a:ext>
             </a:extLst>
           </p:cNvPr>
@@ -5596,7 +5596,7 @@
           <p:cNvPr id="8" name="">
             <a:extLst xmlns:a="http://schemas.openxmlformats.org/drawingml/2006/main">
               <a:ext uri="{FF2B5EF4-FFF2-40B4-BE49-F238E27FC236}">
-                <a16:creationId xmlns:a16="http://schemas.microsoft.com/office/drawing/2014/main" id="{3DDD9A26-33F5-4979-9780-BCC9793E0DC9}"/>
+                <a16:creationId xmlns:a16="http://schemas.microsoft.com/office/drawing/2014/main" id="{62706C74-7977-4DA3-9C39-3A87644F949E}"/>
               </a:ext>
             </a:extLst>
           </p:cNvPr>
@@ -5651,7 +5651,7 @@
     </p:spTree>
     <p:extLst>
       <p:ext uri="{BB962C8B-B14F-4D97-AF65-F5344CB8AC3E}">
-        <p14:creationId xmlns:p14="http://schemas.microsoft.com/office/powerpoint/2010/main" val="1954834542"/>
+        <p14:creationId xmlns:p14="http://schemas.microsoft.com/office/powerpoint/2010/main" val="456775743"/>
       </p:ext>
     </p:extLst>
   </p:cSld>

--- a/docs/assets/Runway-Guard-Pitch.pptx
+++ b/docs/assets/Runway-Guard-Pitch.pptx
@@ -2,19 +2,19 @@
 <file path=ppt/presentation.xml><?xml version="1.0" encoding="utf-8"?>
 <p:presentation xmlns:p="http://schemas.openxmlformats.org/presentationml/2006/main">
   <p:sldMasterIdLst>
-    <p:sldMasterId xmlns:r="http://schemas.openxmlformats.org/officeDocument/2006/relationships" id="2147483648" r:id="R4ff549cdc8044d5f"/>
+    <p:sldMasterId xmlns:r="http://schemas.openxmlformats.org/officeDocument/2006/relationships" id="2147483648" r:id="R2b585b13c27d4821"/>
   </p:sldMasterIdLst>
   <p:notesMasterIdLst>
-    <p:notesMasterId xmlns:r="http://schemas.openxmlformats.org/officeDocument/2006/relationships" r:id="Rb829fb05d5094da5"/>
+    <p:notesMasterId xmlns:r="http://schemas.openxmlformats.org/officeDocument/2006/relationships" r:id="Ra10a9a7c283749b1"/>
   </p:notesMasterIdLst>
   <p:sldIdLst>
-    <p:sldId xmlns:r="http://schemas.openxmlformats.org/officeDocument/2006/relationships" id="256" r:id="R4ce590323aff4a89"/>
-    <p:sldId xmlns:r="http://schemas.openxmlformats.org/officeDocument/2006/relationships" id="257" r:id="R504de60679b848b7"/>
-    <p:sldId xmlns:r="http://schemas.openxmlformats.org/officeDocument/2006/relationships" id="258" r:id="Rb139d0d9da224053"/>
-    <p:sldId xmlns:r="http://schemas.openxmlformats.org/officeDocument/2006/relationships" id="259" r:id="Rcf354c3455104a1f"/>
-    <p:sldId xmlns:r="http://schemas.openxmlformats.org/officeDocument/2006/relationships" id="260" r:id="R3bded071ef58488c"/>
-    <p:sldId xmlns:r="http://schemas.openxmlformats.org/officeDocument/2006/relationships" id="261" r:id="R757f8e187b584e5e"/>
-    <p:sldId xmlns:r="http://schemas.openxmlformats.org/officeDocument/2006/relationships" id="262" r:id="R0a331c82f17d4a17"/>
+    <p:sldId xmlns:r="http://schemas.openxmlformats.org/officeDocument/2006/relationships" id="256" r:id="R325d1e99775e452a"/>
+    <p:sldId xmlns:r="http://schemas.openxmlformats.org/officeDocument/2006/relationships" id="257" r:id="R2674dd388a59415f"/>
+    <p:sldId xmlns:r="http://schemas.openxmlformats.org/officeDocument/2006/relationships" id="258" r:id="R196408fe71c14354"/>
+    <p:sldId xmlns:r="http://schemas.openxmlformats.org/officeDocument/2006/relationships" id="259" r:id="Rc4bf51956d4b44f6"/>
+    <p:sldId xmlns:r="http://schemas.openxmlformats.org/officeDocument/2006/relationships" id="260" r:id="Rb8ef8fa01d8e4eed"/>
+    <p:sldId xmlns:r="http://schemas.openxmlformats.org/officeDocument/2006/relationships" id="261" r:id="R26a22a564e7a4d2c"/>
+    <p:sldId xmlns:r="http://schemas.openxmlformats.org/officeDocument/2006/relationships" id="262" r:id="Rf35b97700e464219"/>
   </p:sldIdLst>
   <p:sldSz cx="12192000" cy="6858000"/>
   <p:notesSz cx="6858000" cy="9144000"/>
@@ -658,7 +658,7 @@
           <a:lstStyle xmlns:a="http://schemas.openxmlformats.org/drawingml/2006/main"/>
           <a:p xmlns:a="http://schemas.openxmlformats.org/drawingml/2006/main">
             <a:r>
-              <a:t>CMC official endpoint, batching, IDs,60second upstream update and one credit per250assets: https://coinmarketcap.com/api/documentation/pro-api-reference/cryptocurrency . Public route: https://coinmarketcap.com/api/documentation/pro-api-reference/keyless-public-api . Application cache is5minutes. IDs supported by implementation. Cash totals use integer cents. Recurring payroll replaces its share of monthly burn, rather than double-counting. Auth uses per-site stable user identity and per-user D1 record ownership.</a:t>
+              <a:t>CMC official endpoint, batching, IDs,60second upstream update and one credit per250assets: https://coinmarketcap.com/api/documentation/pro-api-reference/cryptocurrency . Public route: https://coinmarketcap.com/api/documentation/pro-api-reference/keyless-public-api . Application cache is5minutes. IDs supported by implementation. Cash totals use integer cents. Recurring payroll replaces its share of monthly burn, rather than double-counting. Firebase Google and anonymous Authentication identify users. Firestore rules enforce ownership and report immutability. Google sign-in and CMC refresh succeeded live. Report calculations run in the browser without independent backend attestation.</a:t>
             </a:r>
           </a:p>
         </p:txBody>
@@ -868,7 +868,7 @@
           <a:lstStyle xmlns:a="http://schemas.openxmlformats.org/drawingml/2006/main"/>
           <a:p xmlns:a="http://schemas.openxmlformats.org/drawingml/2006/main">
             <a:r>
-              <a:t>Repository supplied by user: https://github.com/shi1720/coinmarketcap . Public deployment confirmed by product owner: https://runway-guard.sg127977958.chatgpt.site . Campaign-key evidence, registration status, demo video, DoraHacks submission and X post need verification. Hackathon requirements: https://coinmarketcap.com/api/resources/api-hackathon/ . X post must link actual submission and demo video with#BuildwithCMC.</a:t>
+              <a:t>Repository supplied by user: https://github.com/shi1720/coinmarketcap . Public deployment confirmed by product owner: https://runway-guard-cmc.web.app . Campaign-key evidence, registration status, demo video, DoraHacks submission and X post need verification. Hackathon requirements: https://coinmarketcap.com/api/resources/api-hackathon/ . X post must link actual submission and demo video with#BuildwithCMC.</a:t>
             </a:r>
           </a:p>
         </p:txBody>
@@ -936,7 +936,7 @@
   </p:cSld>
   <p:clrMap bg1="lt1" tx1="dk1" bg2="lt2" tx2="dk2" accent1="accent1" accent2="accent2" accent3="accent3" accent4="accent4" accent5="accent5" accent6="accent6" hlink="hlink" folHlink="folHlink"/>
   <p:sldLayoutIdLst>
-    <p:sldLayoutId xmlns:r="http://schemas.openxmlformats.org/officeDocument/2006/relationships" id="2147483649" r:id="R72c7fb87ed4a4901"/>
+    <p:sldLayoutId xmlns:r="http://schemas.openxmlformats.org/officeDocument/2006/relationships" id="2147483649" r:id="R2d375f53b65c4af1"/>
   </p:sldLayoutIdLst>
   <p:txStyles>
     <p:titleStyle>
@@ -1487,7 +1487,7 @@
           <p:cNvPr id="6" name="">
             <a:extLst xmlns:a="http://schemas.openxmlformats.org/drawingml/2006/main">
               <a:ext uri="{FF2B5EF4-FFF2-40B4-BE49-F238E27FC236}">
-                <a16:creationId xmlns:a16="http://schemas.microsoft.com/office/drawing/2014/main" id="{9A9AAACA-8723-47B3-92CD-7E86677549DF}"/>
+                <a16:creationId xmlns:a16="http://schemas.microsoft.com/office/drawing/2014/main" id="{322957C3-39A9-492B-A8A5-EF3555C37DB7}"/>
               </a:ext>
             </a:extLst>
           </p:cNvPr>
@@ -1544,7 +1544,7 @@
           <p:cNvPr id="2" name="">
             <a:extLst xmlns:a="http://schemas.openxmlformats.org/drawingml/2006/main">
               <a:ext uri="{FF2B5EF4-FFF2-40B4-BE49-F238E27FC236}">
-                <a16:creationId xmlns:a16="http://schemas.microsoft.com/office/drawing/2014/main" id="{8D04909A-9FD7-4BF0-9D65-D5CAD0BB33F5}"/>
+                <a16:creationId xmlns:a16="http://schemas.microsoft.com/office/drawing/2014/main" id="{2C5228F9-84C5-478F-9C6F-27A30B3C1773}"/>
               </a:ext>
             </a:extLst>
           </p:cNvPr>
@@ -1601,7 +1601,7 @@
           <p:cNvPr id="3" name="">
             <a:extLst xmlns:a="http://schemas.openxmlformats.org/drawingml/2006/main">
               <a:ext uri="{FF2B5EF4-FFF2-40B4-BE49-F238E27FC236}">
-                <a16:creationId xmlns:a16="http://schemas.microsoft.com/office/drawing/2014/main" id="{9A98CB03-B376-49EA-98A6-621451C5C827}"/>
+                <a16:creationId xmlns:a16="http://schemas.microsoft.com/office/drawing/2014/main" id="{A7950C74-5BAB-400E-99F6-674428D11CD8}"/>
               </a:ext>
             </a:extLst>
           </p:cNvPr>
@@ -1681,7 +1681,7 @@
           <p:cNvPr id="4" name="">
             <a:extLst xmlns:a="http://schemas.openxmlformats.org/drawingml/2006/main">
               <a:ext uri="{FF2B5EF4-FFF2-40B4-BE49-F238E27FC236}">
-                <a16:creationId xmlns:a16="http://schemas.microsoft.com/office/drawing/2014/main" id="{F7DE72A7-F9C4-4682-A307-6A8E03DE8E00}"/>
+                <a16:creationId xmlns:a16="http://schemas.microsoft.com/office/drawing/2014/main" id="{F594F4CD-58D8-4925-9AEC-CD3A563270D0}"/>
               </a:ext>
             </a:extLst>
           </p:cNvPr>
@@ -1738,7 +1738,7 @@
           <p:cNvPr id="5" name="">
             <a:extLst xmlns:a="http://schemas.openxmlformats.org/drawingml/2006/main">
               <a:ext uri="{FF2B5EF4-FFF2-40B4-BE49-F238E27FC236}">
-                <a16:creationId xmlns:a16="http://schemas.microsoft.com/office/drawing/2014/main" id="{B4653555-C1A1-45B2-8C69-3F7035592C03}"/>
+                <a16:creationId xmlns:a16="http://schemas.microsoft.com/office/drawing/2014/main" id="{951AF8AD-FC4D-4A0C-A03E-5D3DE70FA2D6}"/>
               </a:ext>
             </a:extLst>
           </p:cNvPr>
@@ -1793,7 +1793,7 @@
     </p:spTree>
     <p:extLst>
       <p:ext uri="{BB962C8B-B14F-4D97-AF65-F5344CB8AC3E}">
-        <p14:creationId xmlns:p14="http://schemas.microsoft.com/office/powerpoint/2010/main" val="686296084"/>
+        <p14:creationId xmlns:p14="http://schemas.microsoft.com/office/powerpoint/2010/main" val="48930511"/>
       </p:ext>
     </p:extLst>
   </p:cSld>
@@ -1824,7 +1824,7 @@
           <p:cNvPr id="11" name="">
             <a:extLst xmlns:a="http://schemas.openxmlformats.org/drawingml/2006/main">
               <a:ext uri="{FF2B5EF4-FFF2-40B4-BE49-F238E27FC236}">
-                <a16:creationId xmlns:a16="http://schemas.microsoft.com/office/drawing/2014/main" id="{539A0B85-CC9E-4F6B-919C-5231AB2ACF46}"/>
+                <a16:creationId xmlns:a16="http://schemas.microsoft.com/office/drawing/2014/main" id="{511216CC-A2C1-4A0D-8F31-EA9D1E7A05BD}"/>
               </a:ext>
             </a:extLst>
           </p:cNvPr>
@@ -1881,7 +1881,7 @@
           <p:cNvPr id="2" name="">
             <a:extLst xmlns:a="http://schemas.openxmlformats.org/drawingml/2006/main">
               <a:ext uri="{FF2B5EF4-FFF2-40B4-BE49-F238E27FC236}">
-                <a16:creationId xmlns:a16="http://schemas.microsoft.com/office/drawing/2014/main" id="{9C520211-F696-4F09-9159-25A3F75E70D4}"/>
+                <a16:creationId xmlns:a16="http://schemas.microsoft.com/office/drawing/2014/main" id="{86D0BC8B-6C5D-4F60-9ED5-1D6F1E6E927B}"/>
               </a:ext>
             </a:extLst>
           </p:cNvPr>
@@ -1938,7 +1938,7 @@
           <p:cNvPr id="3" name="">
             <a:extLst xmlns:a="http://schemas.openxmlformats.org/drawingml/2006/main">
               <a:ext uri="{FF2B5EF4-FFF2-40B4-BE49-F238E27FC236}">
-                <a16:creationId xmlns:a16="http://schemas.microsoft.com/office/drawing/2014/main" id="{59C0E874-4DD7-4224-829B-2AC509DC99A8}"/>
+                <a16:creationId xmlns:a16="http://schemas.microsoft.com/office/drawing/2014/main" id="{8DF2307E-20CD-4893-85A6-12BB25BA4D64}"/>
               </a:ext>
             </a:extLst>
           </p:cNvPr>
@@ -1995,7 +1995,7 @@
           <p:cNvPr id="4" name="">
             <a:extLst xmlns:a="http://schemas.openxmlformats.org/drawingml/2006/main">
               <a:ext uri="{FF2B5EF4-FFF2-40B4-BE49-F238E27FC236}">
-                <a16:creationId xmlns:a16="http://schemas.microsoft.com/office/drawing/2014/main" id="{E7998079-BC23-470D-8FE9-F1F5AE8DA909}"/>
+                <a16:creationId xmlns:a16="http://schemas.microsoft.com/office/drawing/2014/main" id="{339217FC-E42E-48ED-AB89-53E03070A2F9}"/>
               </a:ext>
             </a:extLst>
           </p:cNvPr>
@@ -2052,7 +2052,7 @@
           <p:cNvPr id="5" name="">
             <a:extLst xmlns:a="http://schemas.openxmlformats.org/drawingml/2006/main">
               <a:ext uri="{FF2B5EF4-FFF2-40B4-BE49-F238E27FC236}">
-                <a16:creationId xmlns:a16="http://schemas.microsoft.com/office/drawing/2014/main" id="{1D5B6813-5A79-464A-86D7-80BBEE83FB8F}"/>
+                <a16:creationId xmlns:a16="http://schemas.microsoft.com/office/drawing/2014/main" id="{9BF30249-5EF5-408D-AC74-60FB3A6174AE}"/>
               </a:ext>
             </a:extLst>
           </p:cNvPr>
@@ -2109,7 +2109,7 @@
           <p:cNvPr id="6" name="">
             <a:extLst xmlns:a="http://schemas.openxmlformats.org/drawingml/2006/main">
               <a:ext uri="{FF2B5EF4-FFF2-40B4-BE49-F238E27FC236}">
-                <a16:creationId xmlns:a16="http://schemas.microsoft.com/office/drawing/2014/main" id="{8ACE70DD-2C74-474C-B6ED-C2981304A9EE}"/>
+                <a16:creationId xmlns:a16="http://schemas.microsoft.com/office/drawing/2014/main" id="{35BB3D7A-B498-433F-AE2F-7B2855476EFC}"/>
               </a:ext>
             </a:extLst>
           </p:cNvPr>
@@ -2166,7 +2166,7 @@
           <p:cNvPr id="7" name="">
             <a:extLst xmlns:a="http://schemas.openxmlformats.org/drawingml/2006/main">
               <a:ext uri="{FF2B5EF4-FFF2-40B4-BE49-F238E27FC236}">
-                <a16:creationId xmlns:a16="http://schemas.microsoft.com/office/drawing/2014/main" id="{95F11A60-8DB1-4F77-8B8E-739E3E52EDF8}"/>
+                <a16:creationId xmlns:a16="http://schemas.microsoft.com/office/drawing/2014/main" id="{9914E246-E3CB-4988-8483-A655028E29A6}"/>
               </a:ext>
             </a:extLst>
           </p:cNvPr>
@@ -2223,7 +2223,7 @@
           <p:cNvPr id="8" name="">
             <a:extLst xmlns:a="http://schemas.openxmlformats.org/drawingml/2006/main">
               <a:ext uri="{FF2B5EF4-FFF2-40B4-BE49-F238E27FC236}">
-                <a16:creationId xmlns:a16="http://schemas.microsoft.com/office/drawing/2014/main" id="{52329BBF-114B-4F72-AC6C-6EFB9ADC8393}"/>
+                <a16:creationId xmlns:a16="http://schemas.microsoft.com/office/drawing/2014/main" id="{540F9887-A9F8-433B-9E83-9A7B795F14D5}"/>
               </a:ext>
             </a:extLst>
           </p:cNvPr>
@@ -2280,7 +2280,7 @@
           <p:cNvPr id="9" name="">
             <a:extLst xmlns:a="http://schemas.openxmlformats.org/drawingml/2006/main">
               <a:ext uri="{FF2B5EF4-FFF2-40B4-BE49-F238E27FC236}">
-                <a16:creationId xmlns:a16="http://schemas.microsoft.com/office/drawing/2014/main" id="{486C6144-6693-424D-A2A6-D0D686078277}"/>
+                <a16:creationId xmlns:a16="http://schemas.microsoft.com/office/drawing/2014/main" id="{7CA68FBF-9754-4895-8C42-437261EFAE9A}"/>
               </a:ext>
             </a:extLst>
           </p:cNvPr>
@@ -2337,7 +2337,7 @@
           <p:cNvPr id="10" name="">
             <a:extLst xmlns:a="http://schemas.openxmlformats.org/drawingml/2006/main">
               <a:ext uri="{FF2B5EF4-FFF2-40B4-BE49-F238E27FC236}">
-                <a16:creationId xmlns:a16="http://schemas.microsoft.com/office/drawing/2014/main" id="{ED25B7AE-88B6-410C-A2C1-29406F8563E6}"/>
+                <a16:creationId xmlns:a16="http://schemas.microsoft.com/office/drawing/2014/main" id="{D516C84F-7CA8-4106-9509-F3BF2476E128}"/>
               </a:ext>
             </a:extLst>
           </p:cNvPr>
@@ -2392,7 +2392,7 @@
     </p:spTree>
     <p:extLst>
       <p:ext uri="{BB962C8B-B14F-4D97-AF65-F5344CB8AC3E}">
-        <p14:creationId xmlns:p14="http://schemas.microsoft.com/office/powerpoint/2010/main" val="1428078564"/>
+        <p14:creationId xmlns:p14="http://schemas.microsoft.com/office/powerpoint/2010/main" val="724927011"/>
       </p:ext>
     </p:extLst>
   </p:cSld>
@@ -2423,7 +2423,7 @@
           <p:cNvPr id="15" name="">
             <a:extLst xmlns:a="http://schemas.openxmlformats.org/drawingml/2006/main">
               <a:ext uri="{FF2B5EF4-FFF2-40B4-BE49-F238E27FC236}">
-                <a16:creationId xmlns:a16="http://schemas.microsoft.com/office/drawing/2014/main" id="{D85A09E0-19B3-47AD-B28B-2E4F46190C91}"/>
+                <a16:creationId xmlns:a16="http://schemas.microsoft.com/office/drawing/2014/main" id="{67B4EAD1-8613-44D1-A364-2420C3F53117}"/>
               </a:ext>
             </a:extLst>
           </p:cNvPr>
@@ -2480,7 +2480,7 @@
           <p:cNvPr id="2" name="">
             <a:extLst xmlns:a="http://schemas.openxmlformats.org/drawingml/2006/main">
               <a:ext uri="{FF2B5EF4-FFF2-40B4-BE49-F238E27FC236}">
-                <a16:creationId xmlns:a16="http://schemas.microsoft.com/office/drawing/2014/main" id="{55ACDBEF-AF74-4BAC-B9F3-8326F4CE7E94}"/>
+                <a16:creationId xmlns:a16="http://schemas.microsoft.com/office/drawing/2014/main" id="{41B8FDCC-71EC-4447-818A-ABBE4D39B105}"/>
               </a:ext>
             </a:extLst>
           </p:cNvPr>
@@ -2537,7 +2537,7 @@
           <p:cNvPr id="3" name="">
             <a:extLst xmlns:a="http://schemas.openxmlformats.org/drawingml/2006/main">
               <a:ext uri="{FF2B5EF4-FFF2-40B4-BE49-F238E27FC236}">
-                <a16:creationId xmlns:a16="http://schemas.microsoft.com/office/drawing/2014/main" id="{AD89E300-9460-47CA-A7D2-870F4EB150E2}"/>
+                <a16:creationId xmlns:a16="http://schemas.microsoft.com/office/drawing/2014/main" id="{A27042A5-3FB1-448D-86E4-1A0A63D4EBA7}"/>
               </a:ext>
             </a:extLst>
           </p:cNvPr>
@@ -2594,7 +2594,7 @@
           <p:cNvPr id="4" name="">
             <a:extLst xmlns:a="http://schemas.openxmlformats.org/drawingml/2006/main">
               <a:ext uri="{FF2B5EF4-FFF2-40B4-BE49-F238E27FC236}">
-                <a16:creationId xmlns:a16="http://schemas.microsoft.com/office/drawing/2014/main" id="{ABB67D76-0E8D-46F6-BEC7-F0172EC005AC}"/>
+                <a16:creationId xmlns:a16="http://schemas.microsoft.com/office/drawing/2014/main" id="{9D8A982E-5A91-46F6-A557-ABD5A972B5ED}"/>
               </a:ext>
             </a:extLst>
           </p:cNvPr>
@@ -2651,7 +2651,7 @@
           <p:cNvPr id="5" name="">
             <a:extLst xmlns:a="http://schemas.openxmlformats.org/drawingml/2006/main">
               <a:ext uri="{FF2B5EF4-FFF2-40B4-BE49-F238E27FC236}">
-                <a16:creationId xmlns:a16="http://schemas.microsoft.com/office/drawing/2014/main" id="{270AC2DC-1568-4C0D-9E08-4275FE62A82E}"/>
+                <a16:creationId xmlns:a16="http://schemas.microsoft.com/office/drawing/2014/main" id="{6563D14A-A8FA-41A1-B34D-6E1328DAFA09}"/>
               </a:ext>
             </a:extLst>
           </p:cNvPr>
@@ -2708,7 +2708,7 @@
           <p:cNvPr id="6" name="">
             <a:extLst xmlns:a="http://schemas.openxmlformats.org/drawingml/2006/main">
               <a:ext uri="{FF2B5EF4-FFF2-40B4-BE49-F238E27FC236}">
-                <a16:creationId xmlns:a16="http://schemas.microsoft.com/office/drawing/2014/main" id="{1C25CABA-5F43-4B8B-B231-31CFD55D6153}"/>
+                <a16:creationId xmlns:a16="http://schemas.microsoft.com/office/drawing/2014/main" id="{EDDA16CD-8A6D-4DCD-A5D5-0E891D799622}"/>
               </a:ext>
             </a:extLst>
           </p:cNvPr>
@@ -2765,7 +2765,7 @@
           <p:cNvPr id="7" name="">
             <a:extLst xmlns:a="http://schemas.openxmlformats.org/drawingml/2006/main">
               <a:ext uri="{FF2B5EF4-FFF2-40B4-BE49-F238E27FC236}">
-                <a16:creationId xmlns:a16="http://schemas.microsoft.com/office/drawing/2014/main" id="{9281D8D0-5FCA-4718-9B44-8EE7B0374B32}"/>
+                <a16:creationId xmlns:a16="http://schemas.microsoft.com/office/drawing/2014/main" id="{E1C0D915-8C25-4DA8-B1C4-998625B3DDCB}"/>
               </a:ext>
             </a:extLst>
           </p:cNvPr>
@@ -2822,7 +2822,7 @@
           <p:cNvPr id="8" name="">
             <a:extLst xmlns:a="http://schemas.openxmlformats.org/drawingml/2006/main">
               <a:ext uri="{FF2B5EF4-FFF2-40B4-BE49-F238E27FC236}">
-                <a16:creationId xmlns:a16="http://schemas.microsoft.com/office/drawing/2014/main" id="{9DE69E61-F680-4B8A-AFE1-7E4E30FB99EF}"/>
+                <a16:creationId xmlns:a16="http://schemas.microsoft.com/office/drawing/2014/main" id="{FFF54136-F32A-42CC-9B99-4AEEC4AD1353}"/>
               </a:ext>
             </a:extLst>
           </p:cNvPr>
@@ -2879,7 +2879,7 @@
           <p:cNvPr id="9" name="">
             <a:extLst xmlns:a="http://schemas.openxmlformats.org/drawingml/2006/main">
               <a:ext uri="{FF2B5EF4-FFF2-40B4-BE49-F238E27FC236}">
-                <a16:creationId xmlns:a16="http://schemas.microsoft.com/office/drawing/2014/main" id="{F561378C-DA4E-48AD-BAFF-5EF7CBD0DAF8}"/>
+                <a16:creationId xmlns:a16="http://schemas.microsoft.com/office/drawing/2014/main" id="{9527B9D8-79AD-4776-8E41-37562079274C}"/>
               </a:ext>
             </a:extLst>
           </p:cNvPr>
@@ -2936,7 +2936,7 @@
           <p:cNvPr id="10" name="">
             <a:extLst xmlns:a="http://schemas.openxmlformats.org/drawingml/2006/main">
               <a:ext uri="{FF2B5EF4-FFF2-40B4-BE49-F238E27FC236}">
-                <a16:creationId xmlns:a16="http://schemas.microsoft.com/office/drawing/2014/main" id="{888F4A94-4BD7-4881-8EB6-9FC73E65D514}"/>
+                <a16:creationId xmlns:a16="http://schemas.microsoft.com/office/drawing/2014/main" id="{69255EDE-0983-4166-908E-89FA1C275F7B}"/>
               </a:ext>
             </a:extLst>
           </p:cNvPr>
@@ -2993,7 +2993,7 @@
           <p:cNvPr id="11" name="">
             <a:extLst xmlns:a="http://schemas.openxmlformats.org/drawingml/2006/main">
               <a:ext uri="{FF2B5EF4-FFF2-40B4-BE49-F238E27FC236}">
-                <a16:creationId xmlns:a16="http://schemas.microsoft.com/office/drawing/2014/main" id="{CE37CDB8-D7EB-4E4C-B6CE-8059D564DDD9}"/>
+                <a16:creationId xmlns:a16="http://schemas.microsoft.com/office/drawing/2014/main" id="{842AD607-DC50-456C-AE8C-36BAC81947E0}"/>
               </a:ext>
             </a:extLst>
           </p:cNvPr>
@@ -3050,7 +3050,7 @@
           <p:cNvPr id="12" name="">
             <a:extLst xmlns:a="http://schemas.openxmlformats.org/drawingml/2006/main">
               <a:ext uri="{FF2B5EF4-FFF2-40B4-BE49-F238E27FC236}">
-                <a16:creationId xmlns:a16="http://schemas.microsoft.com/office/drawing/2014/main" id="{408D8343-9F4B-4CFF-B0D8-30321D312525}"/>
+                <a16:creationId xmlns:a16="http://schemas.microsoft.com/office/drawing/2014/main" id="{91DA2A0A-89ED-4D3C-9C7B-B6FFA59B03B9}"/>
               </a:ext>
             </a:extLst>
           </p:cNvPr>
@@ -3107,7 +3107,7 @@
           <p:cNvPr id="13" name="">
             <a:extLst xmlns:a="http://schemas.openxmlformats.org/drawingml/2006/main">
               <a:ext uri="{FF2B5EF4-FFF2-40B4-BE49-F238E27FC236}">
-                <a16:creationId xmlns:a16="http://schemas.microsoft.com/office/drawing/2014/main" id="{5F790DDB-92EB-4758-8D3F-DB3F99A95FB1}"/>
+                <a16:creationId xmlns:a16="http://schemas.microsoft.com/office/drawing/2014/main" id="{65881719-5153-41B3-B1CD-ADF6B2EE4B24}"/>
               </a:ext>
             </a:extLst>
           </p:cNvPr>
@@ -3164,7 +3164,7 @@
           <p:cNvPr id="14" name="">
             <a:extLst xmlns:a="http://schemas.openxmlformats.org/drawingml/2006/main">
               <a:ext uri="{FF2B5EF4-FFF2-40B4-BE49-F238E27FC236}">
-                <a16:creationId xmlns:a16="http://schemas.microsoft.com/office/drawing/2014/main" id="{30D045D3-E205-420B-862C-4A13C2B198F8}"/>
+                <a16:creationId xmlns:a16="http://schemas.microsoft.com/office/drawing/2014/main" id="{7572FBB5-8BD0-4F8E-8B88-90541097BF5A}"/>
               </a:ext>
             </a:extLst>
           </p:cNvPr>
@@ -3219,7 +3219,7 @@
     </p:spTree>
     <p:extLst>
       <p:ext uri="{BB962C8B-B14F-4D97-AF65-F5344CB8AC3E}">
-        <p14:creationId xmlns:p14="http://schemas.microsoft.com/office/powerpoint/2010/main" val="119495925"/>
+        <p14:creationId xmlns:p14="http://schemas.microsoft.com/office/powerpoint/2010/main" val="2089962153"/>
       </p:ext>
     </p:extLst>
   </p:cSld>
@@ -3250,7 +3250,7 @@
           <p:cNvPr id="10" name="">
             <a:extLst xmlns:a="http://schemas.openxmlformats.org/drawingml/2006/main">
               <a:ext uri="{FF2B5EF4-FFF2-40B4-BE49-F238E27FC236}">
-                <a16:creationId xmlns:a16="http://schemas.microsoft.com/office/drawing/2014/main" id="{18637726-D3B0-48F2-AB67-908C2F3279B3}"/>
+                <a16:creationId xmlns:a16="http://schemas.microsoft.com/office/drawing/2014/main" id="{0B46E331-2B54-470E-B8C0-E4504327E57D}"/>
               </a:ext>
             </a:extLst>
           </p:cNvPr>
@@ -3307,7 +3307,7 @@
           <p:cNvPr id="2" name="">
             <a:extLst xmlns:a="http://schemas.openxmlformats.org/drawingml/2006/main">
               <a:ext uri="{FF2B5EF4-FFF2-40B4-BE49-F238E27FC236}">
-                <a16:creationId xmlns:a16="http://schemas.microsoft.com/office/drawing/2014/main" id="{24FC3D3E-0FD2-40AC-BB6E-0E99B07DC1AD}"/>
+                <a16:creationId xmlns:a16="http://schemas.microsoft.com/office/drawing/2014/main" id="{9F385211-5A86-495F-ACBA-77E2F4FD8D6A}"/>
               </a:ext>
             </a:extLst>
           </p:cNvPr>
@@ -3364,7 +3364,7 @@
           <p:cNvPr id="3" name="">
             <a:extLst xmlns:a="http://schemas.openxmlformats.org/drawingml/2006/main">
               <a:ext uri="{FF2B5EF4-FFF2-40B4-BE49-F238E27FC236}">
-                <a16:creationId xmlns:a16="http://schemas.microsoft.com/office/drawing/2014/main" id="{55D8C3EF-A445-46E0-BD74-EE44AC168AC0}"/>
+                <a16:creationId xmlns:a16="http://schemas.microsoft.com/office/drawing/2014/main" id="{30937772-34BF-4AB4-AC48-3E6868BA1521}"/>
               </a:ext>
             </a:extLst>
           </p:cNvPr>
@@ -3421,7 +3421,7 @@
           <p:cNvPr id="4" name="">
             <a:extLst xmlns:a="http://schemas.openxmlformats.org/drawingml/2006/main">
               <a:ext uri="{FF2B5EF4-FFF2-40B4-BE49-F238E27FC236}">
-                <a16:creationId xmlns:a16="http://schemas.microsoft.com/office/drawing/2014/main" id="{9C2AE916-A090-40D5-8626-63DAADD293B0}"/>
+                <a16:creationId xmlns:a16="http://schemas.microsoft.com/office/drawing/2014/main" id="{2EF70FAC-4B98-4671-AD0D-D5157FFA9F08}"/>
               </a:ext>
             </a:extLst>
           </p:cNvPr>
@@ -3478,7 +3478,7 @@
           <p:cNvPr id="5" name="">
             <a:extLst xmlns:a="http://schemas.openxmlformats.org/drawingml/2006/main">
               <a:ext uri="{FF2B5EF4-FFF2-40B4-BE49-F238E27FC236}">
-                <a16:creationId xmlns:a16="http://schemas.microsoft.com/office/drawing/2014/main" id="{74710058-1FA4-472D-95D8-61A51A6B61C1}"/>
+                <a16:creationId xmlns:a16="http://schemas.microsoft.com/office/drawing/2014/main" id="{42BA3BF3-C6C0-4869-A1B7-EE19B3CBB4B6}"/>
               </a:ext>
             </a:extLst>
           </p:cNvPr>
@@ -3535,7 +3535,7 @@
           <p:cNvPr id="6" name="">
             <a:extLst xmlns:a="http://schemas.openxmlformats.org/drawingml/2006/main">
               <a:ext uri="{FF2B5EF4-FFF2-40B4-BE49-F238E27FC236}">
-                <a16:creationId xmlns:a16="http://schemas.microsoft.com/office/drawing/2014/main" id="{469A7037-2400-47E7-B0F1-A8B06425B41A}"/>
+                <a16:creationId xmlns:a16="http://schemas.microsoft.com/office/drawing/2014/main" id="{9B02A520-97F5-4613-853E-D19F68ACC70F}"/>
               </a:ext>
             </a:extLst>
           </p:cNvPr>
@@ -3592,7 +3592,7 @@
           <p:cNvPr id="7" name="">
             <a:extLst xmlns:a="http://schemas.openxmlformats.org/drawingml/2006/main">
               <a:ext uri="{FF2B5EF4-FFF2-40B4-BE49-F238E27FC236}">
-                <a16:creationId xmlns:a16="http://schemas.microsoft.com/office/drawing/2014/main" id="{F601B937-C65B-4972-ADE2-1E01057E193B}"/>
+                <a16:creationId xmlns:a16="http://schemas.microsoft.com/office/drawing/2014/main" id="{9DFE6C73-96B8-44AD-AE72-AF8DAB757E04}"/>
               </a:ext>
             </a:extLst>
           </p:cNvPr>
@@ -3649,7 +3649,7 @@
           <p:cNvPr id="8" name="">
             <a:extLst xmlns:a="http://schemas.openxmlformats.org/drawingml/2006/main">
               <a:ext uri="{FF2B5EF4-FFF2-40B4-BE49-F238E27FC236}">
-                <a16:creationId xmlns:a16="http://schemas.microsoft.com/office/drawing/2014/main" id="{95CD048F-0378-42BA-896E-194F48CA853F}"/>
+                <a16:creationId xmlns:a16="http://schemas.microsoft.com/office/drawing/2014/main" id="{6437C881-903C-48BD-9B6A-23E130FF930A}"/>
               </a:ext>
             </a:extLst>
           </p:cNvPr>
@@ -3706,7 +3706,7 @@
           <p:cNvPr id="9" name="">
             <a:extLst xmlns:a="http://schemas.openxmlformats.org/drawingml/2006/main">
               <a:ext uri="{FF2B5EF4-FFF2-40B4-BE49-F238E27FC236}">
-                <a16:creationId xmlns:a16="http://schemas.microsoft.com/office/drawing/2014/main" id="{A409E020-5F61-4196-B58D-2FBCDF3ED161}"/>
+                <a16:creationId xmlns:a16="http://schemas.microsoft.com/office/drawing/2014/main" id="{1A56F54C-EF93-4885-81CF-43FA772EEF37}"/>
               </a:ext>
             </a:extLst>
           </p:cNvPr>
@@ -3776,7 +3776,7 @@
                 <a:ea typeface="Helvetica Neue"/>
                 <a:cs typeface="Helvetica Neue"/>
               </a:rPr>
-              <a:t>User-owned D1 records through ChatGPT sign-in.</a:t>
+              <a:t>Owner-scoped Firestore records with Google sign-in.</a:t>
             </a:r>
           </a:p>
         </p:txBody>
@@ -3784,7 +3784,7 @@
     </p:spTree>
     <p:extLst>
       <p:ext uri="{BB962C8B-B14F-4D97-AF65-F5344CB8AC3E}">
-        <p14:creationId xmlns:p14="http://schemas.microsoft.com/office/powerpoint/2010/main" val="1066170074"/>
+        <p14:creationId xmlns:p14="http://schemas.microsoft.com/office/powerpoint/2010/main" val="1939860551"/>
       </p:ext>
     </p:extLst>
   </p:cSld>
@@ -3815,7 +3815,7 @@
           <p:cNvPr id="9" name="">
             <a:extLst xmlns:a="http://schemas.openxmlformats.org/drawingml/2006/main">
               <a:ext uri="{FF2B5EF4-FFF2-40B4-BE49-F238E27FC236}">
-                <a16:creationId xmlns:a16="http://schemas.microsoft.com/office/drawing/2014/main" id="{DE9C3C0D-782C-4C5D-9579-0B783384FBDF}"/>
+                <a16:creationId xmlns:a16="http://schemas.microsoft.com/office/drawing/2014/main" id="{35DC1959-05F8-43B8-8005-084AB60DAFFE}"/>
               </a:ext>
             </a:extLst>
           </p:cNvPr>
@@ -3872,7 +3872,7 @@
           <p:cNvPr id="2" name="">
             <a:extLst xmlns:a="http://schemas.openxmlformats.org/drawingml/2006/main">
               <a:ext uri="{FF2B5EF4-FFF2-40B4-BE49-F238E27FC236}">
-                <a16:creationId xmlns:a16="http://schemas.microsoft.com/office/drawing/2014/main" id="{B4B5613B-484A-4BD5-8893-67C12594FD56}"/>
+                <a16:creationId xmlns:a16="http://schemas.microsoft.com/office/drawing/2014/main" id="{458AF86D-C67A-4449-A76A-29A8C03A984F}"/>
               </a:ext>
             </a:extLst>
           </p:cNvPr>
@@ -3929,7 +3929,7 @@
           <p:cNvPr id="3" name="">
             <a:extLst xmlns:a="http://schemas.openxmlformats.org/drawingml/2006/main">
               <a:ext uri="{FF2B5EF4-FFF2-40B4-BE49-F238E27FC236}">
-                <a16:creationId xmlns:a16="http://schemas.microsoft.com/office/drawing/2014/main" id="{86815958-5738-4051-ABA0-CF7F42F3DCA3}"/>
+                <a16:creationId xmlns:a16="http://schemas.microsoft.com/office/drawing/2014/main" id="{4841BE2E-F81B-44FE-909B-C40B028C5734}"/>
               </a:ext>
             </a:extLst>
           </p:cNvPr>
@@ -3986,7 +3986,7 @@
           <p:cNvPr id="4" name="">
             <a:extLst xmlns:a="http://schemas.openxmlformats.org/drawingml/2006/main">
               <a:ext uri="{FF2B5EF4-FFF2-40B4-BE49-F238E27FC236}">
-                <a16:creationId xmlns:a16="http://schemas.microsoft.com/office/drawing/2014/main" id="{4F8D005E-7AA3-4C1A-B67E-B4A018F3E735}"/>
+                <a16:creationId xmlns:a16="http://schemas.microsoft.com/office/drawing/2014/main" id="{CF480CE7-D686-4C80-844E-F6E574EBCD43}"/>
               </a:ext>
             </a:extLst>
           </p:cNvPr>
@@ -4112,7 +4112,7 @@
           <p:cNvPr id="5" name="">
             <a:extLst xmlns:a="http://schemas.openxmlformats.org/drawingml/2006/main">
               <a:ext uri="{FF2B5EF4-FFF2-40B4-BE49-F238E27FC236}">
-                <a16:creationId xmlns:a16="http://schemas.microsoft.com/office/drawing/2014/main" id="{DFFC6CC6-B18C-460B-BE30-54379069DF5C}"/>
+                <a16:creationId xmlns:a16="http://schemas.microsoft.com/office/drawing/2014/main" id="{47D5B822-7470-4A49-9003-70BD5109413A}"/>
               </a:ext>
             </a:extLst>
           </p:cNvPr>
@@ -4169,7 +4169,7 @@
           <p:cNvPr id="6" name="">
             <a:extLst xmlns:a="http://schemas.openxmlformats.org/drawingml/2006/main">
               <a:ext uri="{FF2B5EF4-FFF2-40B4-BE49-F238E27FC236}">
-                <a16:creationId xmlns:a16="http://schemas.microsoft.com/office/drawing/2014/main" id="{85001C1E-96E2-496E-AA33-589643EBBC98}"/>
+                <a16:creationId xmlns:a16="http://schemas.microsoft.com/office/drawing/2014/main" id="{EC442845-C89E-4EAD-8672-B9574037054F}"/>
               </a:ext>
             </a:extLst>
           </p:cNvPr>
@@ -4295,7 +4295,7 @@
           <p:cNvPr id="7" name="">
             <a:extLst xmlns:a="http://schemas.openxmlformats.org/drawingml/2006/main">
               <a:ext uri="{FF2B5EF4-FFF2-40B4-BE49-F238E27FC236}">
-                <a16:creationId xmlns:a16="http://schemas.microsoft.com/office/drawing/2014/main" id="{19ED2967-222D-48C1-B779-5C7A6B6BEE88}"/>
+                <a16:creationId xmlns:a16="http://schemas.microsoft.com/office/drawing/2014/main" id="{ECB78B33-7014-4F89-9F77-096F937F6919}"/>
               </a:ext>
             </a:extLst>
           </p:cNvPr>
@@ -4352,7 +4352,7 @@
           <p:cNvPr id="8" name="">
             <a:extLst xmlns:a="http://schemas.openxmlformats.org/drawingml/2006/main">
               <a:ext uri="{FF2B5EF4-FFF2-40B4-BE49-F238E27FC236}">
-                <a16:creationId xmlns:a16="http://schemas.microsoft.com/office/drawing/2014/main" id="{712F2AAC-6305-498C-BB9B-25DA2B2B5513}"/>
+                <a16:creationId xmlns:a16="http://schemas.microsoft.com/office/drawing/2014/main" id="{18587CCC-A86C-4227-97E5-00DFA5A49AED}"/>
               </a:ext>
             </a:extLst>
           </p:cNvPr>
@@ -4407,7 +4407,7 @@
     </p:spTree>
     <p:extLst>
       <p:ext uri="{BB962C8B-B14F-4D97-AF65-F5344CB8AC3E}">
-        <p14:creationId xmlns:p14="http://schemas.microsoft.com/office/powerpoint/2010/main" val="1743974333"/>
+        <p14:creationId xmlns:p14="http://schemas.microsoft.com/office/powerpoint/2010/main" val="995823464"/>
       </p:ext>
     </p:extLst>
   </p:cSld>
@@ -4438,7 +4438,7 @@
           <p:cNvPr id="13" name="">
             <a:extLst xmlns:a="http://schemas.openxmlformats.org/drawingml/2006/main">
               <a:ext uri="{FF2B5EF4-FFF2-40B4-BE49-F238E27FC236}">
-                <a16:creationId xmlns:a16="http://schemas.microsoft.com/office/drawing/2014/main" id="{5BBC3771-F840-428A-A78B-3D9F13368C3F}"/>
+                <a16:creationId xmlns:a16="http://schemas.microsoft.com/office/drawing/2014/main" id="{18F389BD-9EC3-4596-8F62-CAF70F3A7ACB}"/>
               </a:ext>
             </a:extLst>
           </p:cNvPr>
@@ -4495,7 +4495,7 @@
           <p:cNvPr id="2" name="">
             <a:extLst xmlns:a="http://schemas.openxmlformats.org/drawingml/2006/main">
               <a:ext uri="{FF2B5EF4-FFF2-40B4-BE49-F238E27FC236}">
-                <a16:creationId xmlns:a16="http://schemas.microsoft.com/office/drawing/2014/main" id="{C5776A34-DCDF-4A81-892F-F1EBEED0DFB8}"/>
+                <a16:creationId xmlns:a16="http://schemas.microsoft.com/office/drawing/2014/main" id="{1840BF5A-698F-47A1-8904-DB89D049BCF4}"/>
               </a:ext>
             </a:extLst>
           </p:cNvPr>
@@ -4552,7 +4552,7 @@
           <p:cNvPr id="3" name="">
             <a:extLst xmlns:a="http://schemas.openxmlformats.org/drawingml/2006/main">
               <a:ext uri="{FF2B5EF4-FFF2-40B4-BE49-F238E27FC236}">
-                <a16:creationId xmlns:a16="http://schemas.microsoft.com/office/drawing/2014/main" id="{5E76BCCB-43B4-4A4C-A45F-85613D61747A}"/>
+                <a16:creationId xmlns:a16="http://schemas.microsoft.com/office/drawing/2014/main" id="{9B45D964-EE36-429A-B65D-C1414DECB155}"/>
               </a:ext>
             </a:extLst>
           </p:cNvPr>
@@ -4609,7 +4609,7 @@
           <p:cNvPr id="4" name="">
             <a:extLst xmlns:a="http://schemas.openxmlformats.org/drawingml/2006/main">
               <a:ext uri="{FF2B5EF4-FFF2-40B4-BE49-F238E27FC236}">
-                <a16:creationId xmlns:a16="http://schemas.microsoft.com/office/drawing/2014/main" id="{F85E2530-6CA4-4C0D-9BEA-4BA0E8165BA5}"/>
+                <a16:creationId xmlns:a16="http://schemas.microsoft.com/office/drawing/2014/main" id="{57341EF1-17BE-473F-92F5-AFB483B1D7DC}"/>
               </a:ext>
             </a:extLst>
           </p:cNvPr>
@@ -4666,7 +4666,7 @@
           <p:cNvPr id="5" name="">
             <a:extLst xmlns:a="http://schemas.openxmlformats.org/drawingml/2006/main">
               <a:ext uri="{FF2B5EF4-FFF2-40B4-BE49-F238E27FC236}">
-                <a16:creationId xmlns:a16="http://schemas.microsoft.com/office/drawing/2014/main" id="{A5F57586-A45C-4466-A303-BC1E577B5E81}"/>
+                <a16:creationId xmlns:a16="http://schemas.microsoft.com/office/drawing/2014/main" id="{A4C0B768-42BF-4182-8CB1-713D468676E1}"/>
               </a:ext>
             </a:extLst>
           </p:cNvPr>
@@ -4723,7 +4723,7 @@
           <p:cNvPr id="6" name="">
             <a:extLst xmlns:a="http://schemas.openxmlformats.org/drawingml/2006/main">
               <a:ext uri="{FF2B5EF4-FFF2-40B4-BE49-F238E27FC236}">
-                <a16:creationId xmlns:a16="http://schemas.microsoft.com/office/drawing/2014/main" id="{F7608730-28EB-45C2-B567-B7C4584B907A}"/>
+                <a16:creationId xmlns:a16="http://schemas.microsoft.com/office/drawing/2014/main" id="{F8BF7DAD-E494-4E56-8BBE-10F92759900A}"/>
               </a:ext>
             </a:extLst>
           </p:cNvPr>
@@ -4780,7 +4780,7 @@
           <p:cNvPr id="7" name="">
             <a:extLst xmlns:a="http://schemas.openxmlformats.org/drawingml/2006/main">
               <a:ext uri="{FF2B5EF4-FFF2-40B4-BE49-F238E27FC236}">
-                <a16:creationId xmlns:a16="http://schemas.microsoft.com/office/drawing/2014/main" id="{95C359AA-C6D7-4C18-923D-43137CC57FB4}"/>
+                <a16:creationId xmlns:a16="http://schemas.microsoft.com/office/drawing/2014/main" id="{D6072062-A749-4805-BD55-C79E39D19ED4}"/>
               </a:ext>
             </a:extLst>
           </p:cNvPr>
@@ -4860,7 +4860,7 @@
           <p:cNvPr id="8" name="">
             <a:extLst xmlns:a="http://schemas.openxmlformats.org/drawingml/2006/main">
               <a:ext uri="{FF2B5EF4-FFF2-40B4-BE49-F238E27FC236}">
-                <a16:creationId xmlns:a16="http://schemas.microsoft.com/office/drawing/2014/main" id="{67E997A9-2BF4-4CAA-8E1F-98B845CFA49C}"/>
+                <a16:creationId xmlns:a16="http://schemas.microsoft.com/office/drawing/2014/main" id="{8B456823-40E5-4493-B120-9369C9AFE326}"/>
               </a:ext>
             </a:extLst>
           </p:cNvPr>
@@ -4917,7 +4917,7 @@
           <p:cNvPr id="9" name="">
             <a:extLst xmlns:a="http://schemas.openxmlformats.org/drawingml/2006/main">
               <a:ext uri="{FF2B5EF4-FFF2-40B4-BE49-F238E27FC236}">
-                <a16:creationId xmlns:a16="http://schemas.microsoft.com/office/drawing/2014/main" id="{23C1CDEB-51F0-4470-96C0-0DB939139532}"/>
+                <a16:creationId xmlns:a16="http://schemas.microsoft.com/office/drawing/2014/main" id="{F1FCF765-88AD-4312-8F8B-F99370BF1AC7}"/>
               </a:ext>
             </a:extLst>
           </p:cNvPr>
@@ -4997,7 +4997,7 @@
           <p:cNvPr id="10" name="">
             <a:extLst xmlns:a="http://schemas.openxmlformats.org/drawingml/2006/main">
               <a:ext uri="{FF2B5EF4-FFF2-40B4-BE49-F238E27FC236}">
-                <a16:creationId xmlns:a16="http://schemas.microsoft.com/office/drawing/2014/main" id="{32DED7FD-1D74-407F-8775-7FA3C056EABD}"/>
+                <a16:creationId xmlns:a16="http://schemas.microsoft.com/office/drawing/2014/main" id="{9F54EDAB-6510-435B-B41F-E7E4F037DFC6}"/>
               </a:ext>
             </a:extLst>
           </p:cNvPr>
@@ -5054,7 +5054,7 @@
           <p:cNvPr id="11" name="">
             <a:extLst xmlns:a="http://schemas.openxmlformats.org/drawingml/2006/main">
               <a:ext uri="{FF2B5EF4-FFF2-40B4-BE49-F238E27FC236}">
-                <a16:creationId xmlns:a16="http://schemas.microsoft.com/office/drawing/2014/main" id="{CAA6607B-DF4E-48CC-BE8E-B3E70E580D43}"/>
+                <a16:creationId xmlns:a16="http://schemas.microsoft.com/office/drawing/2014/main" id="{58BF2966-09AC-45DD-AB75-D728ABDE119F}"/>
               </a:ext>
             </a:extLst>
           </p:cNvPr>
@@ -5111,7 +5111,7 @@
           <p:cNvPr id="12" name="">
             <a:extLst xmlns:a="http://schemas.openxmlformats.org/drawingml/2006/main">
               <a:ext uri="{FF2B5EF4-FFF2-40B4-BE49-F238E27FC236}">
-                <a16:creationId xmlns:a16="http://schemas.microsoft.com/office/drawing/2014/main" id="{ABCE1593-30F3-4A5D-BA10-D61FB9DF3278}"/>
+                <a16:creationId xmlns:a16="http://schemas.microsoft.com/office/drawing/2014/main" id="{D2F1FA40-6106-42B6-A0FE-A63D9DE9CE48}"/>
               </a:ext>
             </a:extLst>
           </p:cNvPr>
@@ -5166,7 +5166,7 @@
     </p:spTree>
     <p:extLst>
       <p:ext uri="{BB962C8B-B14F-4D97-AF65-F5344CB8AC3E}">
-        <p14:creationId xmlns:p14="http://schemas.microsoft.com/office/powerpoint/2010/main" val="1667628405"/>
+        <p14:creationId xmlns:p14="http://schemas.microsoft.com/office/powerpoint/2010/main" val="464155814"/>
       </p:ext>
     </p:extLst>
   </p:cSld>
@@ -5197,7 +5197,7 @@
           <p:cNvPr id="9" name="">
             <a:extLst xmlns:a="http://schemas.openxmlformats.org/drawingml/2006/main">
               <a:ext uri="{FF2B5EF4-FFF2-40B4-BE49-F238E27FC236}">
-                <a16:creationId xmlns:a16="http://schemas.microsoft.com/office/drawing/2014/main" id="{B6E0F8CB-FA72-489F-956B-5344DE23F973}"/>
+                <a16:creationId xmlns:a16="http://schemas.microsoft.com/office/drawing/2014/main" id="{38EFC5CF-0F3C-4121-9A18-A3FDD0CB6D78}"/>
               </a:ext>
             </a:extLst>
           </p:cNvPr>
@@ -5254,7 +5254,7 @@
           <p:cNvPr id="2" name="">
             <a:extLst xmlns:a="http://schemas.openxmlformats.org/drawingml/2006/main">
               <a:ext uri="{FF2B5EF4-FFF2-40B4-BE49-F238E27FC236}">
-                <a16:creationId xmlns:a16="http://schemas.microsoft.com/office/drawing/2014/main" id="{BF973B49-EBB3-4596-BA9B-95B14A39F913}"/>
+                <a16:creationId xmlns:a16="http://schemas.microsoft.com/office/drawing/2014/main" id="{EB2A31F2-D90B-4A99-A82A-6AD521A6D745}"/>
               </a:ext>
             </a:extLst>
           </p:cNvPr>
@@ -5311,7 +5311,7 @@
           <p:cNvPr id="3" name="">
             <a:extLst xmlns:a="http://schemas.openxmlformats.org/drawingml/2006/main">
               <a:ext uri="{FF2B5EF4-FFF2-40B4-BE49-F238E27FC236}">
-                <a16:creationId xmlns:a16="http://schemas.microsoft.com/office/drawing/2014/main" id="{FBC6468D-B9CE-4207-B4E8-728110CA3677}"/>
+                <a16:creationId xmlns:a16="http://schemas.microsoft.com/office/drawing/2014/main" id="{39DC5901-7816-4B01-8460-6228629EA4B9}"/>
               </a:ext>
             </a:extLst>
           </p:cNvPr>
@@ -5368,7 +5368,7 @@
           <p:cNvPr id="4" name="">
             <a:extLst xmlns:a="http://schemas.openxmlformats.org/drawingml/2006/main">
               <a:ext uri="{FF2B5EF4-FFF2-40B4-BE49-F238E27FC236}">
-                <a16:creationId xmlns:a16="http://schemas.microsoft.com/office/drawing/2014/main" id="{2836084E-EB57-4E21-8E4B-055F26FE0C3D}"/>
+                <a16:creationId xmlns:a16="http://schemas.microsoft.com/office/drawing/2014/main" id="{2CDA3472-05CC-4749-9E6F-929B53D78ECE}"/>
               </a:ext>
             </a:extLst>
           </p:cNvPr>
@@ -5425,7 +5425,7 @@
           <p:cNvPr id="5" name="">
             <a:extLst xmlns:a="http://schemas.openxmlformats.org/drawingml/2006/main">
               <a:ext uri="{FF2B5EF4-FFF2-40B4-BE49-F238E27FC236}">
-                <a16:creationId xmlns:a16="http://schemas.microsoft.com/office/drawing/2014/main" id="{DE4A02FF-FF2E-435A-919F-F431C13934C8}"/>
+                <a16:creationId xmlns:a16="http://schemas.microsoft.com/office/drawing/2014/main" id="{40A19EFB-1516-499C-9D88-25138BB01AA2}"/>
               </a:ext>
             </a:extLst>
           </p:cNvPr>
@@ -5482,7 +5482,7 @@
           <p:cNvPr id="6" name="">
             <a:extLst xmlns:a="http://schemas.openxmlformats.org/drawingml/2006/main">
               <a:ext uri="{FF2B5EF4-FFF2-40B4-BE49-F238E27FC236}">
-                <a16:creationId xmlns:a16="http://schemas.microsoft.com/office/drawing/2014/main" id="{7CAE97BF-FCE7-40B4-8870-F0E6FA6ADCB7}"/>
+                <a16:creationId xmlns:a16="http://schemas.microsoft.com/office/drawing/2014/main" id="{C3118E81-57B5-4B97-A598-819DBCA54251}"/>
               </a:ext>
             </a:extLst>
           </p:cNvPr>
@@ -5529,7 +5529,7 @@
                 <a:ea typeface="Helvetica Neue"/>
                 <a:cs typeface="Helvetica Neue"/>
               </a:rPr>
-              <a:t>runway-guard.sg127977958.chatgpt.site</a:t>
+              <a:t>runway-guard-cmc.web.app</a:t>
             </a:r>
           </a:p>
         </p:txBody>
@@ -5539,7 +5539,7 @@
           <p:cNvPr id="7" name="">
             <a:extLst xmlns:a="http://schemas.openxmlformats.org/drawingml/2006/main">
               <a:ext uri="{FF2B5EF4-FFF2-40B4-BE49-F238E27FC236}">
-                <a16:creationId xmlns:a16="http://schemas.microsoft.com/office/drawing/2014/main" id="{E32D082B-8032-4C5B-BC2A-ABA2D989C930}"/>
+                <a16:creationId xmlns:a16="http://schemas.microsoft.com/office/drawing/2014/main" id="{FCFCD3A0-E4D7-41B2-BE27-082386081753}"/>
               </a:ext>
             </a:extLst>
           </p:cNvPr>
@@ -5596,7 +5596,7 @@
           <p:cNvPr id="8" name="">
             <a:extLst xmlns:a="http://schemas.openxmlformats.org/drawingml/2006/main">
               <a:ext uri="{FF2B5EF4-FFF2-40B4-BE49-F238E27FC236}">
-                <a16:creationId xmlns:a16="http://schemas.microsoft.com/office/drawing/2014/main" id="{62706C74-7977-4DA3-9C39-3A87644F949E}"/>
+                <a16:creationId xmlns:a16="http://schemas.microsoft.com/office/drawing/2014/main" id="{1227F36A-25B2-4DA5-A8D4-E50609E7AD41}"/>
               </a:ext>
             </a:extLst>
           </p:cNvPr>
@@ -5651,7 +5651,7 @@
     </p:spTree>
     <p:extLst>
       <p:ext uri="{BB962C8B-B14F-4D97-AF65-F5344CB8AC3E}">
-        <p14:creationId xmlns:p14="http://schemas.microsoft.com/office/powerpoint/2010/main" val="456775743"/>
+        <p14:creationId xmlns:p14="http://schemas.microsoft.com/office/powerpoint/2010/main" val="1241920725"/>
       </p:ext>
     </p:extLst>
   </p:cSld>

--- a/docs/assets/Runway-Guard-Pitch.pptx
+++ b/docs/assets/Runway-Guard-Pitch.pptx
@@ -2,19 +2,19 @@
 <file path=ppt/presentation.xml><?xml version="1.0" encoding="utf-8"?>
 <p:presentation xmlns:p="http://schemas.openxmlformats.org/presentationml/2006/main">
   <p:sldMasterIdLst>
-    <p:sldMasterId xmlns:r="http://schemas.openxmlformats.org/officeDocument/2006/relationships" id="2147483648" r:id="R2b585b13c27d4821"/>
+    <p:sldMasterId xmlns:r="http://schemas.openxmlformats.org/officeDocument/2006/relationships" id="2147483648" r:id="R0fd37f1971fd40db"/>
   </p:sldMasterIdLst>
   <p:notesMasterIdLst>
-    <p:notesMasterId xmlns:r="http://schemas.openxmlformats.org/officeDocument/2006/relationships" r:id="Ra10a9a7c283749b1"/>
+    <p:notesMasterId xmlns:r="http://schemas.openxmlformats.org/officeDocument/2006/relationships" r:id="R235f3c1cd68844f9"/>
   </p:notesMasterIdLst>
   <p:sldIdLst>
-    <p:sldId xmlns:r="http://schemas.openxmlformats.org/officeDocument/2006/relationships" id="256" r:id="R325d1e99775e452a"/>
-    <p:sldId xmlns:r="http://schemas.openxmlformats.org/officeDocument/2006/relationships" id="257" r:id="R2674dd388a59415f"/>
-    <p:sldId xmlns:r="http://schemas.openxmlformats.org/officeDocument/2006/relationships" id="258" r:id="R196408fe71c14354"/>
-    <p:sldId xmlns:r="http://schemas.openxmlformats.org/officeDocument/2006/relationships" id="259" r:id="Rc4bf51956d4b44f6"/>
-    <p:sldId xmlns:r="http://schemas.openxmlformats.org/officeDocument/2006/relationships" id="260" r:id="Rb8ef8fa01d8e4eed"/>
-    <p:sldId xmlns:r="http://schemas.openxmlformats.org/officeDocument/2006/relationships" id="261" r:id="R26a22a564e7a4d2c"/>
-    <p:sldId xmlns:r="http://schemas.openxmlformats.org/officeDocument/2006/relationships" id="262" r:id="Rf35b97700e464219"/>
+    <p:sldId xmlns:r="http://schemas.openxmlformats.org/officeDocument/2006/relationships" id="256" r:id="R61a72167e1e84264"/>
+    <p:sldId xmlns:r="http://schemas.openxmlformats.org/officeDocument/2006/relationships" id="257" r:id="Rfa82eb84587346dd"/>
+    <p:sldId xmlns:r="http://schemas.openxmlformats.org/officeDocument/2006/relationships" id="258" r:id="R5d9d984703a94609"/>
+    <p:sldId xmlns:r="http://schemas.openxmlformats.org/officeDocument/2006/relationships" id="259" r:id="R4c96d211346346e8"/>
+    <p:sldId xmlns:r="http://schemas.openxmlformats.org/officeDocument/2006/relationships" id="260" r:id="Re6ac4a3e666f4289"/>
+    <p:sldId xmlns:r="http://schemas.openxmlformats.org/officeDocument/2006/relationships" id="261" r:id="Rbf5147dd04af4aea"/>
+    <p:sldId xmlns:r="http://schemas.openxmlformats.org/officeDocument/2006/relationships" id="262" r:id="R9d8031fc51664e32"/>
   </p:sldIdLst>
   <p:sldSz cx="12192000" cy="6858000"/>
   <p:notesSz cx="6858000" cy="9144000"/>
@@ -658,7 +658,7 @@
           <a:lstStyle xmlns:a="http://schemas.openxmlformats.org/drawingml/2006/main"/>
           <a:p xmlns:a="http://schemas.openxmlformats.org/drawingml/2006/main">
             <a:r>
-              <a:t>CMC official endpoint, batching, IDs,60second upstream update and one credit per250assets: https://coinmarketcap.com/api/documentation/pro-api-reference/cryptocurrency . Public route: https://coinmarketcap.com/api/documentation/pro-api-reference/keyless-public-api . Application cache is5minutes. IDs supported by implementation. Cash totals use integer cents. Recurring payroll replaces its share of monthly burn, rather than double-counting. Firebase Google and anonymous Authentication identify users. Firestore rules enforce ownership and report immutability. Google sign-in and CMC refresh succeeded live. Report calculations run in the browser without independent backend attestation.</a:t>
+              <a:t>CMC official endpoint, batching, IDs,60second upstream update and one credit per250assets: https://coinmarketcap.com/api/documentation/pro-api-reference/cryptocurrency . An existing participant-owned key authenticates the live server call. Sanitized request and response evidence show HTTP200 and five assets. Earlier keyless calls remain fallback evidence. Basic account and campaign Startup grant unverified. Public fallback route docs: https://coinmarketcap.com/api/documentation/pro-api-reference/keyless-public-api . Application cache is5minutes. IDs supported by implementation. Cash totals use integer cents. Recurring payroll replaces its share of monthly burn, rather than double-counting. Firebase Google and anonymous Authentication identify users. Firestore rules enforce ownership and report immutability. Google sign-in and CMC refresh succeeded live. Report calculations run in the browser without independent backend attestation.</a:t>
             </a:r>
           </a:p>
         </p:txBody>
@@ -868,7 +868,7 @@
           <a:lstStyle xmlns:a="http://schemas.openxmlformats.org/drawingml/2006/main"/>
           <a:p xmlns:a="http://schemas.openxmlformats.org/drawingml/2006/main">
             <a:r>
-              <a:t>Repository supplied by user: https://github.com/shi1720/coinmarketcap . Public deployment confirmed by product owner: https://runway-guard-cmc.web.app . Campaign-key evidence, registration status, demo video, DoraHacks submission and X post need verification. Hackathon requirements: https://coinmarketcap.com/api/resources/api-hackathon/ . X post must link actual submission and demo video with#BuildwithCMC.</a:t>
+              <a:t>Repository supplied by user: https://github.com/shi1720/coinmarketcap . Public deployment confirmed by product owner: https://runway-guard-cmc.web.app . Hosted video https://runway-guard-cmc.web.app/demo.html is ready. Authenticated own-key HTTP200 five-asset evidence is captured. The account is Basic and campaign Startup access remains unverified. DoraHacks contact fields are saved and Markets and Trading Tools is selected. Final agreement and the X post URL remain. No public BUIDL or X post URL exists. YouTube publication awaits explicit browser terms confirmation. Hackathon requirements: https://coinmarketcap.com/api/resources/api-hackathon/ . X post must link actual submission and demo video with#BuildwithCMC.</a:t>
             </a:r>
           </a:p>
         </p:txBody>
@@ -936,7 +936,7 @@
   </p:cSld>
   <p:clrMap bg1="lt1" tx1="dk1" bg2="lt2" tx2="dk2" accent1="accent1" accent2="accent2" accent3="accent3" accent4="accent4" accent5="accent5" accent6="accent6" hlink="hlink" folHlink="folHlink"/>
   <p:sldLayoutIdLst>
-    <p:sldLayoutId xmlns:r="http://schemas.openxmlformats.org/officeDocument/2006/relationships" id="2147483649" r:id="R2d375f53b65c4af1"/>
+    <p:sldLayoutId xmlns:r="http://schemas.openxmlformats.org/officeDocument/2006/relationships" id="2147483649" r:id="Re3e4392e584f46f6"/>
   </p:sldLayoutIdLst>
   <p:txStyles>
     <p:titleStyle>
@@ -1487,7 +1487,7 @@
           <p:cNvPr id="6" name="">
             <a:extLst xmlns:a="http://schemas.openxmlformats.org/drawingml/2006/main">
               <a:ext uri="{FF2B5EF4-FFF2-40B4-BE49-F238E27FC236}">
-                <a16:creationId xmlns:a16="http://schemas.microsoft.com/office/drawing/2014/main" id="{322957C3-39A9-492B-A8A5-EF3555C37DB7}"/>
+                <a16:creationId xmlns:a16="http://schemas.microsoft.com/office/drawing/2014/main" id="{9B40CC3E-3232-4606-97ED-C62EB405F224}"/>
               </a:ext>
             </a:extLst>
           </p:cNvPr>
@@ -1544,7 +1544,7 @@
           <p:cNvPr id="2" name="">
             <a:extLst xmlns:a="http://schemas.openxmlformats.org/drawingml/2006/main">
               <a:ext uri="{FF2B5EF4-FFF2-40B4-BE49-F238E27FC236}">
-                <a16:creationId xmlns:a16="http://schemas.microsoft.com/office/drawing/2014/main" id="{2C5228F9-84C5-478F-9C6F-27A30B3C1773}"/>
+                <a16:creationId xmlns:a16="http://schemas.microsoft.com/office/drawing/2014/main" id="{2166A66E-94D7-49A0-BADD-22ABE2509158}"/>
               </a:ext>
             </a:extLst>
           </p:cNvPr>
@@ -1601,7 +1601,7 @@
           <p:cNvPr id="3" name="">
             <a:extLst xmlns:a="http://schemas.openxmlformats.org/drawingml/2006/main">
               <a:ext uri="{FF2B5EF4-FFF2-40B4-BE49-F238E27FC236}">
-                <a16:creationId xmlns:a16="http://schemas.microsoft.com/office/drawing/2014/main" id="{A7950C74-5BAB-400E-99F6-674428D11CD8}"/>
+                <a16:creationId xmlns:a16="http://schemas.microsoft.com/office/drawing/2014/main" id="{65AFBFDD-0371-4D08-8AC7-164F03F5F696}"/>
               </a:ext>
             </a:extLst>
           </p:cNvPr>
@@ -1681,7 +1681,7 @@
           <p:cNvPr id="4" name="">
             <a:extLst xmlns:a="http://schemas.openxmlformats.org/drawingml/2006/main">
               <a:ext uri="{FF2B5EF4-FFF2-40B4-BE49-F238E27FC236}">
-                <a16:creationId xmlns:a16="http://schemas.microsoft.com/office/drawing/2014/main" id="{F594F4CD-58D8-4925-9AEC-CD3A563270D0}"/>
+                <a16:creationId xmlns:a16="http://schemas.microsoft.com/office/drawing/2014/main" id="{14D8122F-E72B-4481-9501-29EBC27FED29}"/>
               </a:ext>
             </a:extLst>
           </p:cNvPr>
@@ -1738,7 +1738,7 @@
           <p:cNvPr id="5" name="">
             <a:extLst xmlns:a="http://schemas.openxmlformats.org/drawingml/2006/main">
               <a:ext uri="{FF2B5EF4-FFF2-40B4-BE49-F238E27FC236}">
-                <a16:creationId xmlns:a16="http://schemas.microsoft.com/office/drawing/2014/main" id="{951AF8AD-FC4D-4A0C-A03E-5D3DE70FA2D6}"/>
+                <a16:creationId xmlns:a16="http://schemas.microsoft.com/office/drawing/2014/main" id="{CCAEB91B-C0F8-43F8-8944-3C11EA1242FE}"/>
               </a:ext>
             </a:extLst>
           </p:cNvPr>
@@ -1793,7 +1793,7 @@
     </p:spTree>
     <p:extLst>
       <p:ext uri="{BB962C8B-B14F-4D97-AF65-F5344CB8AC3E}">
-        <p14:creationId xmlns:p14="http://schemas.microsoft.com/office/powerpoint/2010/main" val="48930511"/>
+        <p14:creationId xmlns:p14="http://schemas.microsoft.com/office/powerpoint/2010/main" val="677834694"/>
       </p:ext>
     </p:extLst>
   </p:cSld>
@@ -1824,7 +1824,7 @@
           <p:cNvPr id="11" name="">
             <a:extLst xmlns:a="http://schemas.openxmlformats.org/drawingml/2006/main">
               <a:ext uri="{FF2B5EF4-FFF2-40B4-BE49-F238E27FC236}">
-                <a16:creationId xmlns:a16="http://schemas.microsoft.com/office/drawing/2014/main" id="{511216CC-A2C1-4A0D-8F31-EA9D1E7A05BD}"/>
+                <a16:creationId xmlns:a16="http://schemas.microsoft.com/office/drawing/2014/main" id="{85844F10-73C1-4EF6-ADA1-B07628338E0F}"/>
               </a:ext>
             </a:extLst>
           </p:cNvPr>
@@ -1881,7 +1881,7 @@
           <p:cNvPr id="2" name="">
             <a:extLst xmlns:a="http://schemas.openxmlformats.org/drawingml/2006/main">
               <a:ext uri="{FF2B5EF4-FFF2-40B4-BE49-F238E27FC236}">
-                <a16:creationId xmlns:a16="http://schemas.microsoft.com/office/drawing/2014/main" id="{86D0BC8B-6C5D-4F60-9ED5-1D6F1E6E927B}"/>
+                <a16:creationId xmlns:a16="http://schemas.microsoft.com/office/drawing/2014/main" id="{3613C359-DE1D-47A6-B32C-643D72BCD9F4}"/>
               </a:ext>
             </a:extLst>
           </p:cNvPr>
@@ -1938,7 +1938,7 @@
           <p:cNvPr id="3" name="">
             <a:extLst xmlns:a="http://schemas.openxmlformats.org/drawingml/2006/main">
               <a:ext uri="{FF2B5EF4-FFF2-40B4-BE49-F238E27FC236}">
-                <a16:creationId xmlns:a16="http://schemas.microsoft.com/office/drawing/2014/main" id="{8DF2307E-20CD-4893-85A6-12BB25BA4D64}"/>
+                <a16:creationId xmlns:a16="http://schemas.microsoft.com/office/drawing/2014/main" id="{6B959C16-1301-4F5F-9D8A-949DF98C3E78}"/>
               </a:ext>
             </a:extLst>
           </p:cNvPr>
@@ -1995,7 +1995,7 @@
           <p:cNvPr id="4" name="">
             <a:extLst xmlns:a="http://schemas.openxmlformats.org/drawingml/2006/main">
               <a:ext uri="{FF2B5EF4-FFF2-40B4-BE49-F238E27FC236}">
-                <a16:creationId xmlns:a16="http://schemas.microsoft.com/office/drawing/2014/main" id="{339217FC-E42E-48ED-AB89-53E03070A2F9}"/>
+                <a16:creationId xmlns:a16="http://schemas.microsoft.com/office/drawing/2014/main" id="{90F0FE44-DE82-49FE-ABC4-CE08B2127861}"/>
               </a:ext>
             </a:extLst>
           </p:cNvPr>
@@ -2052,7 +2052,7 @@
           <p:cNvPr id="5" name="">
             <a:extLst xmlns:a="http://schemas.openxmlformats.org/drawingml/2006/main">
               <a:ext uri="{FF2B5EF4-FFF2-40B4-BE49-F238E27FC236}">
-                <a16:creationId xmlns:a16="http://schemas.microsoft.com/office/drawing/2014/main" id="{9BF30249-5EF5-408D-AC74-60FB3A6174AE}"/>
+                <a16:creationId xmlns:a16="http://schemas.microsoft.com/office/drawing/2014/main" id="{6EB72064-0E14-4A31-A601-291CC913B269}"/>
               </a:ext>
             </a:extLst>
           </p:cNvPr>
@@ -2109,7 +2109,7 @@
           <p:cNvPr id="6" name="">
             <a:extLst xmlns:a="http://schemas.openxmlformats.org/drawingml/2006/main">
               <a:ext uri="{FF2B5EF4-FFF2-40B4-BE49-F238E27FC236}">
-                <a16:creationId xmlns:a16="http://schemas.microsoft.com/office/drawing/2014/main" id="{35BB3D7A-B498-433F-AE2F-7B2855476EFC}"/>
+                <a16:creationId xmlns:a16="http://schemas.microsoft.com/office/drawing/2014/main" id="{63F8C9D5-91FF-40E4-91FC-C1017F7C727F}"/>
               </a:ext>
             </a:extLst>
           </p:cNvPr>
@@ -2166,7 +2166,7 @@
           <p:cNvPr id="7" name="">
             <a:extLst xmlns:a="http://schemas.openxmlformats.org/drawingml/2006/main">
               <a:ext uri="{FF2B5EF4-FFF2-40B4-BE49-F238E27FC236}">
-                <a16:creationId xmlns:a16="http://schemas.microsoft.com/office/drawing/2014/main" id="{9914E246-E3CB-4988-8483-A655028E29A6}"/>
+                <a16:creationId xmlns:a16="http://schemas.microsoft.com/office/drawing/2014/main" id="{15C14BED-A7D2-4FF3-B7BD-8269BE025EFA}"/>
               </a:ext>
             </a:extLst>
           </p:cNvPr>
@@ -2223,7 +2223,7 @@
           <p:cNvPr id="8" name="">
             <a:extLst xmlns:a="http://schemas.openxmlformats.org/drawingml/2006/main">
               <a:ext uri="{FF2B5EF4-FFF2-40B4-BE49-F238E27FC236}">
-                <a16:creationId xmlns:a16="http://schemas.microsoft.com/office/drawing/2014/main" id="{540F9887-A9F8-433B-9E83-9A7B795F14D5}"/>
+                <a16:creationId xmlns:a16="http://schemas.microsoft.com/office/drawing/2014/main" id="{2099978A-9349-4477-A673-3D110855069A}"/>
               </a:ext>
             </a:extLst>
           </p:cNvPr>
@@ -2280,7 +2280,7 @@
           <p:cNvPr id="9" name="">
             <a:extLst xmlns:a="http://schemas.openxmlformats.org/drawingml/2006/main">
               <a:ext uri="{FF2B5EF4-FFF2-40B4-BE49-F238E27FC236}">
-                <a16:creationId xmlns:a16="http://schemas.microsoft.com/office/drawing/2014/main" id="{7CA68FBF-9754-4895-8C42-437261EFAE9A}"/>
+                <a16:creationId xmlns:a16="http://schemas.microsoft.com/office/drawing/2014/main" id="{48982639-4D16-4A96-B7CD-7F26D28BD2CC}"/>
               </a:ext>
             </a:extLst>
           </p:cNvPr>
@@ -2337,7 +2337,7 @@
           <p:cNvPr id="10" name="">
             <a:extLst xmlns:a="http://schemas.openxmlformats.org/drawingml/2006/main">
               <a:ext uri="{FF2B5EF4-FFF2-40B4-BE49-F238E27FC236}">
-                <a16:creationId xmlns:a16="http://schemas.microsoft.com/office/drawing/2014/main" id="{D516C84F-7CA8-4106-9509-F3BF2476E128}"/>
+                <a16:creationId xmlns:a16="http://schemas.microsoft.com/office/drawing/2014/main" id="{672DD886-EF01-4388-A233-71D65AA32D2E}"/>
               </a:ext>
             </a:extLst>
           </p:cNvPr>
@@ -2392,7 +2392,7 @@
     </p:spTree>
     <p:extLst>
       <p:ext uri="{BB962C8B-B14F-4D97-AF65-F5344CB8AC3E}">
-        <p14:creationId xmlns:p14="http://schemas.microsoft.com/office/powerpoint/2010/main" val="724927011"/>
+        <p14:creationId xmlns:p14="http://schemas.microsoft.com/office/powerpoint/2010/main" val="1548413245"/>
       </p:ext>
     </p:extLst>
   </p:cSld>
@@ -2423,7 +2423,7 @@
           <p:cNvPr id="15" name="">
             <a:extLst xmlns:a="http://schemas.openxmlformats.org/drawingml/2006/main">
               <a:ext uri="{FF2B5EF4-FFF2-40B4-BE49-F238E27FC236}">
-                <a16:creationId xmlns:a16="http://schemas.microsoft.com/office/drawing/2014/main" id="{67B4EAD1-8613-44D1-A364-2420C3F53117}"/>
+                <a16:creationId xmlns:a16="http://schemas.microsoft.com/office/drawing/2014/main" id="{8B244E02-B327-405D-96B4-F5486B77BD16}"/>
               </a:ext>
             </a:extLst>
           </p:cNvPr>
@@ -2480,7 +2480,7 @@
           <p:cNvPr id="2" name="">
             <a:extLst xmlns:a="http://schemas.openxmlformats.org/drawingml/2006/main">
               <a:ext uri="{FF2B5EF4-FFF2-40B4-BE49-F238E27FC236}">
-                <a16:creationId xmlns:a16="http://schemas.microsoft.com/office/drawing/2014/main" id="{41B8FDCC-71EC-4447-818A-ABBE4D39B105}"/>
+                <a16:creationId xmlns:a16="http://schemas.microsoft.com/office/drawing/2014/main" id="{6C738D17-896F-4381-8B40-672F151F197A}"/>
               </a:ext>
             </a:extLst>
           </p:cNvPr>
@@ -2537,7 +2537,7 @@
           <p:cNvPr id="3" name="">
             <a:extLst xmlns:a="http://schemas.openxmlformats.org/drawingml/2006/main">
               <a:ext uri="{FF2B5EF4-FFF2-40B4-BE49-F238E27FC236}">
-                <a16:creationId xmlns:a16="http://schemas.microsoft.com/office/drawing/2014/main" id="{A27042A5-3FB1-448D-86E4-1A0A63D4EBA7}"/>
+                <a16:creationId xmlns:a16="http://schemas.microsoft.com/office/drawing/2014/main" id="{900D5413-D4D4-461D-A54A-58DA7417FF4A}"/>
               </a:ext>
             </a:extLst>
           </p:cNvPr>
@@ -2594,7 +2594,7 @@
           <p:cNvPr id="4" name="">
             <a:extLst xmlns:a="http://schemas.openxmlformats.org/drawingml/2006/main">
               <a:ext uri="{FF2B5EF4-FFF2-40B4-BE49-F238E27FC236}">
-                <a16:creationId xmlns:a16="http://schemas.microsoft.com/office/drawing/2014/main" id="{9D8A982E-5A91-46F6-A557-ABD5A972B5ED}"/>
+                <a16:creationId xmlns:a16="http://schemas.microsoft.com/office/drawing/2014/main" id="{27BCD0DF-ED7C-47B1-B110-4A9D8C4664B0}"/>
               </a:ext>
             </a:extLst>
           </p:cNvPr>
@@ -2651,7 +2651,7 @@
           <p:cNvPr id="5" name="">
             <a:extLst xmlns:a="http://schemas.openxmlformats.org/drawingml/2006/main">
               <a:ext uri="{FF2B5EF4-FFF2-40B4-BE49-F238E27FC236}">
-                <a16:creationId xmlns:a16="http://schemas.microsoft.com/office/drawing/2014/main" id="{6563D14A-A8FA-41A1-B34D-6E1328DAFA09}"/>
+                <a16:creationId xmlns:a16="http://schemas.microsoft.com/office/drawing/2014/main" id="{B0EE3ADD-F5E9-4EE0-8714-D7343649E1CC}"/>
               </a:ext>
             </a:extLst>
           </p:cNvPr>
@@ -2708,7 +2708,7 @@
           <p:cNvPr id="6" name="">
             <a:extLst xmlns:a="http://schemas.openxmlformats.org/drawingml/2006/main">
               <a:ext uri="{FF2B5EF4-FFF2-40B4-BE49-F238E27FC236}">
-                <a16:creationId xmlns:a16="http://schemas.microsoft.com/office/drawing/2014/main" id="{EDDA16CD-8A6D-4DCD-A5D5-0E891D799622}"/>
+                <a16:creationId xmlns:a16="http://schemas.microsoft.com/office/drawing/2014/main" id="{AF95F555-DFBC-473C-B182-C08424F79034}"/>
               </a:ext>
             </a:extLst>
           </p:cNvPr>
@@ -2765,7 +2765,7 @@
           <p:cNvPr id="7" name="">
             <a:extLst xmlns:a="http://schemas.openxmlformats.org/drawingml/2006/main">
               <a:ext uri="{FF2B5EF4-FFF2-40B4-BE49-F238E27FC236}">
-                <a16:creationId xmlns:a16="http://schemas.microsoft.com/office/drawing/2014/main" id="{E1C0D915-8C25-4DA8-B1C4-998625B3DDCB}"/>
+                <a16:creationId xmlns:a16="http://schemas.microsoft.com/office/drawing/2014/main" id="{35CDCF4E-0C69-4B7F-A4C7-9649835E7846}"/>
               </a:ext>
             </a:extLst>
           </p:cNvPr>
@@ -2822,7 +2822,7 @@
           <p:cNvPr id="8" name="">
             <a:extLst xmlns:a="http://schemas.openxmlformats.org/drawingml/2006/main">
               <a:ext uri="{FF2B5EF4-FFF2-40B4-BE49-F238E27FC236}">
-                <a16:creationId xmlns:a16="http://schemas.microsoft.com/office/drawing/2014/main" id="{FFF54136-F32A-42CC-9B99-4AEEC4AD1353}"/>
+                <a16:creationId xmlns:a16="http://schemas.microsoft.com/office/drawing/2014/main" id="{638DEDA0-EF3C-47CF-9283-907E207A07A1}"/>
               </a:ext>
             </a:extLst>
           </p:cNvPr>
@@ -2879,7 +2879,7 @@
           <p:cNvPr id="9" name="">
             <a:extLst xmlns:a="http://schemas.openxmlformats.org/drawingml/2006/main">
               <a:ext uri="{FF2B5EF4-FFF2-40B4-BE49-F238E27FC236}">
-                <a16:creationId xmlns:a16="http://schemas.microsoft.com/office/drawing/2014/main" id="{9527B9D8-79AD-4776-8E41-37562079274C}"/>
+                <a16:creationId xmlns:a16="http://schemas.microsoft.com/office/drawing/2014/main" id="{F12332BC-1056-4E5A-BB15-46F8978EEED1}"/>
               </a:ext>
             </a:extLst>
           </p:cNvPr>
@@ -2936,7 +2936,7 @@
           <p:cNvPr id="10" name="">
             <a:extLst xmlns:a="http://schemas.openxmlformats.org/drawingml/2006/main">
               <a:ext uri="{FF2B5EF4-FFF2-40B4-BE49-F238E27FC236}">
-                <a16:creationId xmlns:a16="http://schemas.microsoft.com/office/drawing/2014/main" id="{69255EDE-0983-4166-908E-89FA1C275F7B}"/>
+                <a16:creationId xmlns:a16="http://schemas.microsoft.com/office/drawing/2014/main" id="{41D70631-6520-48D7-8372-D3A8AEA5E61E}"/>
               </a:ext>
             </a:extLst>
           </p:cNvPr>
@@ -2993,7 +2993,7 @@
           <p:cNvPr id="11" name="">
             <a:extLst xmlns:a="http://schemas.openxmlformats.org/drawingml/2006/main">
               <a:ext uri="{FF2B5EF4-FFF2-40B4-BE49-F238E27FC236}">
-                <a16:creationId xmlns:a16="http://schemas.microsoft.com/office/drawing/2014/main" id="{842AD607-DC50-456C-AE8C-36BAC81947E0}"/>
+                <a16:creationId xmlns:a16="http://schemas.microsoft.com/office/drawing/2014/main" id="{963DD3E9-4763-4FFB-9075-0C523C224F8D}"/>
               </a:ext>
             </a:extLst>
           </p:cNvPr>
@@ -3050,7 +3050,7 @@
           <p:cNvPr id="12" name="">
             <a:extLst xmlns:a="http://schemas.openxmlformats.org/drawingml/2006/main">
               <a:ext uri="{FF2B5EF4-FFF2-40B4-BE49-F238E27FC236}">
-                <a16:creationId xmlns:a16="http://schemas.microsoft.com/office/drawing/2014/main" id="{91DA2A0A-89ED-4D3C-9C7B-B6FFA59B03B9}"/>
+                <a16:creationId xmlns:a16="http://schemas.microsoft.com/office/drawing/2014/main" id="{ED73AEC5-090C-4ACA-99A1-5D314AFCF0A1}"/>
               </a:ext>
             </a:extLst>
           </p:cNvPr>
@@ -3107,7 +3107,7 @@
           <p:cNvPr id="13" name="">
             <a:extLst xmlns:a="http://schemas.openxmlformats.org/drawingml/2006/main">
               <a:ext uri="{FF2B5EF4-FFF2-40B4-BE49-F238E27FC236}">
-                <a16:creationId xmlns:a16="http://schemas.microsoft.com/office/drawing/2014/main" id="{65881719-5153-41B3-B1CD-ADF6B2EE4B24}"/>
+                <a16:creationId xmlns:a16="http://schemas.microsoft.com/office/drawing/2014/main" id="{1CA56E5E-CF10-46F4-AA5C-9E7C6BD93753}"/>
               </a:ext>
             </a:extLst>
           </p:cNvPr>
@@ -3164,7 +3164,7 @@
           <p:cNvPr id="14" name="">
             <a:extLst xmlns:a="http://schemas.openxmlformats.org/drawingml/2006/main">
               <a:ext uri="{FF2B5EF4-FFF2-40B4-BE49-F238E27FC236}">
-                <a16:creationId xmlns:a16="http://schemas.microsoft.com/office/drawing/2014/main" id="{7572FBB5-8BD0-4F8E-8B88-90541097BF5A}"/>
+                <a16:creationId xmlns:a16="http://schemas.microsoft.com/office/drawing/2014/main" id="{7245D445-14EC-43AD-94E7-252DF3766858}"/>
               </a:ext>
             </a:extLst>
           </p:cNvPr>
@@ -3219,7 +3219,7 @@
     </p:spTree>
     <p:extLst>
       <p:ext uri="{BB962C8B-B14F-4D97-AF65-F5344CB8AC3E}">
-        <p14:creationId xmlns:p14="http://schemas.microsoft.com/office/powerpoint/2010/main" val="2089962153"/>
+        <p14:creationId xmlns:p14="http://schemas.microsoft.com/office/powerpoint/2010/main" val="643324836"/>
       </p:ext>
     </p:extLst>
   </p:cSld>
@@ -3247,10 +3247,10 @@
       </p:grpSpPr>
       <p:sp>
         <p:nvSpPr>
-          <p:cNvPr id="10" name="">
-            <a:extLst xmlns:a="http://schemas.openxmlformats.org/drawingml/2006/main">
-              <a:ext uri="{FF2B5EF4-FFF2-40B4-BE49-F238E27FC236}">
-                <a16:creationId xmlns:a16="http://schemas.microsoft.com/office/drawing/2014/main" id="{0B46E331-2B54-470E-B8C0-E4504327E57D}"/>
+          <p:cNvPr id="11" name="">
+            <a:extLst xmlns:a="http://schemas.openxmlformats.org/drawingml/2006/main">
+              <a:ext uri="{FF2B5EF4-FFF2-40B4-BE49-F238E27FC236}">
+                <a16:creationId xmlns:a16="http://schemas.microsoft.com/office/drawing/2014/main" id="{BC1CE231-9FF7-47DD-8059-EF03139E1178}"/>
               </a:ext>
             </a:extLst>
           </p:cNvPr>
@@ -3307,7 +3307,7 @@
           <p:cNvPr id="2" name="">
             <a:extLst xmlns:a="http://schemas.openxmlformats.org/drawingml/2006/main">
               <a:ext uri="{FF2B5EF4-FFF2-40B4-BE49-F238E27FC236}">
-                <a16:creationId xmlns:a16="http://schemas.microsoft.com/office/drawing/2014/main" id="{9F385211-5A86-495F-ACBA-77E2F4FD8D6A}"/>
+                <a16:creationId xmlns:a16="http://schemas.microsoft.com/office/drawing/2014/main" id="{DC6AD25D-7EE3-49D4-8A9C-C4D5FCFE2FA4}"/>
               </a:ext>
             </a:extLst>
           </p:cNvPr>
@@ -3364,7 +3364,7 @@
           <p:cNvPr id="3" name="">
             <a:extLst xmlns:a="http://schemas.openxmlformats.org/drawingml/2006/main">
               <a:ext uri="{FF2B5EF4-FFF2-40B4-BE49-F238E27FC236}">
-                <a16:creationId xmlns:a16="http://schemas.microsoft.com/office/drawing/2014/main" id="{30937772-34BF-4AB4-AC48-3E6868BA1521}"/>
+                <a16:creationId xmlns:a16="http://schemas.microsoft.com/office/drawing/2014/main" id="{6235A87C-E8EE-432B-89C1-BDC0E40B4FC1}"/>
               </a:ext>
             </a:extLst>
           </p:cNvPr>
@@ -3411,7 +3411,7 @@
                 <a:ea typeface="Helvetica Neue"/>
                 <a:cs typeface="Helvetica Neue"/>
               </a:rPr>
-              <a:t>One batched quote request</a:t>
+              <a:t>Authenticated quotes, five assets</a:t>
             </a:r>
           </a:p>
         </p:txBody>
@@ -3421,7 +3421,7 @@
           <p:cNvPr id="4" name="">
             <a:extLst xmlns:a="http://schemas.openxmlformats.org/drawingml/2006/main">
               <a:ext uri="{FF2B5EF4-FFF2-40B4-BE49-F238E27FC236}">
-                <a16:creationId xmlns:a16="http://schemas.microsoft.com/office/drawing/2014/main" id="{2EF70FAC-4B98-4671-AD0D-D5157FFA9F08}"/>
+                <a16:creationId xmlns:a16="http://schemas.microsoft.com/office/drawing/2014/main" id="{7A08814B-73D7-4647-918C-DCB829F0A74B}"/>
               </a:ext>
             </a:extLst>
           </p:cNvPr>
@@ -3478,7 +3478,7 @@
           <p:cNvPr id="5" name="">
             <a:extLst xmlns:a="http://schemas.openxmlformats.org/drawingml/2006/main">
               <a:ext uri="{FF2B5EF4-FFF2-40B4-BE49-F238E27FC236}">
-                <a16:creationId xmlns:a16="http://schemas.microsoft.com/office/drawing/2014/main" id="{42BA3BF3-C6C0-4869-A1B7-EE19B3CBB4B6}"/>
+                <a16:creationId xmlns:a16="http://schemas.microsoft.com/office/drawing/2014/main" id="{517F9D0B-C8F6-4D1F-8071-4FE94A2AE040}"/>
               </a:ext>
             </a:extLst>
           </p:cNvPr>
@@ -3535,7 +3535,64 @@
           <p:cNvPr id="6" name="">
             <a:extLst xmlns:a="http://schemas.openxmlformats.org/drawingml/2006/main">
               <a:ext uri="{FF2B5EF4-FFF2-40B4-BE49-F238E27FC236}">
-                <a16:creationId xmlns:a16="http://schemas.microsoft.com/office/drawing/2014/main" id="{9B02A520-97F5-4613-853E-D19F68ACC70F}"/>
+                <a16:creationId xmlns:a16="http://schemas.microsoft.com/office/drawing/2014/main" id="{4661A651-9893-424C-B6E9-30790BF3E170}"/>
+              </a:ext>
+            </a:extLst>
+          </p:cNvPr>
+          <p:cNvSpPr>
+            <a:spLocks xmlns:a="http://schemas.openxmlformats.org/drawingml/2006/main" noGrp="1"/>
+          </p:cNvSpPr>
+          <p:nvPr/>
+        </p:nvSpPr>
+        <p:spPr>
+          <a:xfrm xmlns:a="http://schemas.openxmlformats.org/drawingml/2006/main">
+            <a:off x="685800" y="3486150"/>
+            <a:ext cx="10820400" cy="342900"/>
+          </a:xfrm>
+          <a:prstGeom xmlns:a="http://schemas.openxmlformats.org/drawingml/2006/main" prst="rect">
+            <a:avLst/>
+          </a:prstGeom>
+          <a:noFill xmlns:a="http://schemas.openxmlformats.org/drawingml/2006/main"/>
+          <a:ln xmlns:a="http://schemas.openxmlformats.org/drawingml/2006/main" w="0">
+            <a:noFill/>
+          </a:ln>
+        </p:spPr>
+        <p:txBody>
+          <a:bodyPr xmlns:a="http://schemas.openxmlformats.org/drawingml/2006/main">
+            <a:noAutofit/>
+          </a:bodyPr>
+          <a:lstStyle xmlns:a="http://schemas.openxmlformats.org/drawingml/2006/main"/>
+          <a:p xmlns:a="http://schemas.openxmlformats.org/drawingml/2006/main">
+            <a:pPr>
+              <a:defRPr sz="1500" b="0">
+                <a:solidFill>
+                  <a:srgbClr val="D1DEDE"/>
+                </a:solidFill>
+                <a:latin typeface="Helvetica Neue"/>
+                <a:ea typeface="Helvetica Neue"/>
+                <a:cs typeface="Helvetica Neue"/>
+              </a:defRPr>
+            </a:pPr>
+            <a:r>
+              <a:rPr sz="1500" b="0">
+                <a:solidFill>
+                  <a:srgbClr val="D1DEDE"/>
+                </a:solidFill>
+                <a:latin typeface="Helvetica Neue"/>
+                <a:ea typeface="Helvetica Neue"/>
+                <a:cs typeface="Helvetica Neue"/>
+              </a:rPr>
+              <a:t>Existing own key. Basic account. Campaign Startup grant unverified.</a:t>
+            </a:r>
+          </a:p>
+        </p:txBody>
+      </p:sp>
+      <p:sp>
+        <p:nvSpPr>
+          <p:cNvPr id="7" name="">
+            <a:extLst xmlns:a="http://schemas.openxmlformats.org/drawingml/2006/main">
+              <a:ext uri="{FF2B5EF4-FFF2-40B4-BE49-F238E27FC236}">
+                <a16:creationId xmlns:a16="http://schemas.microsoft.com/office/drawing/2014/main" id="{801F4276-9004-4F2C-94F5-2D3C09A14B31}"/>
               </a:ext>
             </a:extLst>
           </p:cNvPr>
@@ -3589,10 +3646,10 @@
       </p:sp>
       <p:sp>
         <p:nvSpPr>
-          <p:cNvPr id="7" name="">
-            <a:extLst xmlns:a="http://schemas.openxmlformats.org/drawingml/2006/main">
-              <a:ext uri="{FF2B5EF4-FFF2-40B4-BE49-F238E27FC236}">
-                <a16:creationId xmlns:a16="http://schemas.microsoft.com/office/drawing/2014/main" id="{9DFE6C73-96B8-44AD-AE72-AF8DAB757E04}"/>
+          <p:cNvPr id="8" name="">
+            <a:extLst xmlns:a="http://schemas.openxmlformats.org/drawingml/2006/main">
+              <a:ext uri="{FF2B5EF4-FFF2-40B4-BE49-F238E27FC236}">
+                <a16:creationId xmlns:a16="http://schemas.microsoft.com/office/drawing/2014/main" id="{670F9C90-B069-4D1F-91CB-49FF4AA87A32}"/>
               </a:ext>
             </a:extLst>
           </p:cNvPr>
@@ -3646,10 +3703,10 @@
       </p:sp>
       <p:sp>
         <p:nvSpPr>
-          <p:cNvPr id="8" name="">
-            <a:extLst xmlns:a="http://schemas.openxmlformats.org/drawingml/2006/main">
-              <a:ext uri="{FF2B5EF4-FFF2-40B4-BE49-F238E27FC236}">
-                <a16:creationId xmlns:a16="http://schemas.microsoft.com/office/drawing/2014/main" id="{6437C881-903C-48BD-9B6A-23E130FF930A}"/>
+          <p:cNvPr id="9" name="">
+            <a:extLst xmlns:a="http://schemas.openxmlformats.org/drawingml/2006/main">
+              <a:ext uri="{FF2B5EF4-FFF2-40B4-BE49-F238E27FC236}">
+                <a16:creationId xmlns:a16="http://schemas.microsoft.com/office/drawing/2014/main" id="{D2F7D3AE-6C35-4EAB-AB99-C3C21DFFDE96}"/>
               </a:ext>
             </a:extLst>
           </p:cNvPr>
@@ -3703,10 +3760,10 @@
       </p:sp>
       <p:sp>
         <p:nvSpPr>
-          <p:cNvPr id="9" name="">
-            <a:extLst xmlns:a="http://schemas.openxmlformats.org/drawingml/2006/main">
-              <a:ext uri="{FF2B5EF4-FFF2-40B4-BE49-F238E27FC236}">
-                <a16:creationId xmlns:a16="http://schemas.microsoft.com/office/drawing/2014/main" id="{1A56F54C-EF93-4885-81CF-43FA772EEF37}"/>
+          <p:cNvPr id="10" name="">
+            <a:extLst xmlns:a="http://schemas.openxmlformats.org/drawingml/2006/main">
+              <a:ext uri="{FF2B5EF4-FFF2-40B4-BE49-F238E27FC236}">
+                <a16:creationId xmlns:a16="http://schemas.microsoft.com/office/drawing/2014/main" id="{5DF6734D-9B0F-4F6C-84C2-72EC66419DFA}"/>
               </a:ext>
             </a:extLst>
           </p:cNvPr>
@@ -3784,7 +3841,7 @@
     </p:spTree>
     <p:extLst>
       <p:ext uri="{BB962C8B-B14F-4D97-AF65-F5344CB8AC3E}">
-        <p14:creationId xmlns:p14="http://schemas.microsoft.com/office/powerpoint/2010/main" val="1939860551"/>
+        <p14:creationId xmlns:p14="http://schemas.microsoft.com/office/powerpoint/2010/main" val="530123722"/>
       </p:ext>
     </p:extLst>
   </p:cSld>
@@ -3815,7 +3872,7 @@
           <p:cNvPr id="9" name="">
             <a:extLst xmlns:a="http://schemas.openxmlformats.org/drawingml/2006/main">
               <a:ext uri="{FF2B5EF4-FFF2-40B4-BE49-F238E27FC236}">
-                <a16:creationId xmlns:a16="http://schemas.microsoft.com/office/drawing/2014/main" id="{35DC1959-05F8-43B8-8005-084AB60DAFFE}"/>
+                <a16:creationId xmlns:a16="http://schemas.microsoft.com/office/drawing/2014/main" id="{6A03E88D-9A9D-47A3-AE38-4F9FD111E075}"/>
               </a:ext>
             </a:extLst>
           </p:cNvPr>
@@ -3872,7 +3929,7 @@
           <p:cNvPr id="2" name="">
             <a:extLst xmlns:a="http://schemas.openxmlformats.org/drawingml/2006/main">
               <a:ext uri="{FF2B5EF4-FFF2-40B4-BE49-F238E27FC236}">
-                <a16:creationId xmlns:a16="http://schemas.microsoft.com/office/drawing/2014/main" id="{458AF86D-C67A-4449-A76A-29A8C03A984F}"/>
+                <a16:creationId xmlns:a16="http://schemas.microsoft.com/office/drawing/2014/main" id="{875B1619-D99B-49B2-B083-2B1BC16A3536}"/>
               </a:ext>
             </a:extLst>
           </p:cNvPr>
@@ -3929,7 +3986,7 @@
           <p:cNvPr id="3" name="">
             <a:extLst xmlns:a="http://schemas.openxmlformats.org/drawingml/2006/main">
               <a:ext uri="{FF2B5EF4-FFF2-40B4-BE49-F238E27FC236}">
-                <a16:creationId xmlns:a16="http://schemas.microsoft.com/office/drawing/2014/main" id="{4841BE2E-F81B-44FE-909B-C40B028C5734}"/>
+                <a16:creationId xmlns:a16="http://schemas.microsoft.com/office/drawing/2014/main" id="{E28CDE18-FA78-4136-B8C4-3D231BC2DC9D}"/>
               </a:ext>
             </a:extLst>
           </p:cNvPr>
@@ -3986,7 +4043,7 @@
           <p:cNvPr id="4" name="">
             <a:extLst xmlns:a="http://schemas.openxmlformats.org/drawingml/2006/main">
               <a:ext uri="{FF2B5EF4-FFF2-40B4-BE49-F238E27FC236}">
-                <a16:creationId xmlns:a16="http://schemas.microsoft.com/office/drawing/2014/main" id="{CF480CE7-D686-4C80-844E-F6E574EBCD43}"/>
+                <a16:creationId xmlns:a16="http://schemas.microsoft.com/office/drawing/2014/main" id="{762C5342-B54E-4DFF-9F5A-D1EE4F654269}"/>
               </a:ext>
             </a:extLst>
           </p:cNvPr>
@@ -4112,7 +4169,7 @@
           <p:cNvPr id="5" name="">
             <a:extLst xmlns:a="http://schemas.openxmlformats.org/drawingml/2006/main">
               <a:ext uri="{FF2B5EF4-FFF2-40B4-BE49-F238E27FC236}">
-                <a16:creationId xmlns:a16="http://schemas.microsoft.com/office/drawing/2014/main" id="{47D5B822-7470-4A49-9003-70BD5109413A}"/>
+                <a16:creationId xmlns:a16="http://schemas.microsoft.com/office/drawing/2014/main" id="{8B92A711-56C3-4ABF-B334-A7D9868A6D25}"/>
               </a:ext>
             </a:extLst>
           </p:cNvPr>
@@ -4169,7 +4226,7 @@
           <p:cNvPr id="6" name="">
             <a:extLst xmlns:a="http://schemas.openxmlformats.org/drawingml/2006/main">
               <a:ext uri="{FF2B5EF4-FFF2-40B4-BE49-F238E27FC236}">
-                <a16:creationId xmlns:a16="http://schemas.microsoft.com/office/drawing/2014/main" id="{EC442845-C89E-4EAD-8672-B9574037054F}"/>
+                <a16:creationId xmlns:a16="http://schemas.microsoft.com/office/drawing/2014/main" id="{DAA65A14-D6C3-41AF-B426-B5B53BD0732D}"/>
               </a:ext>
             </a:extLst>
           </p:cNvPr>
@@ -4295,7 +4352,7 @@
           <p:cNvPr id="7" name="">
             <a:extLst xmlns:a="http://schemas.openxmlformats.org/drawingml/2006/main">
               <a:ext uri="{FF2B5EF4-FFF2-40B4-BE49-F238E27FC236}">
-                <a16:creationId xmlns:a16="http://schemas.microsoft.com/office/drawing/2014/main" id="{ECB78B33-7014-4F89-9F77-096F937F6919}"/>
+                <a16:creationId xmlns:a16="http://schemas.microsoft.com/office/drawing/2014/main" id="{5D859B4B-F7AB-4C3C-B2AF-DE5FD849C96E}"/>
               </a:ext>
             </a:extLst>
           </p:cNvPr>
@@ -4352,7 +4409,7 @@
           <p:cNvPr id="8" name="">
             <a:extLst xmlns:a="http://schemas.openxmlformats.org/drawingml/2006/main">
               <a:ext uri="{FF2B5EF4-FFF2-40B4-BE49-F238E27FC236}">
-                <a16:creationId xmlns:a16="http://schemas.microsoft.com/office/drawing/2014/main" id="{18587CCC-A86C-4227-97E5-00DFA5A49AED}"/>
+                <a16:creationId xmlns:a16="http://schemas.microsoft.com/office/drawing/2014/main" id="{D69BA80A-B25F-4AC8-84C9-ABE6B394F456}"/>
               </a:ext>
             </a:extLst>
           </p:cNvPr>
@@ -4407,7 +4464,7 @@
     </p:spTree>
     <p:extLst>
       <p:ext uri="{BB962C8B-B14F-4D97-AF65-F5344CB8AC3E}">
-        <p14:creationId xmlns:p14="http://schemas.microsoft.com/office/powerpoint/2010/main" val="995823464"/>
+        <p14:creationId xmlns:p14="http://schemas.microsoft.com/office/powerpoint/2010/main" val="1352371410"/>
       </p:ext>
     </p:extLst>
   </p:cSld>
@@ -4438,7 +4495,7 @@
           <p:cNvPr id="13" name="">
             <a:extLst xmlns:a="http://schemas.openxmlformats.org/drawingml/2006/main">
               <a:ext uri="{FF2B5EF4-FFF2-40B4-BE49-F238E27FC236}">
-                <a16:creationId xmlns:a16="http://schemas.microsoft.com/office/drawing/2014/main" id="{18F389BD-9EC3-4596-8F62-CAF70F3A7ACB}"/>
+                <a16:creationId xmlns:a16="http://schemas.microsoft.com/office/drawing/2014/main" id="{B9F4FDEC-8E58-46C1-9AA7-2BD60A5786F9}"/>
               </a:ext>
             </a:extLst>
           </p:cNvPr>
@@ -4495,7 +4552,7 @@
           <p:cNvPr id="2" name="">
             <a:extLst xmlns:a="http://schemas.openxmlformats.org/drawingml/2006/main">
               <a:ext uri="{FF2B5EF4-FFF2-40B4-BE49-F238E27FC236}">
-                <a16:creationId xmlns:a16="http://schemas.microsoft.com/office/drawing/2014/main" id="{1840BF5A-698F-47A1-8904-DB89D049BCF4}"/>
+                <a16:creationId xmlns:a16="http://schemas.microsoft.com/office/drawing/2014/main" id="{04DD2CF6-2B5C-4C1C-8490-DC9C6F697E56}"/>
               </a:ext>
             </a:extLst>
           </p:cNvPr>
@@ -4552,7 +4609,7 @@
           <p:cNvPr id="3" name="">
             <a:extLst xmlns:a="http://schemas.openxmlformats.org/drawingml/2006/main">
               <a:ext uri="{FF2B5EF4-FFF2-40B4-BE49-F238E27FC236}">
-                <a16:creationId xmlns:a16="http://schemas.microsoft.com/office/drawing/2014/main" id="{9B45D964-EE36-429A-B65D-C1414DECB155}"/>
+                <a16:creationId xmlns:a16="http://schemas.microsoft.com/office/drawing/2014/main" id="{F1AF0003-5E12-4D07-8276-2FD06D9423DC}"/>
               </a:ext>
             </a:extLst>
           </p:cNvPr>
@@ -4609,7 +4666,7 @@
           <p:cNvPr id="4" name="">
             <a:extLst xmlns:a="http://schemas.openxmlformats.org/drawingml/2006/main">
               <a:ext uri="{FF2B5EF4-FFF2-40B4-BE49-F238E27FC236}">
-                <a16:creationId xmlns:a16="http://schemas.microsoft.com/office/drawing/2014/main" id="{57341EF1-17BE-473F-92F5-AFB483B1D7DC}"/>
+                <a16:creationId xmlns:a16="http://schemas.microsoft.com/office/drawing/2014/main" id="{A70759F5-E3CB-47F6-BE00-B5E1FA608CE1}"/>
               </a:ext>
             </a:extLst>
           </p:cNvPr>
@@ -4666,7 +4723,7 @@
           <p:cNvPr id="5" name="">
             <a:extLst xmlns:a="http://schemas.openxmlformats.org/drawingml/2006/main">
               <a:ext uri="{FF2B5EF4-FFF2-40B4-BE49-F238E27FC236}">
-                <a16:creationId xmlns:a16="http://schemas.microsoft.com/office/drawing/2014/main" id="{A4C0B768-42BF-4182-8CB1-713D468676E1}"/>
+                <a16:creationId xmlns:a16="http://schemas.microsoft.com/office/drawing/2014/main" id="{A91C1F3F-FABF-49BC-B830-32108941946B}"/>
               </a:ext>
             </a:extLst>
           </p:cNvPr>
@@ -4723,7 +4780,7 @@
           <p:cNvPr id="6" name="">
             <a:extLst xmlns:a="http://schemas.openxmlformats.org/drawingml/2006/main">
               <a:ext uri="{FF2B5EF4-FFF2-40B4-BE49-F238E27FC236}">
-                <a16:creationId xmlns:a16="http://schemas.microsoft.com/office/drawing/2014/main" id="{F8BF7DAD-E494-4E56-8BBE-10F92759900A}"/>
+                <a16:creationId xmlns:a16="http://schemas.microsoft.com/office/drawing/2014/main" id="{C4FD6E31-12BE-4F31-BD1E-0E88C27D11FC}"/>
               </a:ext>
             </a:extLst>
           </p:cNvPr>
@@ -4780,7 +4837,7 @@
           <p:cNvPr id="7" name="">
             <a:extLst xmlns:a="http://schemas.openxmlformats.org/drawingml/2006/main">
               <a:ext uri="{FF2B5EF4-FFF2-40B4-BE49-F238E27FC236}">
-                <a16:creationId xmlns:a16="http://schemas.microsoft.com/office/drawing/2014/main" id="{D6072062-A749-4805-BD55-C79E39D19ED4}"/>
+                <a16:creationId xmlns:a16="http://schemas.microsoft.com/office/drawing/2014/main" id="{8E755472-1589-4864-93E7-B6B0C646640C}"/>
               </a:ext>
             </a:extLst>
           </p:cNvPr>
@@ -4860,7 +4917,7 @@
           <p:cNvPr id="8" name="">
             <a:extLst xmlns:a="http://schemas.openxmlformats.org/drawingml/2006/main">
               <a:ext uri="{FF2B5EF4-FFF2-40B4-BE49-F238E27FC236}">
-                <a16:creationId xmlns:a16="http://schemas.microsoft.com/office/drawing/2014/main" id="{8B456823-40E5-4493-B120-9369C9AFE326}"/>
+                <a16:creationId xmlns:a16="http://schemas.microsoft.com/office/drawing/2014/main" id="{83C18A79-ED48-4A1C-B600-C51331BD38F4}"/>
               </a:ext>
             </a:extLst>
           </p:cNvPr>
@@ -4917,7 +4974,7 @@
           <p:cNvPr id="9" name="">
             <a:extLst xmlns:a="http://schemas.openxmlformats.org/drawingml/2006/main">
               <a:ext uri="{FF2B5EF4-FFF2-40B4-BE49-F238E27FC236}">
-                <a16:creationId xmlns:a16="http://schemas.microsoft.com/office/drawing/2014/main" id="{F1FCF765-88AD-4312-8F8B-F99370BF1AC7}"/>
+                <a16:creationId xmlns:a16="http://schemas.microsoft.com/office/drawing/2014/main" id="{26865BCF-5955-48A8-8434-6434AFB40C83}"/>
               </a:ext>
             </a:extLst>
           </p:cNvPr>
@@ -4997,7 +5054,7 @@
           <p:cNvPr id="10" name="">
             <a:extLst xmlns:a="http://schemas.openxmlformats.org/drawingml/2006/main">
               <a:ext uri="{FF2B5EF4-FFF2-40B4-BE49-F238E27FC236}">
-                <a16:creationId xmlns:a16="http://schemas.microsoft.com/office/drawing/2014/main" id="{9F54EDAB-6510-435B-B41F-E7E4F037DFC6}"/>
+                <a16:creationId xmlns:a16="http://schemas.microsoft.com/office/drawing/2014/main" id="{F95A0B84-DAC6-43C5-BF40-0ADEBA187F7E}"/>
               </a:ext>
             </a:extLst>
           </p:cNvPr>
@@ -5054,7 +5111,7 @@
           <p:cNvPr id="11" name="">
             <a:extLst xmlns:a="http://schemas.openxmlformats.org/drawingml/2006/main">
               <a:ext uri="{FF2B5EF4-FFF2-40B4-BE49-F238E27FC236}">
-                <a16:creationId xmlns:a16="http://schemas.microsoft.com/office/drawing/2014/main" id="{58BF2966-09AC-45DD-AB75-D728ABDE119F}"/>
+                <a16:creationId xmlns:a16="http://schemas.microsoft.com/office/drawing/2014/main" id="{3821B117-F3C0-4363-8A2A-64B42C78ECF6}"/>
               </a:ext>
             </a:extLst>
           </p:cNvPr>
@@ -5111,7 +5168,7 @@
           <p:cNvPr id="12" name="">
             <a:extLst xmlns:a="http://schemas.openxmlformats.org/drawingml/2006/main">
               <a:ext uri="{FF2B5EF4-FFF2-40B4-BE49-F238E27FC236}">
-                <a16:creationId xmlns:a16="http://schemas.microsoft.com/office/drawing/2014/main" id="{D2F1FA40-6106-42B6-A0FE-A63D9DE9CE48}"/>
+                <a16:creationId xmlns:a16="http://schemas.microsoft.com/office/drawing/2014/main" id="{7DD34286-2B74-43F5-82F7-B6828CD5332E}"/>
               </a:ext>
             </a:extLst>
           </p:cNvPr>
@@ -5166,7 +5223,7 @@
     </p:spTree>
     <p:extLst>
       <p:ext uri="{BB962C8B-B14F-4D97-AF65-F5344CB8AC3E}">
-        <p14:creationId xmlns:p14="http://schemas.microsoft.com/office/powerpoint/2010/main" val="464155814"/>
+        <p14:creationId xmlns:p14="http://schemas.microsoft.com/office/powerpoint/2010/main" val="1526912551"/>
       </p:ext>
     </p:extLst>
   </p:cSld>
@@ -5197,7 +5254,7 @@
           <p:cNvPr id="9" name="">
             <a:extLst xmlns:a="http://schemas.openxmlformats.org/drawingml/2006/main">
               <a:ext uri="{FF2B5EF4-FFF2-40B4-BE49-F238E27FC236}">
-                <a16:creationId xmlns:a16="http://schemas.microsoft.com/office/drawing/2014/main" id="{38EFC5CF-0F3C-4121-9A18-A3FDD0CB6D78}"/>
+                <a16:creationId xmlns:a16="http://schemas.microsoft.com/office/drawing/2014/main" id="{44B80892-F2C6-493A-A01F-111505D03F61}"/>
               </a:ext>
             </a:extLst>
           </p:cNvPr>
@@ -5254,7 +5311,7 @@
           <p:cNvPr id="2" name="">
             <a:extLst xmlns:a="http://schemas.openxmlformats.org/drawingml/2006/main">
               <a:ext uri="{FF2B5EF4-FFF2-40B4-BE49-F238E27FC236}">
-                <a16:creationId xmlns:a16="http://schemas.microsoft.com/office/drawing/2014/main" id="{EB2A31F2-D90B-4A99-A82A-6AD521A6D745}"/>
+                <a16:creationId xmlns:a16="http://schemas.microsoft.com/office/drawing/2014/main" id="{B0E33E64-9698-4BCF-A722-BC06A39FA750}"/>
               </a:ext>
             </a:extLst>
           </p:cNvPr>
@@ -5311,7 +5368,7 @@
           <p:cNvPr id="3" name="">
             <a:extLst xmlns:a="http://schemas.openxmlformats.org/drawingml/2006/main">
               <a:ext uri="{FF2B5EF4-FFF2-40B4-BE49-F238E27FC236}">
-                <a16:creationId xmlns:a16="http://schemas.microsoft.com/office/drawing/2014/main" id="{39DC5901-7816-4B01-8460-6228629EA4B9}"/>
+                <a16:creationId xmlns:a16="http://schemas.microsoft.com/office/drawing/2014/main" id="{563522DC-AC21-4CF9-BBAD-F29D0746F043}"/>
               </a:ext>
             </a:extLst>
           </p:cNvPr>
@@ -5368,7 +5425,7 @@
           <p:cNvPr id="4" name="">
             <a:extLst xmlns:a="http://schemas.openxmlformats.org/drawingml/2006/main">
               <a:ext uri="{FF2B5EF4-FFF2-40B4-BE49-F238E27FC236}">
-                <a16:creationId xmlns:a16="http://schemas.microsoft.com/office/drawing/2014/main" id="{2CDA3472-05CC-4749-9E6F-929B53D78ECE}"/>
+                <a16:creationId xmlns:a16="http://schemas.microsoft.com/office/drawing/2014/main" id="{A089EB87-CAA6-46D6-A6A0-F624E43148F5}"/>
               </a:ext>
             </a:extLst>
           </p:cNvPr>
@@ -5425,7 +5482,7 @@
           <p:cNvPr id="5" name="">
             <a:extLst xmlns:a="http://schemas.openxmlformats.org/drawingml/2006/main">
               <a:ext uri="{FF2B5EF4-FFF2-40B4-BE49-F238E27FC236}">
-                <a16:creationId xmlns:a16="http://schemas.microsoft.com/office/drawing/2014/main" id="{40A19EFB-1516-499C-9D88-25138BB01AA2}"/>
+                <a16:creationId xmlns:a16="http://schemas.microsoft.com/office/drawing/2014/main" id="{7E12E4AD-70F1-475C-BB97-2AF8111FD9C4}"/>
               </a:ext>
             </a:extLst>
           </p:cNvPr>
@@ -5482,7 +5539,7 @@
           <p:cNvPr id="6" name="">
             <a:extLst xmlns:a="http://schemas.openxmlformats.org/drawingml/2006/main">
               <a:ext uri="{FF2B5EF4-FFF2-40B4-BE49-F238E27FC236}">
-                <a16:creationId xmlns:a16="http://schemas.microsoft.com/office/drawing/2014/main" id="{C3118E81-57B5-4B97-A598-819DBCA54251}"/>
+                <a16:creationId xmlns:a16="http://schemas.microsoft.com/office/drawing/2014/main" id="{36C2EB1B-67DD-4839-BEC4-07660ED3857E}"/>
               </a:ext>
             </a:extLst>
           </p:cNvPr>
@@ -5539,7 +5596,7 @@
           <p:cNvPr id="7" name="">
             <a:extLst xmlns:a="http://schemas.openxmlformats.org/drawingml/2006/main">
               <a:ext uri="{FF2B5EF4-FFF2-40B4-BE49-F238E27FC236}">
-                <a16:creationId xmlns:a16="http://schemas.microsoft.com/office/drawing/2014/main" id="{FCFCD3A0-E4D7-41B2-BE27-082386081753}"/>
+                <a16:creationId xmlns:a16="http://schemas.microsoft.com/office/drawing/2014/main" id="{30174778-C18F-4F8A-8F79-342BF1B486B1}"/>
               </a:ext>
             </a:extLst>
           </p:cNvPr>
@@ -5596,7 +5653,7 @@
           <p:cNvPr id="8" name="">
             <a:extLst xmlns:a="http://schemas.openxmlformats.org/drawingml/2006/main">
               <a:ext uri="{FF2B5EF4-FFF2-40B4-BE49-F238E27FC236}">
-                <a16:creationId xmlns:a16="http://schemas.microsoft.com/office/drawing/2014/main" id="{1227F36A-25B2-4DA5-A8D4-E50609E7AD41}"/>
+                <a16:creationId xmlns:a16="http://schemas.microsoft.com/office/drawing/2014/main" id="{2AA0918D-9ADB-427A-8B10-50E4B166A209}"/>
               </a:ext>
             </a:extLst>
           </p:cNvPr>
@@ -5643,7 +5700,7 @@
                 <a:ea typeface="Helvetica Neue"/>
                 <a:cs typeface="Helvetica Neue"/>
               </a:rPr>
-              <a:t>Campaign-key evidence pending. Video, DoraHacks submission and X post remain.</a:t>
+              <a:t>Hosted video ready. Final DoraHacks agreement and X post remain.</a:t>
             </a:r>
           </a:p>
         </p:txBody>
@@ -5651,7 +5708,7 @@
     </p:spTree>
     <p:extLst>
       <p:ext uri="{BB962C8B-B14F-4D97-AF65-F5344CB8AC3E}">
-        <p14:creationId xmlns:p14="http://schemas.microsoft.com/office/powerpoint/2010/main" val="1241920725"/>
+        <p14:creationId xmlns:p14="http://schemas.microsoft.com/office/powerpoint/2010/main" val="491928365"/>
       </p:ext>
     </p:extLst>
   </p:cSld>

--- a/docs/assets/Runway-Guard-Pitch.pptx
+++ b/docs/assets/Runway-Guard-Pitch.pptx
@@ -2,19 +2,19 @@
 <file path=ppt/presentation.xml><?xml version="1.0" encoding="utf-8"?>
 <p:presentation xmlns:p="http://schemas.openxmlformats.org/presentationml/2006/main">
   <p:sldMasterIdLst>
-    <p:sldMasterId xmlns:r="http://schemas.openxmlformats.org/officeDocument/2006/relationships" id="2147483648" r:id="R0fd37f1971fd40db"/>
+    <p:sldMasterId xmlns:r="http://schemas.openxmlformats.org/officeDocument/2006/relationships" id="2147483648" r:id="R7146b303db9d42cd"/>
   </p:sldMasterIdLst>
   <p:notesMasterIdLst>
-    <p:notesMasterId xmlns:r="http://schemas.openxmlformats.org/officeDocument/2006/relationships" r:id="R235f3c1cd68844f9"/>
+    <p:notesMasterId xmlns:r="http://schemas.openxmlformats.org/officeDocument/2006/relationships" r:id="Raac83d577e424c8f"/>
   </p:notesMasterIdLst>
   <p:sldIdLst>
-    <p:sldId xmlns:r="http://schemas.openxmlformats.org/officeDocument/2006/relationships" id="256" r:id="R61a72167e1e84264"/>
-    <p:sldId xmlns:r="http://schemas.openxmlformats.org/officeDocument/2006/relationships" id="257" r:id="Rfa82eb84587346dd"/>
-    <p:sldId xmlns:r="http://schemas.openxmlformats.org/officeDocument/2006/relationships" id="258" r:id="R5d9d984703a94609"/>
-    <p:sldId xmlns:r="http://schemas.openxmlformats.org/officeDocument/2006/relationships" id="259" r:id="R4c96d211346346e8"/>
-    <p:sldId xmlns:r="http://schemas.openxmlformats.org/officeDocument/2006/relationships" id="260" r:id="Re6ac4a3e666f4289"/>
-    <p:sldId xmlns:r="http://schemas.openxmlformats.org/officeDocument/2006/relationships" id="261" r:id="Rbf5147dd04af4aea"/>
-    <p:sldId xmlns:r="http://schemas.openxmlformats.org/officeDocument/2006/relationships" id="262" r:id="R9d8031fc51664e32"/>
+    <p:sldId xmlns:r="http://schemas.openxmlformats.org/officeDocument/2006/relationships" id="256" r:id="Reb990c281bf54537"/>
+    <p:sldId xmlns:r="http://schemas.openxmlformats.org/officeDocument/2006/relationships" id="257" r:id="Rb74c399c00744c95"/>
+    <p:sldId xmlns:r="http://schemas.openxmlformats.org/officeDocument/2006/relationships" id="258" r:id="Rff9f4c012b2044e5"/>
+    <p:sldId xmlns:r="http://schemas.openxmlformats.org/officeDocument/2006/relationships" id="259" r:id="R401d38f5fb534c89"/>
+    <p:sldId xmlns:r="http://schemas.openxmlformats.org/officeDocument/2006/relationships" id="260" r:id="Rbe8ec0a13ad1463a"/>
+    <p:sldId xmlns:r="http://schemas.openxmlformats.org/officeDocument/2006/relationships" id="261" r:id="R8602a5890fb04607"/>
+    <p:sldId xmlns:r="http://schemas.openxmlformats.org/officeDocument/2006/relationships" id="262" r:id="R2659ab255d214f0f"/>
   </p:sldIdLst>
   <p:sldSz cx="12192000" cy="6858000"/>
   <p:notesSz cx="6858000" cy="9144000"/>
@@ -868,7 +868,7 @@
           <a:lstStyle xmlns:a="http://schemas.openxmlformats.org/drawingml/2006/main"/>
           <a:p xmlns:a="http://schemas.openxmlformats.org/drawingml/2006/main">
             <a:r>
-              <a:t>Repository supplied by user: https://github.com/shi1720/coinmarketcap . Public deployment confirmed by product owner: https://runway-guard-cmc.web.app . Hosted video https://runway-guard-cmc.web.app/demo.html is ready. Authenticated own-key HTTP200 five-asset evidence is captured. The account is Basic and campaign Startup access remains unverified. DoraHacks contact fields are saved and Markets and Trading Tools is selected. Final agreement and the X post URL remain. No public BUIDL or X post URL exists. YouTube publication awaits explicit browser terms confirmation. Hackathon requirements: https://coinmarketcap.com/api/resources/api-hackathon/ . X post must link actual submission and demo video with#BuildwithCMC.</a:t>
+              <a:t>Repository supplied by user: https://github.com/shi1720/coinmarketcap . Public deployment confirmed by product owner: https://runway-guard-cmc.web.app . Hosted video https://runway-guard-cmc.web.app/demo.html is ready. Authenticated own-key HTTP200 five-asset evidence is captured. The account is Basic and campaign Startup access remains unverified. DoraHacks contact fields are saved and Markets and Trading Tools is selected. The user confirmed platform terms and publication. BUIDL https://dorahacks.io/buidl/49254 is submitted to Build with CMC under review. DoraHacks public visibility awaits moderation. Public YouTube https://youtu.be/CYLWG-bSSB8 playback verified. One X post https://x.com/ShivamGuptaim/status/2105269446298550656 links BUIDL and video with#BuildwithCMC. Latest mainCI b647 run36712404738 success. English35cueSRTuploaded butwatchCCpropagationunverified. No moderation approval or prize result claimed. Hackathon requirements: https://coinmarketcap.com/api/resources/api-hackathon/ . X post must link actual submission and demo video with#BuildwithCMC.</a:t>
             </a:r>
           </a:p>
         </p:txBody>
@@ -936,7 +936,7 @@
   </p:cSld>
   <p:clrMap bg1="lt1" tx1="dk1" bg2="lt2" tx2="dk2" accent1="accent1" accent2="accent2" accent3="accent3" accent4="accent4" accent5="accent5" accent6="accent6" hlink="hlink" folHlink="folHlink"/>
   <p:sldLayoutIdLst>
-    <p:sldLayoutId xmlns:r="http://schemas.openxmlformats.org/officeDocument/2006/relationships" id="2147483649" r:id="Re3e4392e584f46f6"/>
+    <p:sldLayoutId xmlns:r="http://schemas.openxmlformats.org/officeDocument/2006/relationships" id="2147483649" r:id="Rec6512793c274553"/>
   </p:sldLayoutIdLst>
   <p:txStyles>
     <p:titleStyle>
@@ -1487,7 +1487,7 @@
           <p:cNvPr id="6" name="">
             <a:extLst xmlns:a="http://schemas.openxmlformats.org/drawingml/2006/main">
               <a:ext uri="{FF2B5EF4-FFF2-40B4-BE49-F238E27FC236}">
-                <a16:creationId xmlns:a16="http://schemas.microsoft.com/office/drawing/2014/main" id="{9B40CC3E-3232-4606-97ED-C62EB405F224}"/>
+                <a16:creationId xmlns:a16="http://schemas.microsoft.com/office/drawing/2014/main" id="{0B3CC78A-B33B-47E6-86F7-1242FECCA758}"/>
               </a:ext>
             </a:extLst>
           </p:cNvPr>
@@ -1544,7 +1544,7 @@
           <p:cNvPr id="2" name="">
             <a:extLst xmlns:a="http://schemas.openxmlformats.org/drawingml/2006/main">
               <a:ext uri="{FF2B5EF4-FFF2-40B4-BE49-F238E27FC236}">
-                <a16:creationId xmlns:a16="http://schemas.microsoft.com/office/drawing/2014/main" id="{2166A66E-94D7-49A0-BADD-22ABE2509158}"/>
+                <a16:creationId xmlns:a16="http://schemas.microsoft.com/office/drawing/2014/main" id="{C395041C-84A4-4DF5-A30E-902884379921}"/>
               </a:ext>
             </a:extLst>
           </p:cNvPr>
@@ -1601,7 +1601,7 @@
           <p:cNvPr id="3" name="">
             <a:extLst xmlns:a="http://schemas.openxmlformats.org/drawingml/2006/main">
               <a:ext uri="{FF2B5EF4-FFF2-40B4-BE49-F238E27FC236}">
-                <a16:creationId xmlns:a16="http://schemas.microsoft.com/office/drawing/2014/main" id="{65AFBFDD-0371-4D08-8AC7-164F03F5F696}"/>
+                <a16:creationId xmlns:a16="http://schemas.microsoft.com/office/drawing/2014/main" id="{DCB9C872-2F8E-45EB-9E3F-B27BCAAAD7EB}"/>
               </a:ext>
             </a:extLst>
           </p:cNvPr>
@@ -1681,7 +1681,7 @@
           <p:cNvPr id="4" name="">
             <a:extLst xmlns:a="http://schemas.openxmlformats.org/drawingml/2006/main">
               <a:ext uri="{FF2B5EF4-FFF2-40B4-BE49-F238E27FC236}">
-                <a16:creationId xmlns:a16="http://schemas.microsoft.com/office/drawing/2014/main" id="{14D8122F-E72B-4481-9501-29EBC27FED29}"/>
+                <a16:creationId xmlns:a16="http://schemas.microsoft.com/office/drawing/2014/main" id="{A0216459-69F3-47F1-8FB3-21F36C3205E9}"/>
               </a:ext>
             </a:extLst>
           </p:cNvPr>
@@ -1738,7 +1738,7 @@
           <p:cNvPr id="5" name="">
             <a:extLst xmlns:a="http://schemas.openxmlformats.org/drawingml/2006/main">
               <a:ext uri="{FF2B5EF4-FFF2-40B4-BE49-F238E27FC236}">
-                <a16:creationId xmlns:a16="http://schemas.microsoft.com/office/drawing/2014/main" id="{CCAEB91B-C0F8-43F8-8944-3C11EA1242FE}"/>
+                <a16:creationId xmlns:a16="http://schemas.microsoft.com/office/drawing/2014/main" id="{CC88DA1A-3F66-4909-8089-8246D7535453}"/>
               </a:ext>
             </a:extLst>
           </p:cNvPr>
@@ -1793,7 +1793,7 @@
     </p:spTree>
     <p:extLst>
       <p:ext uri="{BB962C8B-B14F-4D97-AF65-F5344CB8AC3E}">
-        <p14:creationId xmlns:p14="http://schemas.microsoft.com/office/powerpoint/2010/main" val="677834694"/>
+        <p14:creationId xmlns:p14="http://schemas.microsoft.com/office/powerpoint/2010/main" val="564625213"/>
       </p:ext>
     </p:extLst>
   </p:cSld>
@@ -1824,7 +1824,7 @@
           <p:cNvPr id="11" name="">
             <a:extLst xmlns:a="http://schemas.openxmlformats.org/drawingml/2006/main">
               <a:ext uri="{FF2B5EF4-FFF2-40B4-BE49-F238E27FC236}">
-                <a16:creationId xmlns:a16="http://schemas.microsoft.com/office/drawing/2014/main" id="{85844F10-73C1-4EF6-ADA1-B07628338E0F}"/>
+                <a16:creationId xmlns:a16="http://schemas.microsoft.com/office/drawing/2014/main" id="{3C187E85-1938-4870-BEB0-54D4C11E3652}"/>
               </a:ext>
             </a:extLst>
           </p:cNvPr>
@@ -1881,7 +1881,7 @@
           <p:cNvPr id="2" name="">
             <a:extLst xmlns:a="http://schemas.openxmlformats.org/drawingml/2006/main">
               <a:ext uri="{FF2B5EF4-FFF2-40B4-BE49-F238E27FC236}">
-                <a16:creationId xmlns:a16="http://schemas.microsoft.com/office/drawing/2014/main" id="{3613C359-DE1D-47A6-B32C-643D72BCD9F4}"/>
+                <a16:creationId xmlns:a16="http://schemas.microsoft.com/office/drawing/2014/main" id="{4FABDEF6-F52B-4F6D-B2AF-22CAD851E0BA}"/>
               </a:ext>
             </a:extLst>
           </p:cNvPr>
@@ -1938,7 +1938,7 @@
           <p:cNvPr id="3" name="">
             <a:extLst xmlns:a="http://schemas.openxmlformats.org/drawingml/2006/main">
               <a:ext uri="{FF2B5EF4-FFF2-40B4-BE49-F238E27FC236}">
-                <a16:creationId xmlns:a16="http://schemas.microsoft.com/office/drawing/2014/main" id="{6B959C16-1301-4F5F-9D8A-949DF98C3E78}"/>
+                <a16:creationId xmlns:a16="http://schemas.microsoft.com/office/drawing/2014/main" id="{ABE7E9DF-F56A-4AD8-A158-D66788F70047}"/>
               </a:ext>
             </a:extLst>
           </p:cNvPr>
@@ -1995,7 +1995,7 @@
           <p:cNvPr id="4" name="">
             <a:extLst xmlns:a="http://schemas.openxmlformats.org/drawingml/2006/main">
               <a:ext uri="{FF2B5EF4-FFF2-40B4-BE49-F238E27FC236}">
-                <a16:creationId xmlns:a16="http://schemas.microsoft.com/office/drawing/2014/main" id="{90F0FE44-DE82-49FE-ABC4-CE08B2127861}"/>
+                <a16:creationId xmlns:a16="http://schemas.microsoft.com/office/drawing/2014/main" id="{98E7C129-4318-42C0-A1BB-7210DF224935}"/>
               </a:ext>
             </a:extLst>
           </p:cNvPr>
@@ -2052,7 +2052,7 @@
           <p:cNvPr id="5" name="">
             <a:extLst xmlns:a="http://schemas.openxmlformats.org/drawingml/2006/main">
               <a:ext uri="{FF2B5EF4-FFF2-40B4-BE49-F238E27FC236}">
-                <a16:creationId xmlns:a16="http://schemas.microsoft.com/office/drawing/2014/main" id="{6EB72064-0E14-4A31-A601-291CC913B269}"/>
+                <a16:creationId xmlns:a16="http://schemas.microsoft.com/office/drawing/2014/main" id="{6A88EC0F-9CA2-4EB5-A00B-EEF968736FD8}"/>
               </a:ext>
             </a:extLst>
           </p:cNvPr>
@@ -2109,7 +2109,7 @@
           <p:cNvPr id="6" name="">
             <a:extLst xmlns:a="http://schemas.openxmlformats.org/drawingml/2006/main">
               <a:ext uri="{FF2B5EF4-FFF2-40B4-BE49-F238E27FC236}">
-                <a16:creationId xmlns:a16="http://schemas.microsoft.com/office/drawing/2014/main" id="{63F8C9D5-91FF-40E4-91FC-C1017F7C727F}"/>
+                <a16:creationId xmlns:a16="http://schemas.microsoft.com/office/drawing/2014/main" id="{7D440050-753C-4775-A4C1-10D7C3D16BFB}"/>
               </a:ext>
             </a:extLst>
           </p:cNvPr>
@@ -2166,7 +2166,7 @@
           <p:cNvPr id="7" name="">
             <a:extLst xmlns:a="http://schemas.openxmlformats.org/drawingml/2006/main">
               <a:ext uri="{FF2B5EF4-FFF2-40B4-BE49-F238E27FC236}">
-                <a16:creationId xmlns:a16="http://schemas.microsoft.com/office/drawing/2014/main" id="{15C14BED-A7D2-4FF3-B7BD-8269BE025EFA}"/>
+                <a16:creationId xmlns:a16="http://schemas.microsoft.com/office/drawing/2014/main" id="{6D2A1277-4DAC-490B-867D-3789A644AC8B}"/>
               </a:ext>
             </a:extLst>
           </p:cNvPr>
@@ -2223,7 +2223,7 @@
           <p:cNvPr id="8" name="">
             <a:extLst xmlns:a="http://schemas.openxmlformats.org/drawingml/2006/main">
               <a:ext uri="{FF2B5EF4-FFF2-40B4-BE49-F238E27FC236}">
-                <a16:creationId xmlns:a16="http://schemas.microsoft.com/office/drawing/2014/main" id="{2099978A-9349-4477-A673-3D110855069A}"/>
+                <a16:creationId xmlns:a16="http://schemas.microsoft.com/office/drawing/2014/main" id="{D851A608-A0E2-45C4-B6D5-1CD043D54BE5}"/>
               </a:ext>
             </a:extLst>
           </p:cNvPr>
@@ -2280,7 +2280,7 @@
           <p:cNvPr id="9" name="">
             <a:extLst xmlns:a="http://schemas.openxmlformats.org/drawingml/2006/main">
               <a:ext uri="{FF2B5EF4-FFF2-40B4-BE49-F238E27FC236}">
-                <a16:creationId xmlns:a16="http://schemas.microsoft.com/office/drawing/2014/main" id="{48982639-4D16-4A96-B7CD-7F26D28BD2CC}"/>
+                <a16:creationId xmlns:a16="http://schemas.microsoft.com/office/drawing/2014/main" id="{9E19FB74-D813-4190-A533-59E8BB20BE08}"/>
               </a:ext>
             </a:extLst>
           </p:cNvPr>
@@ -2337,7 +2337,7 @@
           <p:cNvPr id="10" name="">
             <a:extLst xmlns:a="http://schemas.openxmlformats.org/drawingml/2006/main">
               <a:ext uri="{FF2B5EF4-FFF2-40B4-BE49-F238E27FC236}">
-                <a16:creationId xmlns:a16="http://schemas.microsoft.com/office/drawing/2014/main" id="{672DD886-EF01-4388-A233-71D65AA32D2E}"/>
+                <a16:creationId xmlns:a16="http://schemas.microsoft.com/office/drawing/2014/main" id="{41B33342-46D9-4EC9-9E8D-AB9AD78B65E1}"/>
               </a:ext>
             </a:extLst>
           </p:cNvPr>
@@ -2392,7 +2392,7 @@
     </p:spTree>
     <p:extLst>
       <p:ext uri="{BB962C8B-B14F-4D97-AF65-F5344CB8AC3E}">
-        <p14:creationId xmlns:p14="http://schemas.microsoft.com/office/powerpoint/2010/main" val="1548413245"/>
+        <p14:creationId xmlns:p14="http://schemas.microsoft.com/office/powerpoint/2010/main" val="116540180"/>
       </p:ext>
     </p:extLst>
   </p:cSld>
@@ -2423,7 +2423,7 @@
           <p:cNvPr id="15" name="">
             <a:extLst xmlns:a="http://schemas.openxmlformats.org/drawingml/2006/main">
               <a:ext uri="{FF2B5EF4-FFF2-40B4-BE49-F238E27FC236}">
-                <a16:creationId xmlns:a16="http://schemas.microsoft.com/office/drawing/2014/main" id="{8B244E02-B327-405D-96B4-F5486B77BD16}"/>
+                <a16:creationId xmlns:a16="http://schemas.microsoft.com/office/drawing/2014/main" id="{516867AC-4A8D-4FD7-86FF-BB60A240834E}"/>
               </a:ext>
             </a:extLst>
           </p:cNvPr>
@@ -2480,7 +2480,7 @@
           <p:cNvPr id="2" name="">
             <a:extLst xmlns:a="http://schemas.openxmlformats.org/drawingml/2006/main">
               <a:ext uri="{FF2B5EF4-FFF2-40B4-BE49-F238E27FC236}">
-                <a16:creationId xmlns:a16="http://schemas.microsoft.com/office/drawing/2014/main" id="{6C738D17-896F-4381-8B40-672F151F197A}"/>
+                <a16:creationId xmlns:a16="http://schemas.microsoft.com/office/drawing/2014/main" id="{3A6FCBAC-4061-4723-BC4E-8233F4634535}"/>
               </a:ext>
             </a:extLst>
           </p:cNvPr>
@@ -2537,7 +2537,7 @@
           <p:cNvPr id="3" name="">
             <a:extLst xmlns:a="http://schemas.openxmlformats.org/drawingml/2006/main">
               <a:ext uri="{FF2B5EF4-FFF2-40B4-BE49-F238E27FC236}">
-                <a16:creationId xmlns:a16="http://schemas.microsoft.com/office/drawing/2014/main" id="{900D5413-D4D4-461D-A54A-58DA7417FF4A}"/>
+                <a16:creationId xmlns:a16="http://schemas.microsoft.com/office/drawing/2014/main" id="{19D722E4-BC94-4C75-8668-95DB2433E30F}"/>
               </a:ext>
             </a:extLst>
           </p:cNvPr>
@@ -2594,7 +2594,7 @@
           <p:cNvPr id="4" name="">
             <a:extLst xmlns:a="http://schemas.openxmlformats.org/drawingml/2006/main">
               <a:ext uri="{FF2B5EF4-FFF2-40B4-BE49-F238E27FC236}">
-                <a16:creationId xmlns:a16="http://schemas.microsoft.com/office/drawing/2014/main" id="{27BCD0DF-ED7C-47B1-B110-4A9D8C4664B0}"/>
+                <a16:creationId xmlns:a16="http://schemas.microsoft.com/office/drawing/2014/main" id="{79A312DF-6DB5-4B55-9C38-3BC467BFC4B7}"/>
               </a:ext>
             </a:extLst>
           </p:cNvPr>
@@ -2651,7 +2651,7 @@
           <p:cNvPr id="5" name="">
             <a:extLst xmlns:a="http://schemas.openxmlformats.org/drawingml/2006/main">
               <a:ext uri="{FF2B5EF4-FFF2-40B4-BE49-F238E27FC236}">
-                <a16:creationId xmlns:a16="http://schemas.microsoft.com/office/drawing/2014/main" id="{B0EE3ADD-F5E9-4EE0-8714-D7343649E1CC}"/>
+                <a16:creationId xmlns:a16="http://schemas.microsoft.com/office/drawing/2014/main" id="{DC6D8E1B-A546-4132-B812-EEF336038A0C}"/>
               </a:ext>
             </a:extLst>
           </p:cNvPr>
@@ -2708,7 +2708,7 @@
           <p:cNvPr id="6" name="">
             <a:extLst xmlns:a="http://schemas.openxmlformats.org/drawingml/2006/main">
               <a:ext uri="{FF2B5EF4-FFF2-40B4-BE49-F238E27FC236}">
-                <a16:creationId xmlns:a16="http://schemas.microsoft.com/office/drawing/2014/main" id="{AF95F555-DFBC-473C-B182-C08424F79034}"/>
+                <a16:creationId xmlns:a16="http://schemas.microsoft.com/office/drawing/2014/main" id="{059D8C0C-B274-452B-828A-272B79452ADC}"/>
               </a:ext>
             </a:extLst>
           </p:cNvPr>
@@ -2765,7 +2765,7 @@
           <p:cNvPr id="7" name="">
             <a:extLst xmlns:a="http://schemas.openxmlformats.org/drawingml/2006/main">
               <a:ext uri="{FF2B5EF4-FFF2-40B4-BE49-F238E27FC236}">
-                <a16:creationId xmlns:a16="http://schemas.microsoft.com/office/drawing/2014/main" id="{35CDCF4E-0C69-4B7F-A4C7-9649835E7846}"/>
+                <a16:creationId xmlns:a16="http://schemas.microsoft.com/office/drawing/2014/main" id="{12D4A86B-7805-4610-959D-B604610BA021}"/>
               </a:ext>
             </a:extLst>
           </p:cNvPr>
@@ -2822,7 +2822,7 @@
           <p:cNvPr id="8" name="">
             <a:extLst xmlns:a="http://schemas.openxmlformats.org/drawingml/2006/main">
               <a:ext uri="{FF2B5EF4-FFF2-40B4-BE49-F238E27FC236}">
-                <a16:creationId xmlns:a16="http://schemas.microsoft.com/office/drawing/2014/main" id="{638DEDA0-EF3C-47CF-9283-907E207A07A1}"/>
+                <a16:creationId xmlns:a16="http://schemas.microsoft.com/office/drawing/2014/main" id="{B2F6701D-3310-48E7-9CC7-211BDE2B94FC}"/>
               </a:ext>
             </a:extLst>
           </p:cNvPr>
@@ -2879,7 +2879,7 @@
           <p:cNvPr id="9" name="">
             <a:extLst xmlns:a="http://schemas.openxmlformats.org/drawingml/2006/main">
               <a:ext uri="{FF2B5EF4-FFF2-40B4-BE49-F238E27FC236}">
-                <a16:creationId xmlns:a16="http://schemas.microsoft.com/office/drawing/2014/main" id="{F12332BC-1056-4E5A-BB15-46F8978EEED1}"/>
+                <a16:creationId xmlns:a16="http://schemas.microsoft.com/office/drawing/2014/main" id="{C64676D0-85C0-4B6F-A563-2C7665255B3E}"/>
               </a:ext>
             </a:extLst>
           </p:cNvPr>
@@ -2936,7 +2936,7 @@
           <p:cNvPr id="10" name="">
             <a:extLst xmlns:a="http://schemas.openxmlformats.org/drawingml/2006/main">
               <a:ext uri="{FF2B5EF4-FFF2-40B4-BE49-F238E27FC236}">
-                <a16:creationId xmlns:a16="http://schemas.microsoft.com/office/drawing/2014/main" id="{41D70631-6520-48D7-8372-D3A8AEA5E61E}"/>
+                <a16:creationId xmlns:a16="http://schemas.microsoft.com/office/drawing/2014/main" id="{4803DCFB-6E09-4C50-AC4E-D3061C46667A}"/>
               </a:ext>
             </a:extLst>
           </p:cNvPr>
@@ -2993,7 +2993,7 @@
           <p:cNvPr id="11" name="">
             <a:extLst xmlns:a="http://schemas.openxmlformats.org/drawingml/2006/main">
               <a:ext uri="{FF2B5EF4-FFF2-40B4-BE49-F238E27FC236}">
-                <a16:creationId xmlns:a16="http://schemas.microsoft.com/office/drawing/2014/main" id="{963DD3E9-4763-4FFB-9075-0C523C224F8D}"/>
+                <a16:creationId xmlns:a16="http://schemas.microsoft.com/office/drawing/2014/main" id="{51E61AE3-3F73-460E-B923-0522C6AA634F}"/>
               </a:ext>
             </a:extLst>
           </p:cNvPr>
@@ -3050,7 +3050,7 @@
           <p:cNvPr id="12" name="">
             <a:extLst xmlns:a="http://schemas.openxmlformats.org/drawingml/2006/main">
               <a:ext uri="{FF2B5EF4-FFF2-40B4-BE49-F238E27FC236}">
-                <a16:creationId xmlns:a16="http://schemas.microsoft.com/office/drawing/2014/main" id="{ED73AEC5-090C-4ACA-99A1-5D314AFCF0A1}"/>
+                <a16:creationId xmlns:a16="http://schemas.microsoft.com/office/drawing/2014/main" id="{8F2C96D3-B21E-4154-BF8C-44ABCBBCED61}"/>
               </a:ext>
             </a:extLst>
           </p:cNvPr>
@@ -3107,7 +3107,7 @@
           <p:cNvPr id="13" name="">
             <a:extLst xmlns:a="http://schemas.openxmlformats.org/drawingml/2006/main">
               <a:ext uri="{FF2B5EF4-FFF2-40B4-BE49-F238E27FC236}">
-                <a16:creationId xmlns:a16="http://schemas.microsoft.com/office/drawing/2014/main" id="{1CA56E5E-CF10-46F4-AA5C-9E7C6BD93753}"/>
+                <a16:creationId xmlns:a16="http://schemas.microsoft.com/office/drawing/2014/main" id="{52D35956-FCC1-403E-B294-9ACFE25DE49E}"/>
               </a:ext>
             </a:extLst>
           </p:cNvPr>
@@ -3164,7 +3164,7 @@
           <p:cNvPr id="14" name="">
             <a:extLst xmlns:a="http://schemas.openxmlformats.org/drawingml/2006/main">
               <a:ext uri="{FF2B5EF4-FFF2-40B4-BE49-F238E27FC236}">
-                <a16:creationId xmlns:a16="http://schemas.microsoft.com/office/drawing/2014/main" id="{7245D445-14EC-43AD-94E7-252DF3766858}"/>
+                <a16:creationId xmlns:a16="http://schemas.microsoft.com/office/drawing/2014/main" id="{A81B0838-7889-4D90-98EF-AA569F57AC58}"/>
               </a:ext>
             </a:extLst>
           </p:cNvPr>
@@ -3219,7 +3219,7 @@
     </p:spTree>
     <p:extLst>
       <p:ext uri="{BB962C8B-B14F-4D97-AF65-F5344CB8AC3E}">
-        <p14:creationId xmlns:p14="http://schemas.microsoft.com/office/powerpoint/2010/main" val="643324836"/>
+        <p14:creationId xmlns:p14="http://schemas.microsoft.com/office/powerpoint/2010/main" val="1277698518"/>
       </p:ext>
     </p:extLst>
   </p:cSld>
@@ -3250,7 +3250,7 @@
           <p:cNvPr id="11" name="">
             <a:extLst xmlns:a="http://schemas.openxmlformats.org/drawingml/2006/main">
               <a:ext uri="{FF2B5EF4-FFF2-40B4-BE49-F238E27FC236}">
-                <a16:creationId xmlns:a16="http://schemas.microsoft.com/office/drawing/2014/main" id="{BC1CE231-9FF7-47DD-8059-EF03139E1178}"/>
+                <a16:creationId xmlns:a16="http://schemas.microsoft.com/office/drawing/2014/main" id="{47A78B56-B4EB-483E-AA27-B75CFD5320AE}"/>
               </a:ext>
             </a:extLst>
           </p:cNvPr>
@@ -3307,7 +3307,7 @@
           <p:cNvPr id="2" name="">
             <a:extLst xmlns:a="http://schemas.openxmlformats.org/drawingml/2006/main">
               <a:ext uri="{FF2B5EF4-FFF2-40B4-BE49-F238E27FC236}">
-                <a16:creationId xmlns:a16="http://schemas.microsoft.com/office/drawing/2014/main" id="{DC6AD25D-7EE3-49D4-8A9C-C4D5FCFE2FA4}"/>
+                <a16:creationId xmlns:a16="http://schemas.microsoft.com/office/drawing/2014/main" id="{5EC5BC82-5834-4B39-ACC4-DA08D47C2793}"/>
               </a:ext>
             </a:extLst>
           </p:cNvPr>
@@ -3364,7 +3364,7 @@
           <p:cNvPr id="3" name="">
             <a:extLst xmlns:a="http://schemas.openxmlformats.org/drawingml/2006/main">
               <a:ext uri="{FF2B5EF4-FFF2-40B4-BE49-F238E27FC236}">
-                <a16:creationId xmlns:a16="http://schemas.microsoft.com/office/drawing/2014/main" id="{6235A87C-E8EE-432B-89C1-BDC0E40B4FC1}"/>
+                <a16:creationId xmlns:a16="http://schemas.microsoft.com/office/drawing/2014/main" id="{02ED5EA9-6D36-4AB3-B448-8CF027F32B67}"/>
               </a:ext>
             </a:extLst>
           </p:cNvPr>
@@ -3421,7 +3421,7 @@
           <p:cNvPr id="4" name="">
             <a:extLst xmlns:a="http://schemas.openxmlformats.org/drawingml/2006/main">
               <a:ext uri="{FF2B5EF4-FFF2-40B4-BE49-F238E27FC236}">
-                <a16:creationId xmlns:a16="http://schemas.microsoft.com/office/drawing/2014/main" id="{7A08814B-73D7-4647-918C-DCB829F0A74B}"/>
+                <a16:creationId xmlns:a16="http://schemas.microsoft.com/office/drawing/2014/main" id="{2F1E4257-211F-4A1A-8DB7-0E2EC288ACE2}"/>
               </a:ext>
             </a:extLst>
           </p:cNvPr>
@@ -3478,7 +3478,7 @@
           <p:cNvPr id="5" name="">
             <a:extLst xmlns:a="http://schemas.openxmlformats.org/drawingml/2006/main">
               <a:ext uri="{FF2B5EF4-FFF2-40B4-BE49-F238E27FC236}">
-                <a16:creationId xmlns:a16="http://schemas.microsoft.com/office/drawing/2014/main" id="{517F9D0B-C8F6-4D1F-8071-4FE94A2AE040}"/>
+                <a16:creationId xmlns:a16="http://schemas.microsoft.com/office/drawing/2014/main" id="{EB5C11FA-8A16-425D-AD08-385D1012DF3A}"/>
               </a:ext>
             </a:extLst>
           </p:cNvPr>
@@ -3535,7 +3535,7 @@
           <p:cNvPr id="6" name="">
             <a:extLst xmlns:a="http://schemas.openxmlformats.org/drawingml/2006/main">
               <a:ext uri="{FF2B5EF4-FFF2-40B4-BE49-F238E27FC236}">
-                <a16:creationId xmlns:a16="http://schemas.microsoft.com/office/drawing/2014/main" id="{4661A651-9893-424C-B6E9-30790BF3E170}"/>
+                <a16:creationId xmlns:a16="http://schemas.microsoft.com/office/drawing/2014/main" id="{3A47D541-FC9D-4A76-8171-9087E0521201}"/>
               </a:ext>
             </a:extLst>
           </p:cNvPr>
@@ -3592,7 +3592,7 @@
           <p:cNvPr id="7" name="">
             <a:extLst xmlns:a="http://schemas.openxmlformats.org/drawingml/2006/main">
               <a:ext uri="{FF2B5EF4-FFF2-40B4-BE49-F238E27FC236}">
-                <a16:creationId xmlns:a16="http://schemas.microsoft.com/office/drawing/2014/main" id="{801F4276-9004-4F2C-94F5-2D3C09A14B31}"/>
+                <a16:creationId xmlns:a16="http://schemas.microsoft.com/office/drawing/2014/main" id="{8489C584-3C31-4199-A3AF-F1F35D81915C}"/>
               </a:ext>
             </a:extLst>
           </p:cNvPr>
@@ -3649,7 +3649,7 @@
           <p:cNvPr id="8" name="">
             <a:extLst xmlns:a="http://schemas.openxmlformats.org/drawingml/2006/main">
               <a:ext uri="{FF2B5EF4-FFF2-40B4-BE49-F238E27FC236}">
-                <a16:creationId xmlns:a16="http://schemas.microsoft.com/office/drawing/2014/main" id="{670F9C90-B069-4D1F-91CB-49FF4AA87A32}"/>
+                <a16:creationId xmlns:a16="http://schemas.microsoft.com/office/drawing/2014/main" id="{4A609E67-C8E8-4384-AF26-1F6FE0E879F6}"/>
               </a:ext>
             </a:extLst>
           </p:cNvPr>
@@ -3706,7 +3706,7 @@
           <p:cNvPr id="9" name="">
             <a:extLst xmlns:a="http://schemas.openxmlformats.org/drawingml/2006/main">
               <a:ext uri="{FF2B5EF4-FFF2-40B4-BE49-F238E27FC236}">
-                <a16:creationId xmlns:a16="http://schemas.microsoft.com/office/drawing/2014/main" id="{D2F7D3AE-6C35-4EAB-AB99-C3C21DFFDE96}"/>
+                <a16:creationId xmlns:a16="http://schemas.microsoft.com/office/drawing/2014/main" id="{431DA0A2-653D-43E6-895A-181FA2C55716}"/>
               </a:ext>
             </a:extLst>
           </p:cNvPr>
@@ -3763,7 +3763,7 @@
           <p:cNvPr id="10" name="">
             <a:extLst xmlns:a="http://schemas.openxmlformats.org/drawingml/2006/main">
               <a:ext uri="{FF2B5EF4-FFF2-40B4-BE49-F238E27FC236}">
-                <a16:creationId xmlns:a16="http://schemas.microsoft.com/office/drawing/2014/main" id="{5DF6734D-9B0F-4F6C-84C2-72EC66419DFA}"/>
+                <a16:creationId xmlns:a16="http://schemas.microsoft.com/office/drawing/2014/main" id="{5DFD5261-93CB-4479-A61D-F264AA6A4AA5}"/>
               </a:ext>
             </a:extLst>
           </p:cNvPr>
@@ -3841,7 +3841,7 @@
     </p:spTree>
     <p:extLst>
       <p:ext uri="{BB962C8B-B14F-4D97-AF65-F5344CB8AC3E}">
-        <p14:creationId xmlns:p14="http://schemas.microsoft.com/office/powerpoint/2010/main" val="530123722"/>
+        <p14:creationId xmlns:p14="http://schemas.microsoft.com/office/powerpoint/2010/main" val="1760115011"/>
       </p:ext>
     </p:extLst>
   </p:cSld>
@@ -3872,7 +3872,7 @@
           <p:cNvPr id="9" name="">
             <a:extLst xmlns:a="http://schemas.openxmlformats.org/drawingml/2006/main">
               <a:ext uri="{FF2B5EF4-FFF2-40B4-BE49-F238E27FC236}">
-                <a16:creationId xmlns:a16="http://schemas.microsoft.com/office/drawing/2014/main" id="{6A03E88D-9A9D-47A3-AE38-4F9FD111E075}"/>
+                <a16:creationId xmlns:a16="http://schemas.microsoft.com/office/drawing/2014/main" id="{4978D1E4-DB2D-4F21-B855-23581273AF29}"/>
               </a:ext>
             </a:extLst>
           </p:cNvPr>
@@ -3929,7 +3929,7 @@
           <p:cNvPr id="2" name="">
             <a:extLst xmlns:a="http://schemas.openxmlformats.org/drawingml/2006/main">
               <a:ext uri="{FF2B5EF4-FFF2-40B4-BE49-F238E27FC236}">
-                <a16:creationId xmlns:a16="http://schemas.microsoft.com/office/drawing/2014/main" id="{875B1619-D99B-49B2-B083-2B1BC16A3536}"/>
+                <a16:creationId xmlns:a16="http://schemas.microsoft.com/office/drawing/2014/main" id="{C5D032ED-FA13-45A1-A02D-4F9BA8936B39}"/>
               </a:ext>
             </a:extLst>
           </p:cNvPr>
@@ -3986,7 +3986,7 @@
           <p:cNvPr id="3" name="">
             <a:extLst xmlns:a="http://schemas.openxmlformats.org/drawingml/2006/main">
               <a:ext uri="{FF2B5EF4-FFF2-40B4-BE49-F238E27FC236}">
-                <a16:creationId xmlns:a16="http://schemas.microsoft.com/office/drawing/2014/main" id="{E28CDE18-FA78-4136-B8C4-3D231BC2DC9D}"/>
+                <a16:creationId xmlns:a16="http://schemas.microsoft.com/office/drawing/2014/main" id="{630A0FE3-05DA-4BB8-9F72-96CF77AECA5E}"/>
               </a:ext>
             </a:extLst>
           </p:cNvPr>
@@ -4043,7 +4043,7 @@
           <p:cNvPr id="4" name="">
             <a:extLst xmlns:a="http://schemas.openxmlformats.org/drawingml/2006/main">
               <a:ext uri="{FF2B5EF4-FFF2-40B4-BE49-F238E27FC236}">
-                <a16:creationId xmlns:a16="http://schemas.microsoft.com/office/drawing/2014/main" id="{762C5342-B54E-4DFF-9F5A-D1EE4F654269}"/>
+                <a16:creationId xmlns:a16="http://schemas.microsoft.com/office/drawing/2014/main" id="{F982A99F-E5DD-4584-80D8-23E44CE78135}"/>
               </a:ext>
             </a:extLst>
           </p:cNvPr>
@@ -4169,7 +4169,7 @@
           <p:cNvPr id="5" name="">
             <a:extLst xmlns:a="http://schemas.openxmlformats.org/drawingml/2006/main">
               <a:ext uri="{FF2B5EF4-FFF2-40B4-BE49-F238E27FC236}">
-                <a16:creationId xmlns:a16="http://schemas.microsoft.com/office/drawing/2014/main" id="{8B92A711-56C3-4ABF-B334-A7D9868A6D25}"/>
+                <a16:creationId xmlns:a16="http://schemas.microsoft.com/office/drawing/2014/main" id="{4A965C7D-610E-46A7-8F57-88E089E08084}"/>
               </a:ext>
             </a:extLst>
           </p:cNvPr>
@@ -4226,7 +4226,7 @@
           <p:cNvPr id="6" name="">
             <a:extLst xmlns:a="http://schemas.openxmlformats.org/drawingml/2006/main">
               <a:ext uri="{FF2B5EF4-FFF2-40B4-BE49-F238E27FC236}">
-                <a16:creationId xmlns:a16="http://schemas.microsoft.com/office/drawing/2014/main" id="{DAA65A14-D6C3-41AF-B426-B5B53BD0732D}"/>
+                <a16:creationId xmlns:a16="http://schemas.microsoft.com/office/drawing/2014/main" id="{7B795807-2B89-4523-A5FC-A233E45B636D}"/>
               </a:ext>
             </a:extLst>
           </p:cNvPr>
@@ -4352,7 +4352,7 @@
           <p:cNvPr id="7" name="">
             <a:extLst xmlns:a="http://schemas.openxmlformats.org/drawingml/2006/main">
               <a:ext uri="{FF2B5EF4-FFF2-40B4-BE49-F238E27FC236}">
-                <a16:creationId xmlns:a16="http://schemas.microsoft.com/office/drawing/2014/main" id="{5D859B4B-F7AB-4C3C-B2AF-DE5FD849C96E}"/>
+                <a16:creationId xmlns:a16="http://schemas.microsoft.com/office/drawing/2014/main" id="{5BDFEDAA-B7A2-467C-8028-3A9F3973F2A6}"/>
               </a:ext>
             </a:extLst>
           </p:cNvPr>
@@ -4409,7 +4409,7 @@
           <p:cNvPr id="8" name="">
             <a:extLst xmlns:a="http://schemas.openxmlformats.org/drawingml/2006/main">
               <a:ext uri="{FF2B5EF4-FFF2-40B4-BE49-F238E27FC236}">
-                <a16:creationId xmlns:a16="http://schemas.microsoft.com/office/drawing/2014/main" id="{D69BA80A-B25F-4AC8-84C9-ABE6B394F456}"/>
+                <a16:creationId xmlns:a16="http://schemas.microsoft.com/office/drawing/2014/main" id="{114A9B0E-5060-425C-AAFE-84266D9E6158}"/>
               </a:ext>
             </a:extLst>
           </p:cNvPr>
@@ -4464,7 +4464,7 @@
     </p:spTree>
     <p:extLst>
       <p:ext uri="{BB962C8B-B14F-4D97-AF65-F5344CB8AC3E}">
-        <p14:creationId xmlns:p14="http://schemas.microsoft.com/office/powerpoint/2010/main" val="1352371410"/>
+        <p14:creationId xmlns:p14="http://schemas.microsoft.com/office/powerpoint/2010/main" val="391137126"/>
       </p:ext>
     </p:extLst>
   </p:cSld>
@@ -4495,7 +4495,7 @@
           <p:cNvPr id="13" name="">
             <a:extLst xmlns:a="http://schemas.openxmlformats.org/drawingml/2006/main">
               <a:ext uri="{FF2B5EF4-FFF2-40B4-BE49-F238E27FC236}">
-                <a16:creationId xmlns:a16="http://schemas.microsoft.com/office/drawing/2014/main" id="{B9F4FDEC-8E58-46C1-9AA7-2BD60A5786F9}"/>
+                <a16:creationId xmlns:a16="http://schemas.microsoft.com/office/drawing/2014/main" id="{2DC2D22B-0DD7-4C56-94C6-56AAA0C0C60B}"/>
               </a:ext>
             </a:extLst>
           </p:cNvPr>
@@ -4552,7 +4552,7 @@
           <p:cNvPr id="2" name="">
             <a:extLst xmlns:a="http://schemas.openxmlformats.org/drawingml/2006/main">
               <a:ext uri="{FF2B5EF4-FFF2-40B4-BE49-F238E27FC236}">
-                <a16:creationId xmlns:a16="http://schemas.microsoft.com/office/drawing/2014/main" id="{04DD2CF6-2B5C-4C1C-8490-DC9C6F697E56}"/>
+                <a16:creationId xmlns:a16="http://schemas.microsoft.com/office/drawing/2014/main" id="{D223C336-11B0-402E-8E01-30E4E7D471E7}"/>
               </a:ext>
             </a:extLst>
           </p:cNvPr>
@@ -4609,7 +4609,7 @@
           <p:cNvPr id="3" name="">
             <a:extLst xmlns:a="http://schemas.openxmlformats.org/drawingml/2006/main">
               <a:ext uri="{FF2B5EF4-FFF2-40B4-BE49-F238E27FC236}">
-                <a16:creationId xmlns:a16="http://schemas.microsoft.com/office/drawing/2014/main" id="{F1AF0003-5E12-4D07-8276-2FD06D9423DC}"/>
+                <a16:creationId xmlns:a16="http://schemas.microsoft.com/office/drawing/2014/main" id="{CBBB784C-6D6A-4842-82CE-883F5777D570}"/>
               </a:ext>
             </a:extLst>
           </p:cNvPr>
@@ -4666,7 +4666,7 @@
           <p:cNvPr id="4" name="">
             <a:extLst xmlns:a="http://schemas.openxmlformats.org/drawingml/2006/main">
               <a:ext uri="{FF2B5EF4-FFF2-40B4-BE49-F238E27FC236}">
-                <a16:creationId xmlns:a16="http://schemas.microsoft.com/office/drawing/2014/main" id="{A70759F5-E3CB-47F6-BE00-B5E1FA608CE1}"/>
+                <a16:creationId xmlns:a16="http://schemas.microsoft.com/office/drawing/2014/main" id="{0BDEDB91-750D-4C00-BEBF-B2CBB9C66CD8}"/>
               </a:ext>
             </a:extLst>
           </p:cNvPr>
@@ -4723,7 +4723,7 @@
           <p:cNvPr id="5" name="">
             <a:extLst xmlns:a="http://schemas.openxmlformats.org/drawingml/2006/main">
               <a:ext uri="{FF2B5EF4-FFF2-40B4-BE49-F238E27FC236}">
-                <a16:creationId xmlns:a16="http://schemas.microsoft.com/office/drawing/2014/main" id="{A91C1F3F-FABF-49BC-B830-32108941946B}"/>
+                <a16:creationId xmlns:a16="http://schemas.microsoft.com/office/drawing/2014/main" id="{172B705C-B5AA-4BF6-88D9-CFD42125A4BF}"/>
               </a:ext>
             </a:extLst>
           </p:cNvPr>
@@ -4780,7 +4780,7 @@
           <p:cNvPr id="6" name="">
             <a:extLst xmlns:a="http://schemas.openxmlformats.org/drawingml/2006/main">
               <a:ext uri="{FF2B5EF4-FFF2-40B4-BE49-F238E27FC236}">
-                <a16:creationId xmlns:a16="http://schemas.microsoft.com/office/drawing/2014/main" id="{C4FD6E31-12BE-4F31-BD1E-0E88C27D11FC}"/>
+                <a16:creationId xmlns:a16="http://schemas.microsoft.com/office/drawing/2014/main" id="{E6493215-F054-4920-8822-A2591A65A935}"/>
               </a:ext>
             </a:extLst>
           </p:cNvPr>
@@ -4837,7 +4837,7 @@
           <p:cNvPr id="7" name="">
             <a:extLst xmlns:a="http://schemas.openxmlformats.org/drawingml/2006/main">
               <a:ext uri="{FF2B5EF4-FFF2-40B4-BE49-F238E27FC236}">
-                <a16:creationId xmlns:a16="http://schemas.microsoft.com/office/drawing/2014/main" id="{8E755472-1589-4864-93E7-B6B0C646640C}"/>
+                <a16:creationId xmlns:a16="http://schemas.microsoft.com/office/drawing/2014/main" id="{895E70A7-E2FE-4B76-B755-F85D49B4B3A6}"/>
               </a:ext>
             </a:extLst>
           </p:cNvPr>
@@ -4917,7 +4917,7 @@
           <p:cNvPr id="8" name="">
             <a:extLst xmlns:a="http://schemas.openxmlformats.org/drawingml/2006/main">
               <a:ext uri="{FF2B5EF4-FFF2-40B4-BE49-F238E27FC236}">
-                <a16:creationId xmlns:a16="http://schemas.microsoft.com/office/drawing/2014/main" id="{83C18A79-ED48-4A1C-B600-C51331BD38F4}"/>
+                <a16:creationId xmlns:a16="http://schemas.microsoft.com/office/drawing/2014/main" id="{1C131EA3-3BCD-4555-BA1F-85CFA16A9D4C}"/>
               </a:ext>
             </a:extLst>
           </p:cNvPr>
@@ -4974,7 +4974,7 @@
           <p:cNvPr id="9" name="">
             <a:extLst xmlns:a="http://schemas.openxmlformats.org/drawingml/2006/main">
               <a:ext uri="{FF2B5EF4-FFF2-40B4-BE49-F238E27FC236}">
-                <a16:creationId xmlns:a16="http://schemas.microsoft.com/office/drawing/2014/main" id="{26865BCF-5955-48A8-8434-6434AFB40C83}"/>
+                <a16:creationId xmlns:a16="http://schemas.microsoft.com/office/drawing/2014/main" id="{85EBE676-5399-455E-918A-72FD456B25D4}"/>
               </a:ext>
             </a:extLst>
           </p:cNvPr>
@@ -5054,7 +5054,7 @@
           <p:cNvPr id="10" name="">
             <a:extLst xmlns:a="http://schemas.openxmlformats.org/drawingml/2006/main">
               <a:ext uri="{FF2B5EF4-FFF2-40B4-BE49-F238E27FC236}">
-                <a16:creationId xmlns:a16="http://schemas.microsoft.com/office/drawing/2014/main" id="{F95A0B84-DAC6-43C5-BF40-0ADEBA187F7E}"/>
+                <a16:creationId xmlns:a16="http://schemas.microsoft.com/office/drawing/2014/main" id="{9789D560-BE50-498E-A3BF-1DDE0D56B820}"/>
               </a:ext>
             </a:extLst>
           </p:cNvPr>
@@ -5111,7 +5111,7 @@
           <p:cNvPr id="11" name="">
             <a:extLst xmlns:a="http://schemas.openxmlformats.org/drawingml/2006/main">
               <a:ext uri="{FF2B5EF4-FFF2-40B4-BE49-F238E27FC236}">
-                <a16:creationId xmlns:a16="http://schemas.microsoft.com/office/drawing/2014/main" id="{3821B117-F3C0-4363-8A2A-64B42C78ECF6}"/>
+                <a16:creationId xmlns:a16="http://schemas.microsoft.com/office/drawing/2014/main" id="{01500EFC-529A-4CBC-9EF3-E7422F6B0151}"/>
               </a:ext>
             </a:extLst>
           </p:cNvPr>
@@ -5168,7 +5168,7 @@
           <p:cNvPr id="12" name="">
             <a:extLst xmlns:a="http://schemas.openxmlformats.org/drawingml/2006/main">
               <a:ext uri="{FF2B5EF4-FFF2-40B4-BE49-F238E27FC236}">
-                <a16:creationId xmlns:a16="http://schemas.microsoft.com/office/drawing/2014/main" id="{7DD34286-2B74-43F5-82F7-B6828CD5332E}"/>
+                <a16:creationId xmlns:a16="http://schemas.microsoft.com/office/drawing/2014/main" id="{0548C8F9-5783-4929-A17A-48735CE98B6A}"/>
               </a:ext>
             </a:extLst>
           </p:cNvPr>
@@ -5223,7 +5223,7 @@
     </p:spTree>
     <p:extLst>
       <p:ext uri="{BB962C8B-B14F-4D97-AF65-F5344CB8AC3E}">
-        <p14:creationId xmlns:p14="http://schemas.microsoft.com/office/powerpoint/2010/main" val="1526912551"/>
+        <p14:creationId xmlns:p14="http://schemas.microsoft.com/office/powerpoint/2010/main" val="157549805"/>
       </p:ext>
     </p:extLst>
   </p:cSld>
@@ -5251,10 +5251,10 @@
       </p:grpSpPr>
       <p:sp>
         <p:nvSpPr>
-          <p:cNvPr id="9" name="">
-            <a:extLst xmlns:a="http://schemas.openxmlformats.org/drawingml/2006/main">
-              <a:ext uri="{FF2B5EF4-FFF2-40B4-BE49-F238E27FC236}">
-                <a16:creationId xmlns:a16="http://schemas.microsoft.com/office/drawing/2014/main" id="{44B80892-F2C6-493A-A01F-111505D03F61}"/>
+          <p:cNvPr id="11" name="">
+            <a:extLst xmlns:a="http://schemas.openxmlformats.org/drawingml/2006/main">
+              <a:ext uri="{FF2B5EF4-FFF2-40B4-BE49-F238E27FC236}">
+                <a16:creationId xmlns:a16="http://schemas.microsoft.com/office/drawing/2014/main" id="{1B8AD2D6-7B11-458E-B3F2-CB8F07C0D7A0}"/>
               </a:ext>
             </a:extLst>
           </p:cNvPr>
@@ -5311,7 +5311,7 @@
           <p:cNvPr id="2" name="">
             <a:extLst xmlns:a="http://schemas.openxmlformats.org/drawingml/2006/main">
               <a:ext uri="{FF2B5EF4-FFF2-40B4-BE49-F238E27FC236}">
-                <a16:creationId xmlns:a16="http://schemas.microsoft.com/office/drawing/2014/main" id="{B0E33E64-9698-4BCF-A722-BC06A39FA750}"/>
+                <a16:creationId xmlns:a16="http://schemas.microsoft.com/office/drawing/2014/main" id="{FA2205BA-82C3-4DF2-AB17-41CBB3582385}"/>
               </a:ext>
             </a:extLst>
           </p:cNvPr>
@@ -5368,7 +5368,7 @@
           <p:cNvPr id="3" name="">
             <a:extLst xmlns:a="http://schemas.openxmlformats.org/drawingml/2006/main">
               <a:ext uri="{FF2B5EF4-FFF2-40B4-BE49-F238E27FC236}">
-                <a16:creationId xmlns:a16="http://schemas.microsoft.com/office/drawing/2014/main" id="{563522DC-AC21-4CF9-BBAD-F29D0746F043}"/>
+                <a16:creationId xmlns:a16="http://schemas.microsoft.com/office/drawing/2014/main" id="{673620F9-ACBC-4E96-9EA8-45AD732245EF}"/>
               </a:ext>
             </a:extLst>
           </p:cNvPr>
@@ -5425,7 +5425,7 @@
           <p:cNvPr id="4" name="">
             <a:extLst xmlns:a="http://schemas.openxmlformats.org/drawingml/2006/main">
               <a:ext uri="{FF2B5EF4-FFF2-40B4-BE49-F238E27FC236}">
-                <a16:creationId xmlns:a16="http://schemas.microsoft.com/office/drawing/2014/main" id="{A089EB87-CAA6-46D6-A6A0-F624E43148F5}"/>
+                <a16:creationId xmlns:a16="http://schemas.microsoft.com/office/drawing/2014/main" id="{F0202C05-E61F-45D7-A0FA-101D6358461C}"/>
               </a:ext>
             </a:extLst>
           </p:cNvPr>
@@ -5482,7 +5482,64 @@
           <p:cNvPr id="5" name="">
             <a:extLst xmlns:a="http://schemas.openxmlformats.org/drawingml/2006/main">
               <a:ext uri="{FF2B5EF4-FFF2-40B4-BE49-F238E27FC236}">
-                <a16:creationId xmlns:a16="http://schemas.microsoft.com/office/drawing/2014/main" id="{7E12E4AD-70F1-475C-BB97-2AF8111FD9C4}"/>
+                <a16:creationId xmlns:a16="http://schemas.microsoft.com/office/drawing/2014/main" id="{41E27A0E-6788-433C-80CB-D8091F130E46}"/>
+              </a:ext>
+            </a:extLst>
+          </p:cNvPr>
+          <p:cNvSpPr>
+            <a:spLocks xmlns:a="http://schemas.openxmlformats.org/drawingml/2006/main" noGrp="1"/>
+          </p:cNvSpPr>
+          <p:nvPr/>
+        </p:nvSpPr>
+        <p:spPr>
+          <a:xfrm xmlns:a="http://schemas.openxmlformats.org/drawingml/2006/main">
+            <a:off x="685800" y="3476625"/>
+            <a:ext cx="10820400" cy="323850"/>
+          </a:xfrm>
+          <a:prstGeom xmlns:a="http://schemas.openxmlformats.org/drawingml/2006/main" prst="rect">
+            <a:avLst/>
+          </a:prstGeom>
+          <a:noFill xmlns:a="http://schemas.openxmlformats.org/drawingml/2006/main"/>
+          <a:ln xmlns:a="http://schemas.openxmlformats.org/drawingml/2006/main" w="0">
+            <a:noFill/>
+          </a:ln>
+        </p:spPr>
+        <p:txBody>
+          <a:bodyPr xmlns:a="http://schemas.openxmlformats.org/drawingml/2006/main">
+            <a:noAutofit/>
+          </a:bodyPr>
+          <a:lstStyle xmlns:a="http://schemas.openxmlformats.org/drawingml/2006/main"/>
+          <a:p xmlns:a="http://schemas.openxmlformats.org/drawingml/2006/main">
+            <a:pPr>
+              <a:defRPr sz="1725" b="0">
+                <a:solidFill>
+                  <a:srgbClr val="B5EF6B"/>
+                </a:solidFill>
+                <a:latin typeface="Helvetica Neue"/>
+                <a:ea typeface="Helvetica Neue"/>
+                <a:cs typeface="Helvetica Neue"/>
+              </a:defRPr>
+            </a:pPr>
+            <a:r>
+              <a:rPr sz="1725" b="0">
+                <a:solidFill>
+                  <a:srgbClr val="B5EF6B"/>
+                </a:solidFill>
+                <a:latin typeface="Helvetica Neue"/>
+                <a:ea typeface="Helvetica Neue"/>
+                <a:cs typeface="Helvetica Neue"/>
+              </a:rPr>
+              <a:t>dorahacks.io/buidl/49254</a:t>
+            </a:r>
+          </a:p>
+        </p:txBody>
+      </p:sp>
+      <p:sp>
+        <p:nvSpPr>
+          <p:cNvPr id="6" name="">
+            <a:extLst xmlns:a="http://schemas.openxmlformats.org/drawingml/2006/main">
+              <a:ext uri="{FF2B5EF4-FFF2-40B4-BE49-F238E27FC236}">
+                <a16:creationId xmlns:a16="http://schemas.microsoft.com/office/drawing/2014/main" id="{B437B6E1-9A9C-4581-86B4-6B7B2D58863E}"/>
               </a:ext>
             </a:extLst>
           </p:cNvPr>
@@ -5536,10 +5593,10 @@
       </p:sp>
       <p:sp>
         <p:nvSpPr>
-          <p:cNvPr id="6" name="">
-            <a:extLst xmlns:a="http://schemas.openxmlformats.org/drawingml/2006/main">
-              <a:ext uri="{FF2B5EF4-FFF2-40B4-BE49-F238E27FC236}">
-                <a16:creationId xmlns:a16="http://schemas.microsoft.com/office/drawing/2014/main" id="{36C2EB1B-67DD-4839-BEC4-07660ED3857E}"/>
+          <p:cNvPr id="7" name="">
+            <a:extLst xmlns:a="http://schemas.openxmlformats.org/drawingml/2006/main">
+              <a:ext uri="{FF2B5EF4-FFF2-40B4-BE49-F238E27FC236}">
+                <a16:creationId xmlns:a16="http://schemas.microsoft.com/office/drawing/2014/main" id="{84250B97-69CF-4A41-BCCE-362E9C276A09}"/>
               </a:ext>
             </a:extLst>
           </p:cNvPr>
@@ -5593,10 +5650,67 @@
       </p:sp>
       <p:sp>
         <p:nvSpPr>
-          <p:cNvPr id="7" name="">
-            <a:extLst xmlns:a="http://schemas.openxmlformats.org/drawingml/2006/main">
-              <a:ext uri="{FF2B5EF4-FFF2-40B4-BE49-F238E27FC236}">
-                <a16:creationId xmlns:a16="http://schemas.microsoft.com/office/drawing/2014/main" id="{30174778-C18F-4F8A-8F79-342BF1B486B1}"/>
+          <p:cNvPr id="8" name="">
+            <a:extLst xmlns:a="http://schemas.openxmlformats.org/drawingml/2006/main">
+              <a:ext uri="{FF2B5EF4-FFF2-40B4-BE49-F238E27FC236}">
+                <a16:creationId xmlns:a16="http://schemas.microsoft.com/office/drawing/2014/main" id="{9D908753-DA50-4484-A1DF-E708DC14E667}"/>
+              </a:ext>
+            </a:extLst>
+          </p:cNvPr>
+          <p:cNvSpPr>
+            <a:spLocks xmlns:a="http://schemas.openxmlformats.org/drawingml/2006/main" noGrp="1"/>
+          </p:cNvSpPr>
+          <p:nvPr/>
+        </p:nvSpPr>
+        <p:spPr>
+          <a:xfrm xmlns:a="http://schemas.openxmlformats.org/drawingml/2006/main">
+            <a:off x="685800" y="4819650"/>
+            <a:ext cx="10820400" cy="285750"/>
+          </a:xfrm>
+          <a:prstGeom xmlns:a="http://schemas.openxmlformats.org/drawingml/2006/main" prst="rect">
+            <a:avLst/>
+          </a:prstGeom>
+          <a:noFill xmlns:a="http://schemas.openxmlformats.org/drawingml/2006/main"/>
+          <a:ln xmlns:a="http://schemas.openxmlformats.org/drawingml/2006/main" w="0">
+            <a:noFill/>
+          </a:ln>
+        </p:spPr>
+        <p:txBody>
+          <a:bodyPr xmlns:a="http://schemas.openxmlformats.org/drawingml/2006/main">
+            <a:noAutofit/>
+          </a:bodyPr>
+          <a:lstStyle xmlns:a="http://schemas.openxmlformats.org/drawingml/2006/main"/>
+          <a:p xmlns:a="http://schemas.openxmlformats.org/drawingml/2006/main">
+            <a:pPr>
+              <a:defRPr sz="1575" b="0">
+                <a:solidFill>
+                  <a:srgbClr val="B5EF6B"/>
+                </a:solidFill>
+                <a:latin typeface="Helvetica Neue"/>
+                <a:ea typeface="Helvetica Neue"/>
+                <a:cs typeface="Helvetica Neue"/>
+              </a:defRPr>
+            </a:pPr>
+            <a:r>
+              <a:rPr sz="1575" b="0">
+                <a:solidFill>
+                  <a:srgbClr val="B5EF6B"/>
+                </a:solidFill>
+                <a:latin typeface="Helvetica Neue"/>
+                <a:ea typeface="Helvetica Neue"/>
+                <a:cs typeface="Helvetica Neue"/>
+              </a:rPr>
+              <a:t>youtu.be/CYLWG-bSSB8</a:t>
+            </a:r>
+          </a:p>
+        </p:txBody>
+      </p:sp>
+      <p:sp>
+        <p:nvSpPr>
+          <p:cNvPr id="9" name="">
+            <a:extLst xmlns:a="http://schemas.openxmlformats.org/drawingml/2006/main">
+              <a:ext uri="{FF2B5EF4-FFF2-40B4-BE49-F238E27FC236}">
+                <a16:creationId xmlns:a16="http://schemas.microsoft.com/office/drawing/2014/main" id="{5ADDDD54-8D7B-456F-9524-8E28D94B0868}"/>
               </a:ext>
             </a:extLst>
           </p:cNvPr>
@@ -5643,17 +5757,17 @@
                 <a:ea typeface="Helvetica Neue"/>
                 <a:cs typeface="Helvetica Neue"/>
               </a:rPr>
-              <a:t>Final submission steps</a:t>
-            </a:r>
-          </a:p>
-        </p:txBody>
-      </p:sp>
-      <p:sp>
-        <p:nvSpPr>
-          <p:cNvPr id="8" name="">
-            <a:extLst xmlns:a="http://schemas.openxmlformats.org/drawingml/2006/main">
-              <a:ext uri="{FF2B5EF4-FFF2-40B4-BE49-F238E27FC236}">
-                <a16:creationId xmlns:a16="http://schemas.microsoft.com/office/drawing/2014/main" id="{2AA0918D-9ADB-427A-8B10-50E4B166A209}"/>
+              <a:t>Submitted, under review</a:t>
+            </a:r>
+          </a:p>
+        </p:txBody>
+      </p:sp>
+      <p:sp>
+        <p:nvSpPr>
+          <p:cNvPr id="10" name="">
+            <a:extLst xmlns:a="http://schemas.openxmlformats.org/drawingml/2006/main">
+              <a:ext uri="{FF2B5EF4-FFF2-40B4-BE49-F238E27FC236}">
+                <a16:creationId xmlns:a16="http://schemas.microsoft.com/office/drawing/2014/main" id="{A4B15E43-A12C-4770-BF64-1ECE0ADF299D}"/>
               </a:ext>
             </a:extLst>
           </p:cNvPr>
@@ -5700,7 +5814,7 @@
                 <a:ea typeface="Helvetica Neue"/>
                 <a:cs typeface="Helvetica Neue"/>
               </a:rPr>
-              <a:t>Hosted video ready. Final DoraHacks agreement and X post remain.</a:t>
+              <a:t>YouTube public. X post published. DoraHacks visibility awaits moderation.</a:t>
             </a:r>
           </a:p>
         </p:txBody>
@@ -5708,7 +5822,7 @@
     </p:spTree>
     <p:extLst>
       <p:ext uri="{BB962C8B-B14F-4D97-AF65-F5344CB8AC3E}">
-        <p14:creationId xmlns:p14="http://schemas.microsoft.com/office/powerpoint/2010/main" val="491928365"/>
+        <p14:creationId xmlns:p14="http://schemas.microsoft.com/office/powerpoint/2010/main" val="154320941"/>
       </p:ext>
     </p:extLst>
   </p:cSld>

--- a/docs/assets/Runway-Guard-Pitch.pptx
+++ b/docs/assets/Runway-Guard-Pitch.pptx
@@ -2,19 +2,19 @@
 <file path=ppt/presentation.xml><?xml version="1.0" encoding="utf-8"?>
 <p:presentation xmlns:p="http://schemas.openxmlformats.org/presentationml/2006/main">
   <p:sldMasterIdLst>
-    <p:sldMasterId xmlns:r="http://schemas.openxmlformats.org/officeDocument/2006/relationships" id="2147483648" r:id="R7146b303db9d42cd"/>
+    <p:sldMasterId xmlns:r="http://schemas.openxmlformats.org/officeDocument/2006/relationships" id="2147483648" r:id="R5e7d051bce31404b"/>
   </p:sldMasterIdLst>
   <p:notesMasterIdLst>
-    <p:notesMasterId xmlns:r="http://schemas.openxmlformats.org/officeDocument/2006/relationships" r:id="Raac83d577e424c8f"/>
+    <p:notesMasterId xmlns:r="http://schemas.openxmlformats.org/officeDocument/2006/relationships" r:id="R87bcb03560e1466c"/>
   </p:notesMasterIdLst>
   <p:sldIdLst>
-    <p:sldId xmlns:r="http://schemas.openxmlformats.org/officeDocument/2006/relationships" id="256" r:id="Reb990c281bf54537"/>
-    <p:sldId xmlns:r="http://schemas.openxmlformats.org/officeDocument/2006/relationships" id="257" r:id="Rb74c399c00744c95"/>
-    <p:sldId xmlns:r="http://schemas.openxmlformats.org/officeDocument/2006/relationships" id="258" r:id="Rff9f4c012b2044e5"/>
-    <p:sldId xmlns:r="http://schemas.openxmlformats.org/officeDocument/2006/relationships" id="259" r:id="R401d38f5fb534c89"/>
-    <p:sldId xmlns:r="http://schemas.openxmlformats.org/officeDocument/2006/relationships" id="260" r:id="Rbe8ec0a13ad1463a"/>
-    <p:sldId xmlns:r="http://schemas.openxmlformats.org/officeDocument/2006/relationships" id="261" r:id="R8602a5890fb04607"/>
-    <p:sldId xmlns:r="http://schemas.openxmlformats.org/officeDocument/2006/relationships" id="262" r:id="R2659ab255d214f0f"/>
+    <p:sldId xmlns:r="http://schemas.openxmlformats.org/officeDocument/2006/relationships" id="256" r:id="R7cbdd733e390424e"/>
+    <p:sldId xmlns:r="http://schemas.openxmlformats.org/officeDocument/2006/relationships" id="257" r:id="R3ec12474a38b4d7a"/>
+    <p:sldId xmlns:r="http://schemas.openxmlformats.org/officeDocument/2006/relationships" id="258" r:id="Rd30b620024114f54"/>
+    <p:sldId xmlns:r="http://schemas.openxmlformats.org/officeDocument/2006/relationships" id="259" r:id="R79bf4063eab347a3"/>
+    <p:sldId xmlns:r="http://schemas.openxmlformats.org/officeDocument/2006/relationships" id="260" r:id="R2e1e0794858f4948"/>
+    <p:sldId xmlns:r="http://schemas.openxmlformats.org/officeDocument/2006/relationships" id="261" r:id="R13cbfb3de4444482"/>
+    <p:sldId xmlns:r="http://schemas.openxmlformats.org/officeDocument/2006/relationships" id="262" r:id="R21a68b805d5d4cf8"/>
   </p:sldIdLst>
   <p:sldSz cx="12192000" cy="6858000"/>
   <p:notesSz cx="6858000" cy="9144000"/>
@@ -868,7 +868,7 @@
           <a:lstStyle xmlns:a="http://schemas.openxmlformats.org/drawingml/2006/main"/>
           <a:p xmlns:a="http://schemas.openxmlformats.org/drawingml/2006/main">
             <a:r>
-              <a:t>Repository supplied by user: https://github.com/shi1720/coinmarketcap . Public deployment confirmed by product owner: https://runway-guard-cmc.web.app . Hosted video https://runway-guard-cmc.web.app/demo.html is ready. Authenticated own-key HTTP200 five-asset evidence is captured. The account is Basic and campaign Startup access remains unverified. DoraHacks contact fields are saved and Markets and Trading Tools is selected. The user confirmed platform terms and publication. BUIDL https://dorahacks.io/buidl/49254 is submitted to Build with CMC under review. DoraHacks public visibility awaits moderation. Public YouTube https://youtu.be/CYLWG-bSSB8 playback verified. One X post https://x.com/ShivamGuptaim/status/2105269446298550656 links BUIDL and video with#BuildwithCMC. Latest mainCI b647 run36712404738 success. English35cueSRTuploaded butwatchCCpropagationunverified. No moderation approval or prize result claimed. Hackathon requirements: https://coinmarketcap.com/api/resources/api-hackathon/ . X post must link actual submission and demo video with#BuildwithCMC.</a:t>
+              <a:t>Repository supplied by user: https://github.com/shi1720/coinmarketcap . Public deployment confirmed by product owner: https://runway-guard-cmc.web.app . Hosted video https://runway-guard-cmc.web.app/demo.html is ready. Authenticated own-key HTTP200 five-asset evidence is captured. The account is Basic and campaign Startup access remains unverified. DoraHacks contact fields are saved and Markets and Trading Tools is selected. The user confirmed platform terms and publication. BUIDL https://dorahacks.io/buidl/49254 is submitted to Build with CMC under review. DoraHacks public visibility awaits moderation. Replacement public YouTube https://youtu.be/0XljJqixhMU, approximately137.5seconds,33timedcaptioncues,en-IN-PrabhatNeural at-3%. Replacement playback verified46seconds readyState4 noerror. English33cueSRTpublishedinStudio;watchCCnotyetverified. Corrected X reply https://x.com/ShivamGuptaim/status/2105282566807015714 links BUIDL and video with#BuildwithCMC. Latest mainCI b647 run36712404738 success. English33cueSRTpublishedStudio;watchCCnotyetverified. CorrectedXreplylinksnewvideo;oldvideoisunlisted. Automatedsilenceanalysisfoundno1secinterval butnohumanlistening/perfectpronunciationclaim. No moderation approval or prize result claimed. Hackathon requirements: https://coinmarketcap.com/api/resources/api-hackathon/ . X post must link actual submission and demo video with#BuildwithCMC.</a:t>
             </a:r>
           </a:p>
         </p:txBody>
@@ -936,7 +936,7 @@
   </p:cSld>
   <p:clrMap bg1="lt1" tx1="dk1" bg2="lt2" tx2="dk2" accent1="accent1" accent2="accent2" accent3="accent3" accent4="accent4" accent5="accent5" accent6="accent6" hlink="hlink" folHlink="folHlink"/>
   <p:sldLayoutIdLst>
-    <p:sldLayoutId xmlns:r="http://schemas.openxmlformats.org/officeDocument/2006/relationships" id="2147483649" r:id="Rec6512793c274553"/>
+    <p:sldLayoutId xmlns:r="http://schemas.openxmlformats.org/officeDocument/2006/relationships" id="2147483649" r:id="Rf4732c913f634716"/>
   </p:sldLayoutIdLst>
   <p:txStyles>
     <p:titleStyle>
@@ -1487,7 +1487,7 @@
           <p:cNvPr id="6" name="">
             <a:extLst xmlns:a="http://schemas.openxmlformats.org/drawingml/2006/main">
               <a:ext uri="{FF2B5EF4-FFF2-40B4-BE49-F238E27FC236}">
-                <a16:creationId xmlns:a16="http://schemas.microsoft.com/office/drawing/2014/main" id="{0B3CC78A-B33B-47E6-86F7-1242FECCA758}"/>
+                <a16:creationId xmlns:a16="http://schemas.microsoft.com/office/drawing/2014/main" id="{7529EF83-1172-4C17-8BBC-951A64E3A827}"/>
               </a:ext>
             </a:extLst>
           </p:cNvPr>
@@ -1544,7 +1544,7 @@
           <p:cNvPr id="2" name="">
             <a:extLst xmlns:a="http://schemas.openxmlformats.org/drawingml/2006/main">
               <a:ext uri="{FF2B5EF4-FFF2-40B4-BE49-F238E27FC236}">
-                <a16:creationId xmlns:a16="http://schemas.microsoft.com/office/drawing/2014/main" id="{C395041C-84A4-4DF5-A30E-902884379921}"/>
+                <a16:creationId xmlns:a16="http://schemas.microsoft.com/office/drawing/2014/main" id="{150546BB-839F-430F-A17C-5DD173D764B8}"/>
               </a:ext>
             </a:extLst>
           </p:cNvPr>
@@ -1601,7 +1601,7 @@
           <p:cNvPr id="3" name="">
             <a:extLst xmlns:a="http://schemas.openxmlformats.org/drawingml/2006/main">
               <a:ext uri="{FF2B5EF4-FFF2-40B4-BE49-F238E27FC236}">
-                <a16:creationId xmlns:a16="http://schemas.microsoft.com/office/drawing/2014/main" id="{DCB9C872-2F8E-45EB-9E3F-B27BCAAAD7EB}"/>
+                <a16:creationId xmlns:a16="http://schemas.microsoft.com/office/drawing/2014/main" id="{93DD30BE-8FBE-44C4-AA55-DD6231432A12}"/>
               </a:ext>
             </a:extLst>
           </p:cNvPr>
@@ -1681,7 +1681,7 @@
           <p:cNvPr id="4" name="">
             <a:extLst xmlns:a="http://schemas.openxmlformats.org/drawingml/2006/main">
               <a:ext uri="{FF2B5EF4-FFF2-40B4-BE49-F238E27FC236}">
-                <a16:creationId xmlns:a16="http://schemas.microsoft.com/office/drawing/2014/main" id="{A0216459-69F3-47F1-8FB3-21F36C3205E9}"/>
+                <a16:creationId xmlns:a16="http://schemas.microsoft.com/office/drawing/2014/main" id="{06F6D1D0-3E9F-483C-B5BD-F86C95CBD41C}"/>
               </a:ext>
             </a:extLst>
           </p:cNvPr>
@@ -1738,7 +1738,7 @@
           <p:cNvPr id="5" name="">
             <a:extLst xmlns:a="http://schemas.openxmlformats.org/drawingml/2006/main">
               <a:ext uri="{FF2B5EF4-FFF2-40B4-BE49-F238E27FC236}">
-                <a16:creationId xmlns:a16="http://schemas.microsoft.com/office/drawing/2014/main" id="{CC88DA1A-3F66-4909-8089-8246D7535453}"/>
+                <a16:creationId xmlns:a16="http://schemas.microsoft.com/office/drawing/2014/main" id="{0906CB10-3125-4F8E-8DF6-3B1E88475E4E}"/>
               </a:ext>
             </a:extLst>
           </p:cNvPr>
@@ -1793,7 +1793,7 @@
     </p:spTree>
     <p:extLst>
       <p:ext uri="{BB962C8B-B14F-4D97-AF65-F5344CB8AC3E}">
-        <p14:creationId xmlns:p14="http://schemas.microsoft.com/office/powerpoint/2010/main" val="564625213"/>
+        <p14:creationId xmlns:p14="http://schemas.microsoft.com/office/powerpoint/2010/main" val="888778340"/>
       </p:ext>
     </p:extLst>
   </p:cSld>
@@ -1824,7 +1824,7 @@
           <p:cNvPr id="11" name="">
             <a:extLst xmlns:a="http://schemas.openxmlformats.org/drawingml/2006/main">
               <a:ext uri="{FF2B5EF4-FFF2-40B4-BE49-F238E27FC236}">
-                <a16:creationId xmlns:a16="http://schemas.microsoft.com/office/drawing/2014/main" id="{3C187E85-1938-4870-BEB0-54D4C11E3652}"/>
+                <a16:creationId xmlns:a16="http://schemas.microsoft.com/office/drawing/2014/main" id="{C7594BEF-9060-494A-B04A-0B5BBF4AA342}"/>
               </a:ext>
             </a:extLst>
           </p:cNvPr>
@@ -1881,7 +1881,7 @@
           <p:cNvPr id="2" name="">
             <a:extLst xmlns:a="http://schemas.openxmlformats.org/drawingml/2006/main">
               <a:ext uri="{FF2B5EF4-FFF2-40B4-BE49-F238E27FC236}">
-                <a16:creationId xmlns:a16="http://schemas.microsoft.com/office/drawing/2014/main" id="{4FABDEF6-F52B-4F6D-B2AF-22CAD851E0BA}"/>
+                <a16:creationId xmlns:a16="http://schemas.microsoft.com/office/drawing/2014/main" id="{B7FA2D18-B7B2-44EC-8DD5-250AB005C0F4}"/>
               </a:ext>
             </a:extLst>
           </p:cNvPr>
@@ -1938,7 +1938,7 @@
           <p:cNvPr id="3" name="">
             <a:extLst xmlns:a="http://schemas.openxmlformats.org/drawingml/2006/main">
               <a:ext uri="{FF2B5EF4-FFF2-40B4-BE49-F238E27FC236}">
-                <a16:creationId xmlns:a16="http://schemas.microsoft.com/office/drawing/2014/main" id="{ABE7E9DF-F56A-4AD8-A158-D66788F70047}"/>
+                <a16:creationId xmlns:a16="http://schemas.microsoft.com/office/drawing/2014/main" id="{E85BB2B7-4BB6-448E-8430-9B051B8B75E3}"/>
               </a:ext>
             </a:extLst>
           </p:cNvPr>
@@ -1995,7 +1995,7 @@
           <p:cNvPr id="4" name="">
             <a:extLst xmlns:a="http://schemas.openxmlformats.org/drawingml/2006/main">
               <a:ext uri="{FF2B5EF4-FFF2-40B4-BE49-F238E27FC236}">
-                <a16:creationId xmlns:a16="http://schemas.microsoft.com/office/drawing/2014/main" id="{98E7C129-4318-42C0-A1BB-7210DF224935}"/>
+                <a16:creationId xmlns:a16="http://schemas.microsoft.com/office/drawing/2014/main" id="{04D6E31F-6263-4381-9770-104D7B871CED}"/>
               </a:ext>
             </a:extLst>
           </p:cNvPr>
@@ -2052,7 +2052,7 @@
           <p:cNvPr id="5" name="">
             <a:extLst xmlns:a="http://schemas.openxmlformats.org/drawingml/2006/main">
               <a:ext uri="{FF2B5EF4-FFF2-40B4-BE49-F238E27FC236}">
-                <a16:creationId xmlns:a16="http://schemas.microsoft.com/office/drawing/2014/main" id="{6A88EC0F-9CA2-4EB5-A00B-EEF968736FD8}"/>
+                <a16:creationId xmlns:a16="http://schemas.microsoft.com/office/drawing/2014/main" id="{1F596FD7-BF6C-4661-B2FA-1FFCBFAA224F}"/>
               </a:ext>
             </a:extLst>
           </p:cNvPr>
@@ -2109,7 +2109,7 @@
           <p:cNvPr id="6" name="">
             <a:extLst xmlns:a="http://schemas.openxmlformats.org/drawingml/2006/main">
               <a:ext uri="{FF2B5EF4-FFF2-40B4-BE49-F238E27FC236}">
-                <a16:creationId xmlns:a16="http://schemas.microsoft.com/office/drawing/2014/main" id="{7D440050-753C-4775-A4C1-10D7C3D16BFB}"/>
+                <a16:creationId xmlns:a16="http://schemas.microsoft.com/office/drawing/2014/main" id="{6EB19E2A-02C3-4AD1-B050-F3E8C456BDCB}"/>
               </a:ext>
             </a:extLst>
           </p:cNvPr>
@@ -2166,7 +2166,7 @@
           <p:cNvPr id="7" name="">
             <a:extLst xmlns:a="http://schemas.openxmlformats.org/drawingml/2006/main">
               <a:ext uri="{FF2B5EF4-FFF2-40B4-BE49-F238E27FC236}">
-                <a16:creationId xmlns:a16="http://schemas.microsoft.com/office/drawing/2014/main" id="{6D2A1277-4DAC-490B-867D-3789A644AC8B}"/>
+                <a16:creationId xmlns:a16="http://schemas.microsoft.com/office/drawing/2014/main" id="{D284E492-9744-4D2B-B698-FE6D13F9CF26}"/>
               </a:ext>
             </a:extLst>
           </p:cNvPr>
@@ -2223,7 +2223,7 @@
           <p:cNvPr id="8" name="">
             <a:extLst xmlns:a="http://schemas.openxmlformats.org/drawingml/2006/main">
               <a:ext uri="{FF2B5EF4-FFF2-40B4-BE49-F238E27FC236}">
-                <a16:creationId xmlns:a16="http://schemas.microsoft.com/office/drawing/2014/main" id="{D851A608-A0E2-45C4-B6D5-1CD043D54BE5}"/>
+                <a16:creationId xmlns:a16="http://schemas.microsoft.com/office/drawing/2014/main" id="{77EC204B-9003-4977-BEA8-55980254761B}"/>
               </a:ext>
             </a:extLst>
           </p:cNvPr>
@@ -2280,7 +2280,7 @@
           <p:cNvPr id="9" name="">
             <a:extLst xmlns:a="http://schemas.openxmlformats.org/drawingml/2006/main">
               <a:ext uri="{FF2B5EF4-FFF2-40B4-BE49-F238E27FC236}">
-                <a16:creationId xmlns:a16="http://schemas.microsoft.com/office/drawing/2014/main" id="{9E19FB74-D813-4190-A533-59E8BB20BE08}"/>
+                <a16:creationId xmlns:a16="http://schemas.microsoft.com/office/drawing/2014/main" id="{D2C834FD-7F90-4AA6-9A2E-8D1F26E4F917}"/>
               </a:ext>
             </a:extLst>
           </p:cNvPr>
@@ -2337,7 +2337,7 @@
           <p:cNvPr id="10" name="">
             <a:extLst xmlns:a="http://schemas.openxmlformats.org/drawingml/2006/main">
               <a:ext uri="{FF2B5EF4-FFF2-40B4-BE49-F238E27FC236}">
-                <a16:creationId xmlns:a16="http://schemas.microsoft.com/office/drawing/2014/main" id="{41B33342-46D9-4EC9-9E8D-AB9AD78B65E1}"/>
+                <a16:creationId xmlns:a16="http://schemas.microsoft.com/office/drawing/2014/main" id="{5834456E-0381-4234-8A20-72999E06E083}"/>
               </a:ext>
             </a:extLst>
           </p:cNvPr>
@@ -2392,7 +2392,7 @@
     </p:spTree>
     <p:extLst>
       <p:ext uri="{BB962C8B-B14F-4D97-AF65-F5344CB8AC3E}">
-        <p14:creationId xmlns:p14="http://schemas.microsoft.com/office/powerpoint/2010/main" val="116540180"/>
+        <p14:creationId xmlns:p14="http://schemas.microsoft.com/office/powerpoint/2010/main" val="545115005"/>
       </p:ext>
     </p:extLst>
   </p:cSld>
@@ -2423,7 +2423,7 @@
           <p:cNvPr id="15" name="">
             <a:extLst xmlns:a="http://schemas.openxmlformats.org/drawingml/2006/main">
               <a:ext uri="{FF2B5EF4-FFF2-40B4-BE49-F238E27FC236}">
-                <a16:creationId xmlns:a16="http://schemas.microsoft.com/office/drawing/2014/main" id="{516867AC-4A8D-4FD7-86FF-BB60A240834E}"/>
+                <a16:creationId xmlns:a16="http://schemas.microsoft.com/office/drawing/2014/main" id="{87E0EC5B-3328-4734-863D-E22BF9D5A7B4}"/>
               </a:ext>
             </a:extLst>
           </p:cNvPr>
@@ -2480,7 +2480,7 @@
           <p:cNvPr id="2" name="">
             <a:extLst xmlns:a="http://schemas.openxmlformats.org/drawingml/2006/main">
               <a:ext uri="{FF2B5EF4-FFF2-40B4-BE49-F238E27FC236}">
-                <a16:creationId xmlns:a16="http://schemas.microsoft.com/office/drawing/2014/main" id="{3A6FCBAC-4061-4723-BC4E-8233F4634535}"/>
+                <a16:creationId xmlns:a16="http://schemas.microsoft.com/office/drawing/2014/main" id="{1947AC96-4E95-4DA2-A622-FCEACBD2C3FF}"/>
               </a:ext>
             </a:extLst>
           </p:cNvPr>
@@ -2537,7 +2537,7 @@
           <p:cNvPr id="3" name="">
             <a:extLst xmlns:a="http://schemas.openxmlformats.org/drawingml/2006/main">
               <a:ext uri="{FF2B5EF4-FFF2-40B4-BE49-F238E27FC236}">
-                <a16:creationId xmlns:a16="http://schemas.microsoft.com/office/drawing/2014/main" id="{19D722E4-BC94-4C75-8668-95DB2433E30F}"/>
+                <a16:creationId xmlns:a16="http://schemas.microsoft.com/office/drawing/2014/main" id="{7835D139-086E-4657-AB98-D7883310C315}"/>
               </a:ext>
             </a:extLst>
           </p:cNvPr>
@@ -2594,7 +2594,7 @@
           <p:cNvPr id="4" name="">
             <a:extLst xmlns:a="http://schemas.openxmlformats.org/drawingml/2006/main">
               <a:ext uri="{FF2B5EF4-FFF2-40B4-BE49-F238E27FC236}">
-                <a16:creationId xmlns:a16="http://schemas.microsoft.com/office/drawing/2014/main" id="{79A312DF-6DB5-4B55-9C38-3BC467BFC4B7}"/>
+                <a16:creationId xmlns:a16="http://schemas.microsoft.com/office/drawing/2014/main" id="{F8869CC4-2BA0-4FB1-9580-B986D803433B}"/>
               </a:ext>
             </a:extLst>
           </p:cNvPr>
@@ -2651,7 +2651,7 @@
           <p:cNvPr id="5" name="">
             <a:extLst xmlns:a="http://schemas.openxmlformats.org/drawingml/2006/main">
               <a:ext uri="{FF2B5EF4-FFF2-40B4-BE49-F238E27FC236}">
-                <a16:creationId xmlns:a16="http://schemas.microsoft.com/office/drawing/2014/main" id="{DC6D8E1B-A546-4132-B812-EEF336038A0C}"/>
+                <a16:creationId xmlns:a16="http://schemas.microsoft.com/office/drawing/2014/main" id="{A5795E76-EA4A-4F16-ABFC-7F05F8C05B78}"/>
               </a:ext>
             </a:extLst>
           </p:cNvPr>
@@ -2708,7 +2708,7 @@
           <p:cNvPr id="6" name="">
             <a:extLst xmlns:a="http://schemas.openxmlformats.org/drawingml/2006/main">
               <a:ext uri="{FF2B5EF4-FFF2-40B4-BE49-F238E27FC236}">
-                <a16:creationId xmlns:a16="http://schemas.microsoft.com/office/drawing/2014/main" id="{059D8C0C-B274-452B-828A-272B79452ADC}"/>
+                <a16:creationId xmlns:a16="http://schemas.microsoft.com/office/drawing/2014/main" id="{E396428C-3349-4B6D-B7A8-CFCABE4897F6}"/>
               </a:ext>
             </a:extLst>
           </p:cNvPr>
@@ -2765,7 +2765,7 @@
           <p:cNvPr id="7" name="">
             <a:extLst xmlns:a="http://schemas.openxmlformats.org/drawingml/2006/main">
               <a:ext uri="{FF2B5EF4-FFF2-40B4-BE49-F238E27FC236}">
-                <a16:creationId xmlns:a16="http://schemas.microsoft.com/office/drawing/2014/main" id="{12D4A86B-7805-4610-959D-B604610BA021}"/>
+                <a16:creationId xmlns:a16="http://schemas.microsoft.com/office/drawing/2014/main" id="{9D646422-90B5-4D14-A4F9-FD856AFD08C7}"/>
               </a:ext>
             </a:extLst>
           </p:cNvPr>
@@ -2822,7 +2822,7 @@
           <p:cNvPr id="8" name="">
             <a:extLst xmlns:a="http://schemas.openxmlformats.org/drawingml/2006/main">
               <a:ext uri="{FF2B5EF4-FFF2-40B4-BE49-F238E27FC236}">
-                <a16:creationId xmlns:a16="http://schemas.microsoft.com/office/drawing/2014/main" id="{B2F6701D-3310-48E7-9CC7-211BDE2B94FC}"/>
+                <a16:creationId xmlns:a16="http://schemas.microsoft.com/office/drawing/2014/main" id="{0220555C-BBD8-4258-8406-3CD448F8D892}"/>
               </a:ext>
             </a:extLst>
           </p:cNvPr>
@@ -2879,7 +2879,7 @@
           <p:cNvPr id="9" name="">
             <a:extLst xmlns:a="http://schemas.openxmlformats.org/drawingml/2006/main">
               <a:ext uri="{FF2B5EF4-FFF2-40B4-BE49-F238E27FC236}">
-                <a16:creationId xmlns:a16="http://schemas.microsoft.com/office/drawing/2014/main" id="{C64676D0-85C0-4B6F-A563-2C7665255B3E}"/>
+                <a16:creationId xmlns:a16="http://schemas.microsoft.com/office/drawing/2014/main" id="{74624918-541A-426C-BEDC-FC9CF233CE29}"/>
               </a:ext>
             </a:extLst>
           </p:cNvPr>
@@ -2936,7 +2936,7 @@
           <p:cNvPr id="10" name="">
             <a:extLst xmlns:a="http://schemas.openxmlformats.org/drawingml/2006/main">
               <a:ext uri="{FF2B5EF4-FFF2-40B4-BE49-F238E27FC236}">
-                <a16:creationId xmlns:a16="http://schemas.microsoft.com/office/drawing/2014/main" id="{4803DCFB-6E09-4C50-AC4E-D3061C46667A}"/>
+                <a16:creationId xmlns:a16="http://schemas.microsoft.com/office/drawing/2014/main" id="{54C3EDFD-8188-48B2-9794-E06EC6A5C3A0}"/>
               </a:ext>
             </a:extLst>
           </p:cNvPr>
@@ -2993,7 +2993,7 @@
           <p:cNvPr id="11" name="">
             <a:extLst xmlns:a="http://schemas.openxmlformats.org/drawingml/2006/main">
               <a:ext uri="{FF2B5EF4-FFF2-40B4-BE49-F238E27FC236}">
-                <a16:creationId xmlns:a16="http://schemas.microsoft.com/office/drawing/2014/main" id="{51E61AE3-3F73-460E-B923-0522C6AA634F}"/>
+                <a16:creationId xmlns:a16="http://schemas.microsoft.com/office/drawing/2014/main" id="{07846D6A-F525-4ECB-A1C4-AF714B3C5EF2}"/>
               </a:ext>
             </a:extLst>
           </p:cNvPr>
@@ -3050,7 +3050,7 @@
           <p:cNvPr id="12" name="">
             <a:extLst xmlns:a="http://schemas.openxmlformats.org/drawingml/2006/main">
               <a:ext uri="{FF2B5EF4-FFF2-40B4-BE49-F238E27FC236}">
-                <a16:creationId xmlns:a16="http://schemas.microsoft.com/office/drawing/2014/main" id="{8F2C96D3-B21E-4154-BF8C-44ABCBBCED61}"/>
+                <a16:creationId xmlns:a16="http://schemas.microsoft.com/office/drawing/2014/main" id="{7747982E-8F18-49B2-9768-47B7B04FAC73}"/>
               </a:ext>
             </a:extLst>
           </p:cNvPr>
@@ -3107,7 +3107,7 @@
           <p:cNvPr id="13" name="">
             <a:extLst xmlns:a="http://schemas.openxmlformats.org/drawingml/2006/main">
               <a:ext uri="{FF2B5EF4-FFF2-40B4-BE49-F238E27FC236}">
-                <a16:creationId xmlns:a16="http://schemas.microsoft.com/office/drawing/2014/main" id="{52D35956-FCC1-403E-B294-9ACFE25DE49E}"/>
+                <a16:creationId xmlns:a16="http://schemas.microsoft.com/office/drawing/2014/main" id="{48CE2580-0AF6-4EE7-BF40-A0FC32D93F9B}"/>
               </a:ext>
             </a:extLst>
           </p:cNvPr>
@@ -3164,7 +3164,7 @@
           <p:cNvPr id="14" name="">
             <a:extLst xmlns:a="http://schemas.openxmlformats.org/drawingml/2006/main">
               <a:ext uri="{FF2B5EF4-FFF2-40B4-BE49-F238E27FC236}">
-                <a16:creationId xmlns:a16="http://schemas.microsoft.com/office/drawing/2014/main" id="{A81B0838-7889-4D90-98EF-AA569F57AC58}"/>
+                <a16:creationId xmlns:a16="http://schemas.microsoft.com/office/drawing/2014/main" id="{A6350386-E497-4551-9BAF-4A1EA8CF5A6E}"/>
               </a:ext>
             </a:extLst>
           </p:cNvPr>
@@ -3219,7 +3219,7 @@
     </p:spTree>
     <p:extLst>
       <p:ext uri="{BB962C8B-B14F-4D97-AF65-F5344CB8AC3E}">
-        <p14:creationId xmlns:p14="http://schemas.microsoft.com/office/powerpoint/2010/main" val="1277698518"/>
+        <p14:creationId xmlns:p14="http://schemas.microsoft.com/office/powerpoint/2010/main" val="1170018465"/>
       </p:ext>
     </p:extLst>
   </p:cSld>
@@ -3250,7 +3250,7 @@
           <p:cNvPr id="11" name="">
             <a:extLst xmlns:a="http://schemas.openxmlformats.org/drawingml/2006/main">
               <a:ext uri="{FF2B5EF4-FFF2-40B4-BE49-F238E27FC236}">
-                <a16:creationId xmlns:a16="http://schemas.microsoft.com/office/drawing/2014/main" id="{47A78B56-B4EB-483E-AA27-B75CFD5320AE}"/>
+                <a16:creationId xmlns:a16="http://schemas.microsoft.com/office/drawing/2014/main" id="{C9586DB9-E654-4C97-956B-21CDF852DED9}"/>
               </a:ext>
             </a:extLst>
           </p:cNvPr>
@@ -3307,7 +3307,7 @@
           <p:cNvPr id="2" name="">
             <a:extLst xmlns:a="http://schemas.openxmlformats.org/drawingml/2006/main">
               <a:ext uri="{FF2B5EF4-FFF2-40B4-BE49-F238E27FC236}">
-                <a16:creationId xmlns:a16="http://schemas.microsoft.com/office/drawing/2014/main" id="{5EC5BC82-5834-4B39-ACC4-DA08D47C2793}"/>
+                <a16:creationId xmlns:a16="http://schemas.microsoft.com/office/drawing/2014/main" id="{FF0359D8-8B2F-4D5D-AA35-935D84496BBC}"/>
               </a:ext>
             </a:extLst>
           </p:cNvPr>
@@ -3364,7 +3364,7 @@
           <p:cNvPr id="3" name="">
             <a:extLst xmlns:a="http://schemas.openxmlformats.org/drawingml/2006/main">
               <a:ext uri="{FF2B5EF4-FFF2-40B4-BE49-F238E27FC236}">
-                <a16:creationId xmlns:a16="http://schemas.microsoft.com/office/drawing/2014/main" id="{02ED5EA9-6D36-4AB3-B448-8CF027F32B67}"/>
+                <a16:creationId xmlns:a16="http://schemas.microsoft.com/office/drawing/2014/main" id="{5A5898AE-C8F3-41B6-9C10-AE8B5C80A0F3}"/>
               </a:ext>
             </a:extLst>
           </p:cNvPr>
@@ -3421,7 +3421,7 @@
           <p:cNvPr id="4" name="">
             <a:extLst xmlns:a="http://schemas.openxmlformats.org/drawingml/2006/main">
               <a:ext uri="{FF2B5EF4-FFF2-40B4-BE49-F238E27FC236}">
-                <a16:creationId xmlns:a16="http://schemas.microsoft.com/office/drawing/2014/main" id="{2F1E4257-211F-4A1A-8DB7-0E2EC288ACE2}"/>
+                <a16:creationId xmlns:a16="http://schemas.microsoft.com/office/drawing/2014/main" id="{12A190FB-3830-4272-8526-B392A72C0C56}"/>
               </a:ext>
             </a:extLst>
           </p:cNvPr>
@@ -3478,7 +3478,7 @@
           <p:cNvPr id="5" name="">
             <a:extLst xmlns:a="http://schemas.openxmlformats.org/drawingml/2006/main">
               <a:ext uri="{FF2B5EF4-FFF2-40B4-BE49-F238E27FC236}">
-                <a16:creationId xmlns:a16="http://schemas.microsoft.com/office/drawing/2014/main" id="{EB5C11FA-8A16-425D-AD08-385D1012DF3A}"/>
+                <a16:creationId xmlns:a16="http://schemas.microsoft.com/office/drawing/2014/main" id="{A77C6566-5CFE-4830-A575-48ED451C1E42}"/>
               </a:ext>
             </a:extLst>
           </p:cNvPr>
@@ -3535,7 +3535,7 @@
           <p:cNvPr id="6" name="">
             <a:extLst xmlns:a="http://schemas.openxmlformats.org/drawingml/2006/main">
               <a:ext uri="{FF2B5EF4-FFF2-40B4-BE49-F238E27FC236}">
-                <a16:creationId xmlns:a16="http://schemas.microsoft.com/office/drawing/2014/main" id="{3A47D541-FC9D-4A76-8171-9087E0521201}"/>
+                <a16:creationId xmlns:a16="http://schemas.microsoft.com/office/drawing/2014/main" id="{4A25B8FF-1A64-46B7-8935-40752EB0310E}"/>
               </a:ext>
             </a:extLst>
           </p:cNvPr>
@@ -3592,7 +3592,7 @@
           <p:cNvPr id="7" name="">
             <a:extLst xmlns:a="http://schemas.openxmlformats.org/drawingml/2006/main">
               <a:ext uri="{FF2B5EF4-FFF2-40B4-BE49-F238E27FC236}">
-                <a16:creationId xmlns:a16="http://schemas.microsoft.com/office/drawing/2014/main" id="{8489C584-3C31-4199-A3AF-F1F35D81915C}"/>
+                <a16:creationId xmlns:a16="http://schemas.microsoft.com/office/drawing/2014/main" id="{4E3CA6E3-525E-480E-ABC5-67B6426D2339}"/>
               </a:ext>
             </a:extLst>
           </p:cNvPr>
@@ -3649,7 +3649,7 @@
           <p:cNvPr id="8" name="">
             <a:extLst xmlns:a="http://schemas.openxmlformats.org/drawingml/2006/main">
               <a:ext uri="{FF2B5EF4-FFF2-40B4-BE49-F238E27FC236}">
-                <a16:creationId xmlns:a16="http://schemas.microsoft.com/office/drawing/2014/main" id="{4A609E67-C8E8-4384-AF26-1F6FE0E879F6}"/>
+                <a16:creationId xmlns:a16="http://schemas.microsoft.com/office/drawing/2014/main" id="{FBA08291-ACD4-4CE3-977A-59153851153B}"/>
               </a:ext>
             </a:extLst>
           </p:cNvPr>
@@ -3706,7 +3706,7 @@
           <p:cNvPr id="9" name="">
             <a:extLst xmlns:a="http://schemas.openxmlformats.org/drawingml/2006/main">
               <a:ext uri="{FF2B5EF4-FFF2-40B4-BE49-F238E27FC236}">
-                <a16:creationId xmlns:a16="http://schemas.microsoft.com/office/drawing/2014/main" id="{431DA0A2-653D-43E6-895A-181FA2C55716}"/>
+                <a16:creationId xmlns:a16="http://schemas.microsoft.com/office/drawing/2014/main" id="{4EEF8767-1C27-43B3-92D6-A7756D0B75D8}"/>
               </a:ext>
             </a:extLst>
           </p:cNvPr>
@@ -3763,7 +3763,7 @@
           <p:cNvPr id="10" name="">
             <a:extLst xmlns:a="http://schemas.openxmlformats.org/drawingml/2006/main">
               <a:ext uri="{FF2B5EF4-FFF2-40B4-BE49-F238E27FC236}">
-                <a16:creationId xmlns:a16="http://schemas.microsoft.com/office/drawing/2014/main" id="{5DFD5261-93CB-4479-A61D-F264AA6A4AA5}"/>
+                <a16:creationId xmlns:a16="http://schemas.microsoft.com/office/drawing/2014/main" id="{A6E4803A-AAC0-43DE-AE37-B68EFF8D34BE}"/>
               </a:ext>
             </a:extLst>
           </p:cNvPr>
@@ -3841,7 +3841,7 @@
     </p:spTree>
     <p:extLst>
       <p:ext uri="{BB962C8B-B14F-4D97-AF65-F5344CB8AC3E}">
-        <p14:creationId xmlns:p14="http://schemas.microsoft.com/office/powerpoint/2010/main" val="1760115011"/>
+        <p14:creationId xmlns:p14="http://schemas.microsoft.com/office/powerpoint/2010/main" val="2095707953"/>
       </p:ext>
     </p:extLst>
   </p:cSld>
@@ -3872,7 +3872,7 @@
           <p:cNvPr id="9" name="">
             <a:extLst xmlns:a="http://schemas.openxmlformats.org/drawingml/2006/main">
               <a:ext uri="{FF2B5EF4-FFF2-40B4-BE49-F238E27FC236}">
-                <a16:creationId xmlns:a16="http://schemas.microsoft.com/office/drawing/2014/main" id="{4978D1E4-DB2D-4F21-B855-23581273AF29}"/>
+                <a16:creationId xmlns:a16="http://schemas.microsoft.com/office/drawing/2014/main" id="{5E28DE42-4A28-422E-9DAB-801B9A9079FC}"/>
               </a:ext>
             </a:extLst>
           </p:cNvPr>
@@ -3929,7 +3929,7 @@
           <p:cNvPr id="2" name="">
             <a:extLst xmlns:a="http://schemas.openxmlformats.org/drawingml/2006/main">
               <a:ext uri="{FF2B5EF4-FFF2-40B4-BE49-F238E27FC236}">
-                <a16:creationId xmlns:a16="http://schemas.microsoft.com/office/drawing/2014/main" id="{C5D032ED-FA13-45A1-A02D-4F9BA8936B39}"/>
+                <a16:creationId xmlns:a16="http://schemas.microsoft.com/office/drawing/2014/main" id="{B8A8083B-9812-4BE0-BF0C-EE253015E083}"/>
               </a:ext>
             </a:extLst>
           </p:cNvPr>
@@ -3986,7 +3986,7 @@
           <p:cNvPr id="3" name="">
             <a:extLst xmlns:a="http://schemas.openxmlformats.org/drawingml/2006/main">
               <a:ext uri="{FF2B5EF4-FFF2-40B4-BE49-F238E27FC236}">
-                <a16:creationId xmlns:a16="http://schemas.microsoft.com/office/drawing/2014/main" id="{630A0FE3-05DA-4BB8-9F72-96CF77AECA5E}"/>
+                <a16:creationId xmlns:a16="http://schemas.microsoft.com/office/drawing/2014/main" id="{3D9E3418-1D30-41C0-B486-CE977ADE9204}"/>
               </a:ext>
             </a:extLst>
           </p:cNvPr>
@@ -4043,7 +4043,7 @@
           <p:cNvPr id="4" name="">
             <a:extLst xmlns:a="http://schemas.openxmlformats.org/drawingml/2006/main">
               <a:ext uri="{FF2B5EF4-FFF2-40B4-BE49-F238E27FC236}">
-                <a16:creationId xmlns:a16="http://schemas.microsoft.com/office/drawing/2014/main" id="{F982A99F-E5DD-4584-80D8-23E44CE78135}"/>
+                <a16:creationId xmlns:a16="http://schemas.microsoft.com/office/drawing/2014/main" id="{2D2D3A8C-987B-4903-B8DD-A174893B860E}"/>
               </a:ext>
             </a:extLst>
           </p:cNvPr>
@@ -4169,7 +4169,7 @@
           <p:cNvPr id="5" name="">
             <a:extLst xmlns:a="http://schemas.openxmlformats.org/drawingml/2006/main">
               <a:ext uri="{FF2B5EF4-FFF2-40B4-BE49-F238E27FC236}">
-                <a16:creationId xmlns:a16="http://schemas.microsoft.com/office/drawing/2014/main" id="{4A965C7D-610E-46A7-8F57-88E089E08084}"/>
+                <a16:creationId xmlns:a16="http://schemas.microsoft.com/office/drawing/2014/main" id="{05B741FB-A00D-452E-9EE5-53DE71A1963F}"/>
               </a:ext>
             </a:extLst>
           </p:cNvPr>
@@ -4226,7 +4226,7 @@
           <p:cNvPr id="6" name="">
             <a:extLst xmlns:a="http://schemas.openxmlformats.org/drawingml/2006/main">
               <a:ext uri="{FF2B5EF4-FFF2-40B4-BE49-F238E27FC236}">
-                <a16:creationId xmlns:a16="http://schemas.microsoft.com/office/drawing/2014/main" id="{7B795807-2B89-4523-A5FC-A233E45B636D}"/>
+                <a16:creationId xmlns:a16="http://schemas.microsoft.com/office/drawing/2014/main" id="{831CF59C-D07F-4D34-B204-8D6C85598BDD}"/>
               </a:ext>
             </a:extLst>
           </p:cNvPr>
@@ -4352,7 +4352,7 @@
           <p:cNvPr id="7" name="">
             <a:extLst xmlns:a="http://schemas.openxmlformats.org/drawingml/2006/main">
               <a:ext uri="{FF2B5EF4-FFF2-40B4-BE49-F238E27FC236}">
-                <a16:creationId xmlns:a16="http://schemas.microsoft.com/office/drawing/2014/main" id="{5BDFEDAA-B7A2-467C-8028-3A9F3973F2A6}"/>
+                <a16:creationId xmlns:a16="http://schemas.microsoft.com/office/drawing/2014/main" id="{22D2B886-1E97-491D-9DB5-E505108E2279}"/>
               </a:ext>
             </a:extLst>
           </p:cNvPr>
@@ -4409,7 +4409,7 @@
           <p:cNvPr id="8" name="">
             <a:extLst xmlns:a="http://schemas.openxmlformats.org/drawingml/2006/main">
               <a:ext uri="{FF2B5EF4-FFF2-40B4-BE49-F238E27FC236}">
-                <a16:creationId xmlns:a16="http://schemas.microsoft.com/office/drawing/2014/main" id="{114A9B0E-5060-425C-AAFE-84266D9E6158}"/>
+                <a16:creationId xmlns:a16="http://schemas.microsoft.com/office/drawing/2014/main" id="{0110019F-FBA9-417E-8523-0BD67734C3B9}"/>
               </a:ext>
             </a:extLst>
           </p:cNvPr>
@@ -4464,7 +4464,7 @@
     </p:spTree>
     <p:extLst>
       <p:ext uri="{BB962C8B-B14F-4D97-AF65-F5344CB8AC3E}">
-        <p14:creationId xmlns:p14="http://schemas.microsoft.com/office/powerpoint/2010/main" val="391137126"/>
+        <p14:creationId xmlns:p14="http://schemas.microsoft.com/office/powerpoint/2010/main" val="47811959"/>
       </p:ext>
     </p:extLst>
   </p:cSld>
@@ -4495,7 +4495,7 @@
           <p:cNvPr id="13" name="">
             <a:extLst xmlns:a="http://schemas.openxmlformats.org/drawingml/2006/main">
               <a:ext uri="{FF2B5EF4-FFF2-40B4-BE49-F238E27FC236}">
-                <a16:creationId xmlns:a16="http://schemas.microsoft.com/office/drawing/2014/main" id="{2DC2D22B-0DD7-4C56-94C6-56AAA0C0C60B}"/>
+                <a16:creationId xmlns:a16="http://schemas.microsoft.com/office/drawing/2014/main" id="{B2A41027-CAB0-4A01-B8C7-1A5C7580958A}"/>
               </a:ext>
             </a:extLst>
           </p:cNvPr>
@@ -4552,7 +4552,7 @@
           <p:cNvPr id="2" name="">
             <a:extLst xmlns:a="http://schemas.openxmlformats.org/drawingml/2006/main">
               <a:ext uri="{FF2B5EF4-FFF2-40B4-BE49-F238E27FC236}">
-                <a16:creationId xmlns:a16="http://schemas.microsoft.com/office/drawing/2014/main" id="{D223C336-11B0-402E-8E01-30E4E7D471E7}"/>
+                <a16:creationId xmlns:a16="http://schemas.microsoft.com/office/drawing/2014/main" id="{B821D8B5-0574-4A06-937D-92562C08C9A9}"/>
               </a:ext>
             </a:extLst>
           </p:cNvPr>
@@ -4609,7 +4609,7 @@
           <p:cNvPr id="3" name="">
             <a:extLst xmlns:a="http://schemas.openxmlformats.org/drawingml/2006/main">
               <a:ext uri="{FF2B5EF4-FFF2-40B4-BE49-F238E27FC236}">
-                <a16:creationId xmlns:a16="http://schemas.microsoft.com/office/drawing/2014/main" id="{CBBB784C-6D6A-4842-82CE-883F5777D570}"/>
+                <a16:creationId xmlns:a16="http://schemas.microsoft.com/office/drawing/2014/main" id="{F3EF968D-B2DC-4383-AD29-46B170710E14}"/>
               </a:ext>
             </a:extLst>
           </p:cNvPr>
@@ -4666,7 +4666,7 @@
           <p:cNvPr id="4" name="">
             <a:extLst xmlns:a="http://schemas.openxmlformats.org/drawingml/2006/main">
               <a:ext uri="{FF2B5EF4-FFF2-40B4-BE49-F238E27FC236}">
-                <a16:creationId xmlns:a16="http://schemas.microsoft.com/office/drawing/2014/main" id="{0BDEDB91-750D-4C00-BEBF-B2CBB9C66CD8}"/>
+                <a16:creationId xmlns:a16="http://schemas.microsoft.com/office/drawing/2014/main" id="{79940B99-95C9-49A9-AEEE-37341C24EFC9}"/>
               </a:ext>
             </a:extLst>
           </p:cNvPr>
@@ -4723,7 +4723,7 @@
           <p:cNvPr id="5" name="">
             <a:extLst xmlns:a="http://schemas.openxmlformats.org/drawingml/2006/main">
               <a:ext uri="{FF2B5EF4-FFF2-40B4-BE49-F238E27FC236}">
-                <a16:creationId xmlns:a16="http://schemas.microsoft.com/office/drawing/2014/main" id="{172B705C-B5AA-4BF6-88D9-CFD42125A4BF}"/>
+                <a16:creationId xmlns:a16="http://schemas.microsoft.com/office/drawing/2014/main" id="{60E3E8E7-DB34-49FB-B136-BC8DE171E3BA}"/>
               </a:ext>
             </a:extLst>
           </p:cNvPr>
@@ -4780,7 +4780,7 @@
           <p:cNvPr id="6" name="">
             <a:extLst xmlns:a="http://schemas.openxmlformats.org/drawingml/2006/main">
               <a:ext uri="{FF2B5EF4-FFF2-40B4-BE49-F238E27FC236}">
-                <a16:creationId xmlns:a16="http://schemas.microsoft.com/office/drawing/2014/main" id="{E6493215-F054-4920-8822-A2591A65A935}"/>
+                <a16:creationId xmlns:a16="http://schemas.microsoft.com/office/drawing/2014/main" id="{FE3023B5-3B96-4CD8-BD57-48F36AA4DE2D}"/>
               </a:ext>
             </a:extLst>
           </p:cNvPr>
@@ -4837,7 +4837,7 @@
           <p:cNvPr id="7" name="">
             <a:extLst xmlns:a="http://schemas.openxmlformats.org/drawingml/2006/main">
               <a:ext uri="{FF2B5EF4-FFF2-40B4-BE49-F238E27FC236}">
-                <a16:creationId xmlns:a16="http://schemas.microsoft.com/office/drawing/2014/main" id="{895E70A7-E2FE-4B76-B755-F85D49B4B3A6}"/>
+                <a16:creationId xmlns:a16="http://schemas.microsoft.com/office/drawing/2014/main" id="{F03EB0EB-695A-4006-BC81-4717126D9331}"/>
               </a:ext>
             </a:extLst>
           </p:cNvPr>
@@ -4917,7 +4917,7 @@
           <p:cNvPr id="8" name="">
             <a:extLst xmlns:a="http://schemas.openxmlformats.org/drawingml/2006/main">
               <a:ext uri="{FF2B5EF4-FFF2-40B4-BE49-F238E27FC236}">
-                <a16:creationId xmlns:a16="http://schemas.microsoft.com/office/drawing/2014/main" id="{1C131EA3-3BCD-4555-BA1F-85CFA16A9D4C}"/>
+                <a16:creationId xmlns:a16="http://schemas.microsoft.com/office/drawing/2014/main" id="{AE73056F-21E4-4487-8620-EA4C9F202373}"/>
               </a:ext>
             </a:extLst>
           </p:cNvPr>
@@ -4974,7 +4974,7 @@
           <p:cNvPr id="9" name="">
             <a:extLst xmlns:a="http://schemas.openxmlformats.org/drawingml/2006/main">
               <a:ext uri="{FF2B5EF4-FFF2-40B4-BE49-F238E27FC236}">
-                <a16:creationId xmlns:a16="http://schemas.microsoft.com/office/drawing/2014/main" id="{85EBE676-5399-455E-918A-72FD456B25D4}"/>
+                <a16:creationId xmlns:a16="http://schemas.microsoft.com/office/drawing/2014/main" id="{7B21A505-8AC9-4926-B19B-B5593348779E}"/>
               </a:ext>
             </a:extLst>
           </p:cNvPr>
@@ -5054,7 +5054,7 @@
           <p:cNvPr id="10" name="">
             <a:extLst xmlns:a="http://schemas.openxmlformats.org/drawingml/2006/main">
               <a:ext uri="{FF2B5EF4-FFF2-40B4-BE49-F238E27FC236}">
-                <a16:creationId xmlns:a16="http://schemas.microsoft.com/office/drawing/2014/main" id="{9789D560-BE50-498E-A3BF-1DDE0D56B820}"/>
+                <a16:creationId xmlns:a16="http://schemas.microsoft.com/office/drawing/2014/main" id="{3448D906-D594-4BB9-AC2C-5E40A5ADB671}"/>
               </a:ext>
             </a:extLst>
           </p:cNvPr>
@@ -5111,7 +5111,7 @@
           <p:cNvPr id="11" name="">
             <a:extLst xmlns:a="http://schemas.openxmlformats.org/drawingml/2006/main">
               <a:ext uri="{FF2B5EF4-FFF2-40B4-BE49-F238E27FC236}">
-                <a16:creationId xmlns:a16="http://schemas.microsoft.com/office/drawing/2014/main" id="{01500EFC-529A-4CBC-9EF3-E7422F6B0151}"/>
+                <a16:creationId xmlns:a16="http://schemas.microsoft.com/office/drawing/2014/main" id="{A502D5CD-A08E-4492-9CBC-11FA38B355A0}"/>
               </a:ext>
             </a:extLst>
           </p:cNvPr>
@@ -5168,7 +5168,7 @@
           <p:cNvPr id="12" name="">
             <a:extLst xmlns:a="http://schemas.openxmlformats.org/drawingml/2006/main">
               <a:ext uri="{FF2B5EF4-FFF2-40B4-BE49-F238E27FC236}">
-                <a16:creationId xmlns:a16="http://schemas.microsoft.com/office/drawing/2014/main" id="{0548C8F9-5783-4929-A17A-48735CE98B6A}"/>
+                <a16:creationId xmlns:a16="http://schemas.microsoft.com/office/drawing/2014/main" id="{AAA1A3E0-0422-4058-ACD3-66906CC512DB}"/>
               </a:ext>
             </a:extLst>
           </p:cNvPr>
@@ -5223,7 +5223,7 @@
     </p:spTree>
     <p:extLst>
       <p:ext uri="{BB962C8B-B14F-4D97-AF65-F5344CB8AC3E}">
-        <p14:creationId xmlns:p14="http://schemas.microsoft.com/office/powerpoint/2010/main" val="157549805"/>
+        <p14:creationId xmlns:p14="http://schemas.microsoft.com/office/powerpoint/2010/main" val="460827594"/>
       </p:ext>
     </p:extLst>
   </p:cSld>
@@ -5254,7 +5254,7 @@
           <p:cNvPr id="11" name="">
             <a:extLst xmlns:a="http://schemas.openxmlformats.org/drawingml/2006/main">
               <a:ext uri="{FF2B5EF4-FFF2-40B4-BE49-F238E27FC236}">
-                <a16:creationId xmlns:a16="http://schemas.microsoft.com/office/drawing/2014/main" id="{1B8AD2D6-7B11-458E-B3F2-CB8F07C0D7A0}"/>
+                <a16:creationId xmlns:a16="http://schemas.microsoft.com/office/drawing/2014/main" id="{A1EE7104-EAC8-4976-AA46-9ECB9D5B2C03}"/>
               </a:ext>
             </a:extLst>
           </p:cNvPr>
@@ -5311,7 +5311,7 @@
           <p:cNvPr id="2" name="">
             <a:extLst xmlns:a="http://schemas.openxmlformats.org/drawingml/2006/main">
               <a:ext uri="{FF2B5EF4-FFF2-40B4-BE49-F238E27FC236}">
-                <a16:creationId xmlns:a16="http://schemas.microsoft.com/office/drawing/2014/main" id="{FA2205BA-82C3-4DF2-AB17-41CBB3582385}"/>
+                <a16:creationId xmlns:a16="http://schemas.microsoft.com/office/drawing/2014/main" id="{BCE7B84A-C690-4444-9B70-60E631679FFD}"/>
               </a:ext>
             </a:extLst>
           </p:cNvPr>
@@ -5368,7 +5368,7 @@
           <p:cNvPr id="3" name="">
             <a:extLst xmlns:a="http://schemas.openxmlformats.org/drawingml/2006/main">
               <a:ext uri="{FF2B5EF4-FFF2-40B4-BE49-F238E27FC236}">
-                <a16:creationId xmlns:a16="http://schemas.microsoft.com/office/drawing/2014/main" id="{673620F9-ACBC-4E96-9EA8-45AD732245EF}"/>
+                <a16:creationId xmlns:a16="http://schemas.microsoft.com/office/drawing/2014/main" id="{27BBDC7F-F5BC-419B-8480-C3C586FE1E16}"/>
               </a:ext>
             </a:extLst>
           </p:cNvPr>
@@ -5425,7 +5425,7 @@
           <p:cNvPr id="4" name="">
             <a:extLst xmlns:a="http://schemas.openxmlformats.org/drawingml/2006/main">
               <a:ext uri="{FF2B5EF4-FFF2-40B4-BE49-F238E27FC236}">
-                <a16:creationId xmlns:a16="http://schemas.microsoft.com/office/drawing/2014/main" id="{F0202C05-E61F-45D7-A0FA-101D6358461C}"/>
+                <a16:creationId xmlns:a16="http://schemas.microsoft.com/office/drawing/2014/main" id="{1560D6CA-D7FE-476D-8A31-A0B07134584B}"/>
               </a:ext>
             </a:extLst>
           </p:cNvPr>
@@ -5482,7 +5482,7 @@
           <p:cNvPr id="5" name="">
             <a:extLst xmlns:a="http://schemas.openxmlformats.org/drawingml/2006/main">
               <a:ext uri="{FF2B5EF4-FFF2-40B4-BE49-F238E27FC236}">
-                <a16:creationId xmlns:a16="http://schemas.microsoft.com/office/drawing/2014/main" id="{41E27A0E-6788-433C-80CB-D8091F130E46}"/>
+                <a16:creationId xmlns:a16="http://schemas.microsoft.com/office/drawing/2014/main" id="{3663D282-D801-49F4-AA2E-8EA288D223EE}"/>
               </a:ext>
             </a:extLst>
           </p:cNvPr>
@@ -5539,7 +5539,7 @@
           <p:cNvPr id="6" name="">
             <a:extLst xmlns:a="http://schemas.openxmlformats.org/drawingml/2006/main">
               <a:ext uri="{FF2B5EF4-FFF2-40B4-BE49-F238E27FC236}">
-                <a16:creationId xmlns:a16="http://schemas.microsoft.com/office/drawing/2014/main" id="{B437B6E1-9A9C-4581-86B4-6B7B2D58863E}"/>
+                <a16:creationId xmlns:a16="http://schemas.microsoft.com/office/drawing/2014/main" id="{2FF94933-CB26-48F3-A0BF-21E3FCD9E49A}"/>
               </a:ext>
             </a:extLst>
           </p:cNvPr>
@@ -5596,7 +5596,7 @@
           <p:cNvPr id="7" name="">
             <a:extLst xmlns:a="http://schemas.openxmlformats.org/drawingml/2006/main">
               <a:ext uri="{FF2B5EF4-FFF2-40B4-BE49-F238E27FC236}">
-                <a16:creationId xmlns:a16="http://schemas.microsoft.com/office/drawing/2014/main" id="{84250B97-69CF-4A41-BCCE-362E9C276A09}"/>
+                <a16:creationId xmlns:a16="http://schemas.microsoft.com/office/drawing/2014/main" id="{9CB743FA-F6AF-4081-B77D-507B7E61DF24}"/>
               </a:ext>
             </a:extLst>
           </p:cNvPr>
@@ -5653,7 +5653,7 @@
           <p:cNvPr id="8" name="">
             <a:extLst xmlns:a="http://schemas.openxmlformats.org/drawingml/2006/main">
               <a:ext uri="{FF2B5EF4-FFF2-40B4-BE49-F238E27FC236}">
-                <a16:creationId xmlns:a16="http://schemas.microsoft.com/office/drawing/2014/main" id="{9D908753-DA50-4484-A1DF-E708DC14E667}"/>
+                <a16:creationId xmlns:a16="http://schemas.microsoft.com/office/drawing/2014/main" id="{2B78F707-C421-449C-9DFD-9FCEC2FB419F}"/>
               </a:ext>
             </a:extLst>
           </p:cNvPr>
@@ -5700,7 +5700,7 @@
                 <a:ea typeface="Helvetica Neue"/>
                 <a:cs typeface="Helvetica Neue"/>
               </a:rPr>
-              <a:t>youtu.be/CYLWG-bSSB8</a:t>
+              <a:t>youtu.be/0XljJqixhMU</a:t>
             </a:r>
           </a:p>
         </p:txBody>
@@ -5710,7 +5710,7 @@
           <p:cNvPr id="9" name="">
             <a:extLst xmlns:a="http://schemas.openxmlformats.org/drawingml/2006/main">
               <a:ext uri="{FF2B5EF4-FFF2-40B4-BE49-F238E27FC236}">
-                <a16:creationId xmlns:a16="http://schemas.microsoft.com/office/drawing/2014/main" id="{5ADDDD54-8D7B-456F-9524-8E28D94B0868}"/>
+                <a16:creationId xmlns:a16="http://schemas.microsoft.com/office/drawing/2014/main" id="{240C74B0-32AB-4189-8167-348225831556}"/>
               </a:ext>
             </a:extLst>
           </p:cNvPr>
@@ -5767,7 +5767,7 @@
           <p:cNvPr id="10" name="">
             <a:extLst xmlns:a="http://schemas.openxmlformats.org/drawingml/2006/main">
               <a:ext uri="{FF2B5EF4-FFF2-40B4-BE49-F238E27FC236}">
-                <a16:creationId xmlns:a16="http://schemas.microsoft.com/office/drawing/2014/main" id="{A4B15E43-A12C-4770-BF64-1ECE0ADF299D}"/>
+                <a16:creationId xmlns:a16="http://schemas.microsoft.com/office/drawing/2014/main" id="{488AC2E6-8613-436C-B1C0-997790DE0F97}"/>
               </a:ext>
             </a:extLst>
           </p:cNvPr>
@@ -5814,7 +5814,7 @@
                 <a:ea typeface="Helvetica Neue"/>
                 <a:cs typeface="Helvetica Neue"/>
               </a:rPr>
-              <a:t>YouTube public. X post published. DoraHacks visibility awaits moderation.</a:t>
+              <a:t>YouTube and hosted playback verified. Correction reply published.</a:t>
             </a:r>
           </a:p>
         </p:txBody>
@@ -5822,7 +5822,7 @@
     </p:spTree>
     <p:extLst>
       <p:ext uri="{BB962C8B-B14F-4D97-AF65-F5344CB8AC3E}">
-        <p14:creationId xmlns:p14="http://schemas.microsoft.com/office/powerpoint/2010/main" val="154320941"/>
+        <p14:creationId xmlns:p14="http://schemas.microsoft.com/office/powerpoint/2010/main" val="2046991558"/>
       </p:ext>
     </p:extLst>
   </p:cSld>
